--- a/slides/week01/AI모빌리티_01_오리엔테이션.pptx
+++ b/slides/week01/AI모빌리티_01_오리엔테이션.pptx
@@ -32,8 +32,6 @@
     <p:sldId id="280" r:id="rId31"/>
     <p:sldId id="281" r:id="rId32"/>
     <p:sldId id="282" r:id="rId33"/>
-    <p:sldId id="283" r:id="rId34"/>
-    <p:sldId id="284" r:id="rId35"/>
   </p:sldIdLst>
   <p:notesMasterIdLst>
     <p:notesMasterId r:id="rId15"/>
@@ -554,706 +552,6 @@
 </p:notes>
 </file>
 
-<file path=ppt/notesSlides/notesSlide10.xml><?xml version="1.0" encoding="utf-8"?>
-<p:notes xmlns:a="http://schemas.openxmlformats.org/drawingml/2006/main" xmlns:p="http://schemas.openxmlformats.org/presentationml/2006/main" xmlns:r="http://schemas.openxmlformats.org/officeDocument/2006/relationships">
-  <p:cSld>
-    <p:spTree>
-      <p:nvGrpSpPr>
-        <p:cNvPr id="1" name=""/>
-        <p:cNvGrpSpPr/>
-        <p:nvPr/>
-      </p:nvGrpSpPr>
-      <p:grpSpPr>
-        <a:xfrm>
-          <a:off x="0" y="0"/>
-          <a:ext cx="0" cy="0"/>
-          <a:chOff x="0" y="0"/>
-          <a:chExt cx="0" cy="0"/>
-        </a:xfrm>
-      </p:grpSpPr>
-      <p:sp>
-        <p:nvSpPr>
-          <p:cNvPr id="2" name="Slide Image Placeholder 1"/>
-          <p:cNvSpPr>
-            <a:spLocks noGrp="1"/>
-          </p:cNvSpPr>
-          <p:nvPr>
-            <p:ph type="sldImg" idx="2"/>
-          </p:nvPr>
-        </p:nvSpPr>
-        <p:spPr/>
-      </p:sp>
-      <p:sp>
-        <p:nvSpPr>
-          <p:cNvPr id="3" name="Notes Placeholder 2"/>
-          <p:cNvSpPr>
-            <a:spLocks noGrp="1"/>
-          </p:cNvSpPr>
-          <p:nvPr>
-            <p:ph type="body" idx="3" sz="quarter"/>
-          </p:nvPr>
-        </p:nvSpPr>
-        <p:spPr/>
-        <p:txBody>
-          <a:bodyPr/>
-          <a:lstStyle/>
-          <a:p>
-            <a:r>
-              <a:t>교재 예제를 따라간 뒤 과제에서는 교통 데이터에 적용</a:t>
-            </a:r>
-          </a:p>
-        </p:txBody>
-      </p:sp>
-      <p:sp>
-        <p:nvSpPr>
-          <p:cNvPr id="4" name="Slide Number Placeholder 3"/>
-          <p:cNvSpPr>
-            <a:spLocks noGrp="1"/>
-          </p:cNvSpPr>
-          <p:nvPr>
-            <p:ph type="sldNum" idx="5" sz="quarter"/>
-          </p:nvPr>
-        </p:nvSpPr>
-        <p:spPr/>
-      </p:sp>
-    </p:spTree>
-  </p:cSld>
-  <p:clrMapOvr>
-    <a:masterClrMapping/>
-  </p:clrMapOvr>
-</p:notes>
-</file>
-
-<file path=ppt/notesSlides/notesSlide11.xml><?xml version="1.0" encoding="utf-8"?>
-<p:notes xmlns:a="http://schemas.openxmlformats.org/drawingml/2006/main" xmlns:p="http://schemas.openxmlformats.org/presentationml/2006/main" xmlns:r="http://schemas.openxmlformats.org/officeDocument/2006/relationships">
-  <p:cSld>
-    <p:spTree>
-      <p:nvGrpSpPr>
-        <p:cNvPr id="1" name=""/>
-        <p:cNvGrpSpPr/>
-        <p:nvPr/>
-      </p:nvGrpSpPr>
-      <p:grpSpPr>
-        <a:xfrm>
-          <a:off x="0" y="0"/>
-          <a:ext cx="0" cy="0"/>
-          <a:chOff x="0" y="0"/>
-          <a:chExt cx="0" cy="0"/>
-        </a:xfrm>
-      </p:grpSpPr>
-      <p:sp>
-        <p:nvSpPr>
-          <p:cNvPr id="2" name="Slide Image Placeholder 1"/>
-          <p:cNvSpPr>
-            <a:spLocks noGrp="1"/>
-          </p:cNvSpPr>
-          <p:nvPr>
-            <p:ph type="sldImg" idx="2"/>
-          </p:nvPr>
-        </p:nvSpPr>
-        <p:spPr/>
-      </p:sp>
-      <p:sp>
-        <p:nvSpPr>
-          <p:cNvPr id="3" name="Notes Placeholder 2"/>
-          <p:cNvSpPr>
-            <a:spLocks noGrp="1"/>
-          </p:cNvSpPr>
-          <p:nvPr>
-            <p:ph type="body" idx="3" sz="quarter"/>
-          </p:nvPr>
-        </p:nvSpPr>
-        <p:spPr/>
-        <p:txBody>
-          <a:bodyPr/>
-          <a:lstStyle/>
-          <a:p>
-            <a:r>
-              <a:t>라이브러리 사용에 앞서 순전파와 역전파의 계산 과정 확인</a:t>
-            </a:r>
-          </a:p>
-        </p:txBody>
-      </p:sp>
-      <p:sp>
-        <p:nvSpPr>
-          <p:cNvPr id="4" name="Slide Number Placeholder 3"/>
-          <p:cNvSpPr>
-            <a:spLocks noGrp="1"/>
-          </p:cNvSpPr>
-          <p:nvPr>
-            <p:ph type="sldNum" idx="5" sz="quarter"/>
-          </p:nvPr>
-        </p:nvSpPr>
-        <p:spPr/>
-      </p:sp>
-    </p:spTree>
-  </p:cSld>
-  <p:clrMapOvr>
-    <a:masterClrMapping/>
-  </p:clrMapOvr>
-</p:notes>
-</file>
-
-<file path=ppt/notesSlides/notesSlide12.xml><?xml version="1.0" encoding="utf-8"?>
-<p:notes xmlns:a="http://schemas.openxmlformats.org/drawingml/2006/main" xmlns:p="http://schemas.openxmlformats.org/presentationml/2006/main" xmlns:r="http://schemas.openxmlformats.org/officeDocument/2006/relationships">
-  <p:cSld>
-    <p:spTree>
-      <p:nvGrpSpPr>
-        <p:cNvPr id="1" name=""/>
-        <p:cNvGrpSpPr/>
-        <p:nvPr/>
-      </p:nvGrpSpPr>
-      <p:grpSpPr>
-        <a:xfrm>
-          <a:off x="0" y="0"/>
-          <a:ext cx="0" cy="0"/>
-          <a:chOff x="0" y="0"/>
-          <a:chExt cx="0" cy="0"/>
-        </a:xfrm>
-      </p:grpSpPr>
-      <p:sp>
-        <p:nvSpPr>
-          <p:cNvPr id="2" name="Slide Image Placeholder 1"/>
-          <p:cNvSpPr>
-            <a:spLocks noGrp="1"/>
-          </p:cNvSpPr>
-          <p:nvPr>
-            <p:ph type="sldImg" idx="2"/>
-          </p:nvPr>
-        </p:nvSpPr>
-        <p:spPr/>
-      </p:sp>
-      <p:sp>
-        <p:nvSpPr>
-          <p:cNvPr id="3" name="Notes Placeholder 2"/>
-          <p:cNvSpPr>
-            <a:spLocks noGrp="1"/>
-          </p:cNvSpPr>
-          <p:nvPr>
-            <p:ph type="body" idx="3" sz="quarter"/>
-          </p:nvPr>
-        </p:nvSpPr>
-        <p:spPr/>
-        <p:txBody>
-          <a:bodyPr/>
-          <a:lstStyle/>
-          <a:p>
-            <a:r>
-              <a:t>정형 데이터에서 트리 기반 모델과 신경망의 성능 비교</a:t>
-            </a:r>
-          </a:p>
-        </p:txBody>
-      </p:sp>
-      <p:sp>
-        <p:nvSpPr>
-          <p:cNvPr id="4" name="Slide Number Placeholder 3"/>
-          <p:cNvSpPr>
-            <a:spLocks noGrp="1"/>
-          </p:cNvSpPr>
-          <p:nvPr>
-            <p:ph type="sldNum" idx="5" sz="quarter"/>
-          </p:nvPr>
-        </p:nvSpPr>
-        <p:spPr/>
-      </p:sp>
-    </p:spTree>
-  </p:cSld>
-  <p:clrMapOvr>
-    <a:masterClrMapping/>
-  </p:clrMapOvr>
-</p:notes>
-</file>
-
-<file path=ppt/notesSlides/notesSlide13.xml><?xml version="1.0" encoding="utf-8"?>
-<p:notes xmlns:a="http://schemas.openxmlformats.org/drawingml/2006/main" xmlns:p="http://schemas.openxmlformats.org/presentationml/2006/main" xmlns:r="http://schemas.openxmlformats.org/officeDocument/2006/relationships">
-  <p:cSld>
-    <p:spTree>
-      <p:nvGrpSpPr>
-        <p:cNvPr id="1" name=""/>
-        <p:cNvGrpSpPr/>
-        <p:nvPr/>
-      </p:nvGrpSpPr>
-      <p:grpSpPr>
-        <a:xfrm>
-          <a:off x="0" y="0"/>
-          <a:ext cx="0" cy="0"/>
-          <a:chOff x="0" y="0"/>
-          <a:chExt cx="0" cy="0"/>
-        </a:xfrm>
-      </p:grpSpPr>
-      <p:sp>
-        <p:nvSpPr>
-          <p:cNvPr id="2" name="Slide Image Placeholder 1"/>
-          <p:cNvSpPr>
-            <a:spLocks noGrp="1"/>
-          </p:cNvSpPr>
-          <p:nvPr>
-            <p:ph type="sldImg" idx="2"/>
-          </p:nvPr>
-        </p:nvSpPr>
-        <p:spPr/>
-      </p:sp>
-      <p:sp>
-        <p:nvSpPr>
-          <p:cNvPr id="3" name="Notes Placeholder 2"/>
-          <p:cNvSpPr>
-            <a:spLocks noGrp="1"/>
-          </p:cNvSpPr>
-          <p:nvPr>
-            <p:ph type="body" idx="3" sz="quarter"/>
-          </p:nvPr>
-        </p:nvSpPr>
-        <p:spPr/>
-        <p:txBody>
-          <a:bodyPr/>
-          <a:lstStyle/>
-          <a:p>
-            <a:r>
-              <a:t>두 권 모두 주교재. 다음 주부터 『핸즈온 머신러닝 3판』 사용</a:t>
-            </a:r>
-          </a:p>
-        </p:txBody>
-      </p:sp>
-      <p:sp>
-        <p:nvSpPr>
-          <p:cNvPr id="4" name="Slide Number Placeholder 3"/>
-          <p:cNvSpPr>
-            <a:spLocks noGrp="1"/>
-          </p:cNvSpPr>
-          <p:nvPr>
-            <p:ph type="sldNum" idx="5" sz="quarter"/>
-          </p:nvPr>
-        </p:nvSpPr>
-        <p:spPr/>
-      </p:sp>
-    </p:spTree>
-  </p:cSld>
-  <p:clrMapOvr>
-    <a:masterClrMapping/>
-  </p:clrMapOvr>
-</p:notes>
-</file>
-
-<file path=ppt/notesSlides/notesSlide14.xml><?xml version="1.0" encoding="utf-8"?>
-<p:notes xmlns:a="http://schemas.openxmlformats.org/drawingml/2006/main" xmlns:p="http://schemas.openxmlformats.org/presentationml/2006/main" xmlns:r="http://schemas.openxmlformats.org/officeDocument/2006/relationships">
-  <p:cSld>
-    <p:spTree>
-      <p:nvGrpSpPr>
-        <p:cNvPr id="1" name=""/>
-        <p:cNvGrpSpPr/>
-        <p:nvPr/>
-      </p:nvGrpSpPr>
-      <p:grpSpPr>
-        <a:xfrm>
-          <a:off x="0" y="0"/>
-          <a:ext cx="0" cy="0"/>
-          <a:chOff x="0" y="0"/>
-          <a:chExt cx="0" cy="0"/>
-        </a:xfrm>
-      </p:grpSpPr>
-      <p:sp>
-        <p:nvSpPr>
-          <p:cNvPr id="2" name="Slide Image Placeholder 1"/>
-          <p:cNvSpPr>
-            <a:spLocks noGrp="1"/>
-          </p:cNvSpPr>
-          <p:nvPr>
-            <p:ph type="sldImg" idx="2"/>
-          </p:nvPr>
-        </p:nvSpPr>
-        <p:spPr/>
-      </p:sp>
-      <p:sp>
-        <p:nvSpPr>
-          <p:cNvPr id="3" name="Notes Placeholder 2"/>
-          <p:cNvSpPr>
-            <a:spLocks noGrp="1"/>
-          </p:cNvSpPr>
-          <p:nvPr>
-            <p:ph type="body" idx="3" sz="quarter"/>
-          </p:nvPr>
-        </p:nvSpPr>
-        <p:spPr/>
-        <p:txBody>
-          <a:bodyPr/>
-          <a:lstStyle/>
-          <a:p>
-            <a:r>
-              <a:t>기말고사 대신 팀 프로젝트 발표·보고서로 평가</a:t>
-            </a:r>
-          </a:p>
-        </p:txBody>
-      </p:sp>
-      <p:sp>
-        <p:nvSpPr>
-          <p:cNvPr id="4" name="Slide Number Placeholder 3"/>
-          <p:cNvSpPr>
-            <a:spLocks noGrp="1"/>
-          </p:cNvSpPr>
-          <p:nvPr>
-            <p:ph type="sldNum" idx="5" sz="quarter"/>
-          </p:nvPr>
-        </p:nvSpPr>
-        <p:spPr/>
-      </p:sp>
-    </p:spTree>
-  </p:cSld>
-  <p:clrMapOvr>
-    <a:masterClrMapping/>
-  </p:clrMapOvr>
-</p:notes>
-</file>
-
-<file path=ppt/notesSlides/notesSlide15.xml><?xml version="1.0" encoding="utf-8"?>
-<p:notes xmlns:a="http://schemas.openxmlformats.org/drawingml/2006/main" xmlns:p="http://schemas.openxmlformats.org/presentationml/2006/main" xmlns:r="http://schemas.openxmlformats.org/officeDocument/2006/relationships">
-  <p:cSld>
-    <p:spTree>
-      <p:nvGrpSpPr>
-        <p:cNvPr id="1" name=""/>
-        <p:cNvGrpSpPr/>
-        <p:nvPr/>
-      </p:nvGrpSpPr>
-      <p:grpSpPr>
-        <a:xfrm>
-          <a:off x="0" y="0"/>
-          <a:ext cx="0" cy="0"/>
-          <a:chOff x="0" y="0"/>
-          <a:chExt cx="0" cy="0"/>
-        </a:xfrm>
-      </p:grpSpPr>
-      <p:sp>
-        <p:nvSpPr>
-          <p:cNvPr id="2" name="Slide Image Placeholder 1"/>
-          <p:cNvSpPr>
-            <a:spLocks noGrp="1"/>
-          </p:cNvSpPr>
-          <p:nvPr>
-            <p:ph type="sldImg" idx="2"/>
-          </p:nvPr>
-        </p:nvSpPr>
-        <p:spPr/>
-      </p:sp>
-      <p:sp>
-        <p:nvSpPr>
-          <p:cNvPr id="3" name="Notes Placeholder 2"/>
-          <p:cNvSpPr>
-            <a:spLocks noGrp="1"/>
-          </p:cNvSpPr>
-          <p:nvPr>
-            <p:ph type="body" idx="3" sz="quarter"/>
-          </p:nvPr>
-        </p:nvSpPr>
-        <p:spPr/>
-        <p:txBody>
-          <a:bodyPr/>
-          <a:lstStyle/>
-          <a:p>
-            <a:r>
-              <a:t>12~13주차 실습을 프로젝트 준비와 연결</a:t>
-            </a:r>
-          </a:p>
-        </p:txBody>
-      </p:sp>
-      <p:sp>
-        <p:nvSpPr>
-          <p:cNvPr id="4" name="Slide Number Placeholder 3"/>
-          <p:cNvSpPr>
-            <a:spLocks noGrp="1"/>
-          </p:cNvSpPr>
-          <p:nvPr>
-            <p:ph type="sldNum" idx="5" sz="quarter"/>
-          </p:nvPr>
-        </p:nvSpPr>
-        <p:spPr/>
-      </p:sp>
-    </p:spTree>
-  </p:cSld>
-  <p:clrMapOvr>
-    <a:masterClrMapping/>
-  </p:clrMapOvr>
-</p:notes>
-</file>
-
-<file path=ppt/notesSlides/notesSlide16.xml><?xml version="1.0" encoding="utf-8"?>
-<p:notes xmlns:a="http://schemas.openxmlformats.org/drawingml/2006/main" xmlns:p="http://schemas.openxmlformats.org/presentationml/2006/main" xmlns:r="http://schemas.openxmlformats.org/officeDocument/2006/relationships">
-  <p:cSld>
-    <p:spTree>
-      <p:nvGrpSpPr>
-        <p:cNvPr id="1" name=""/>
-        <p:cNvGrpSpPr/>
-        <p:nvPr/>
-      </p:nvGrpSpPr>
-      <p:grpSpPr>
-        <a:xfrm>
-          <a:off x="0" y="0"/>
-          <a:ext cx="0" cy="0"/>
-          <a:chOff x="0" y="0"/>
-          <a:chExt cx="0" cy="0"/>
-        </a:xfrm>
-      </p:grpSpPr>
-      <p:sp>
-        <p:nvSpPr>
-          <p:cNvPr id="2" name="Slide Image Placeholder 1"/>
-          <p:cNvSpPr>
-            <a:spLocks noGrp="1"/>
-          </p:cNvSpPr>
-          <p:nvPr>
-            <p:ph type="sldImg" idx="2"/>
-          </p:nvPr>
-        </p:nvSpPr>
-        <p:spPr/>
-      </p:sp>
-      <p:sp>
-        <p:nvSpPr>
-          <p:cNvPr id="3" name="Notes Placeholder 2"/>
-          <p:cNvSpPr>
-            <a:spLocks noGrp="1"/>
-          </p:cNvSpPr>
-          <p:nvPr>
-            <p:ph type="body" idx="3" sz="quarter"/>
-          </p:nvPr>
-        </p:nvSpPr>
-        <p:spPr/>
-        <p:txBody>
-          <a:bodyPr/>
-          <a:lstStyle/>
-          <a:p>
-            <a:r>
-              <a:t>HW2에서는 핸즈온 Ch2의 작업 흐름을 교통 데이터로 재현</a:t>
-            </a:r>
-          </a:p>
-        </p:txBody>
-      </p:sp>
-      <p:sp>
-        <p:nvSpPr>
-          <p:cNvPr id="4" name="Slide Number Placeholder 3"/>
-          <p:cNvSpPr>
-            <a:spLocks noGrp="1"/>
-          </p:cNvSpPr>
-          <p:nvPr>
-            <p:ph type="sldNum" idx="5" sz="quarter"/>
-          </p:nvPr>
-        </p:nvSpPr>
-        <p:spPr/>
-      </p:sp>
-    </p:spTree>
-  </p:cSld>
-  <p:clrMapOvr>
-    <a:masterClrMapping/>
-  </p:clrMapOvr>
-</p:notes>
-</file>
-
-<file path=ppt/notesSlides/notesSlide17.xml><?xml version="1.0" encoding="utf-8"?>
-<p:notes xmlns:a="http://schemas.openxmlformats.org/drawingml/2006/main" xmlns:p="http://schemas.openxmlformats.org/presentationml/2006/main" xmlns:r="http://schemas.openxmlformats.org/officeDocument/2006/relationships">
-  <p:cSld>
-    <p:spTree>
-      <p:nvGrpSpPr>
-        <p:cNvPr id="1" name=""/>
-        <p:cNvGrpSpPr/>
-        <p:nvPr/>
-      </p:nvGrpSpPr>
-      <p:grpSpPr>
-        <a:xfrm>
-          <a:off x="0" y="0"/>
-          <a:ext cx="0" cy="0"/>
-          <a:chOff x="0" y="0"/>
-          <a:chExt cx="0" cy="0"/>
-        </a:xfrm>
-      </p:grpSpPr>
-      <p:sp>
-        <p:nvSpPr>
-          <p:cNvPr id="2" name="Slide Image Placeholder 1"/>
-          <p:cNvSpPr>
-            <a:spLocks noGrp="1"/>
-          </p:cNvSpPr>
-          <p:nvPr>
-            <p:ph type="sldImg" idx="2"/>
-          </p:nvPr>
-        </p:nvSpPr>
-        <p:spPr/>
-      </p:sp>
-      <p:sp>
-        <p:nvSpPr>
-          <p:cNvPr id="3" name="Notes Placeholder 2"/>
-          <p:cNvSpPr>
-            <a:spLocks noGrp="1"/>
-          </p:cNvSpPr>
-          <p:nvPr>
-            <p:ph type="body" idx="3" sz="quarter"/>
-          </p:nvPr>
-        </p:nvSpPr>
-        <p:spPr/>
-        <p:txBody>
-          <a:bodyPr/>
-          <a:lstStyle/>
-          <a:p>
-            <a:r>
-              <a:t>생성형 AI 사용 여부보다 결과를 검증하고 설명하는 능력에 초점</a:t>
-            </a:r>
-          </a:p>
-        </p:txBody>
-      </p:sp>
-      <p:sp>
-        <p:nvSpPr>
-          <p:cNvPr id="4" name="Slide Number Placeholder 3"/>
-          <p:cNvSpPr>
-            <a:spLocks noGrp="1"/>
-          </p:cNvSpPr>
-          <p:nvPr>
-            <p:ph type="sldNum" idx="5" sz="quarter"/>
-          </p:nvPr>
-        </p:nvSpPr>
-        <p:spPr/>
-      </p:sp>
-    </p:spTree>
-  </p:cSld>
-  <p:clrMapOvr>
-    <a:masterClrMapping/>
-  </p:clrMapOvr>
-</p:notes>
-</file>
-
-<file path=ppt/notesSlides/notesSlide18.xml><?xml version="1.0" encoding="utf-8"?>
-<p:notes xmlns:a="http://schemas.openxmlformats.org/drawingml/2006/main" xmlns:p="http://schemas.openxmlformats.org/presentationml/2006/main" xmlns:r="http://schemas.openxmlformats.org/officeDocument/2006/relationships">
-  <p:cSld>
-    <p:spTree>
-      <p:nvGrpSpPr>
-        <p:cNvPr id="1" name=""/>
-        <p:cNvGrpSpPr/>
-        <p:nvPr/>
-      </p:nvGrpSpPr>
-      <p:grpSpPr>
-        <a:xfrm>
-          <a:off x="0" y="0"/>
-          <a:ext cx="0" cy="0"/>
-          <a:chOff x="0" y="0"/>
-          <a:chExt cx="0" cy="0"/>
-        </a:xfrm>
-      </p:grpSpPr>
-      <p:sp>
-        <p:nvSpPr>
-          <p:cNvPr id="2" name="Slide Image Placeholder 1"/>
-          <p:cNvSpPr>
-            <a:spLocks noGrp="1"/>
-          </p:cNvSpPr>
-          <p:nvPr>
-            <p:ph type="sldImg" idx="2"/>
-          </p:nvPr>
-        </p:nvSpPr>
-        <p:spPr/>
-      </p:sp>
-      <p:sp>
-        <p:nvSpPr>
-          <p:cNvPr id="3" name="Notes Placeholder 2"/>
-          <p:cNvSpPr>
-            <a:spLocks noGrp="1"/>
-          </p:cNvSpPr>
-          <p:nvPr>
-            <p:ph type="body" idx="3" sz="quarter"/>
-          </p:nvPr>
-        </p:nvSpPr>
-        <p:spPr/>
-        <p:txBody>
-          <a:bodyPr/>
-          <a:lstStyle/>
-          <a:p>
-            <a:r>
-              <a:t>수강 정정 기간: 9/1~9/7</a:t>
-            </a:r>
-          </a:p>
-        </p:txBody>
-      </p:sp>
-      <p:sp>
-        <p:nvSpPr>
-          <p:cNvPr id="4" name="Slide Number Placeholder 3"/>
-          <p:cNvSpPr>
-            <a:spLocks noGrp="1"/>
-          </p:cNvSpPr>
-          <p:nvPr>
-            <p:ph type="sldNum" idx="5" sz="quarter"/>
-          </p:nvPr>
-        </p:nvSpPr>
-        <p:spPr/>
-      </p:sp>
-    </p:spTree>
-  </p:cSld>
-  <p:clrMapOvr>
-    <a:masterClrMapping/>
-  </p:clrMapOvr>
-</p:notes>
-</file>
-
-<file path=ppt/notesSlides/notesSlide19.xml><?xml version="1.0" encoding="utf-8"?>
-<p:notes xmlns:a="http://schemas.openxmlformats.org/drawingml/2006/main" xmlns:p="http://schemas.openxmlformats.org/presentationml/2006/main" xmlns:r="http://schemas.openxmlformats.org/officeDocument/2006/relationships">
-  <p:cSld>
-    <p:spTree>
-      <p:nvGrpSpPr>
-        <p:cNvPr id="1" name=""/>
-        <p:cNvGrpSpPr/>
-        <p:nvPr/>
-      </p:nvGrpSpPr>
-      <p:grpSpPr>
-        <a:xfrm>
-          <a:off x="0" y="0"/>
-          <a:ext cx="0" cy="0"/>
-          <a:chOff x="0" y="0"/>
-          <a:chExt cx="0" cy="0"/>
-        </a:xfrm>
-      </p:grpSpPr>
-      <p:sp>
-        <p:nvSpPr>
-          <p:cNvPr id="2" name="Slide Image Placeholder 1"/>
-          <p:cNvSpPr>
-            <a:spLocks noGrp="1"/>
-          </p:cNvSpPr>
-          <p:nvPr>
-            <p:ph type="sldImg" idx="2"/>
-          </p:nvPr>
-        </p:nvSpPr>
-        <p:spPr/>
-      </p:sp>
-      <p:sp>
-        <p:nvSpPr>
-          <p:cNvPr id="3" name="Notes Placeholder 2"/>
-          <p:cNvSpPr>
-            <a:spLocks noGrp="1"/>
-          </p:cNvSpPr>
-          <p:nvPr>
-            <p:ph type="body" idx="3" sz="quarter"/>
-          </p:nvPr>
-        </p:nvSpPr>
-        <p:spPr/>
-        <p:txBody>
-          <a:bodyPr/>
-          <a:lstStyle/>
-          <a:p>
-            <a:r>
-              <a:t>수요일 실습 시간에 Python 환경 점검</a:t>
-            </a:r>
-          </a:p>
-        </p:txBody>
-      </p:sp>
-      <p:sp>
-        <p:nvSpPr>
-          <p:cNvPr id="4" name="Slide Number Placeholder 3"/>
-          <p:cNvSpPr>
-            <a:spLocks noGrp="1"/>
-          </p:cNvSpPr>
-          <p:nvPr>
-            <p:ph type="sldNum" idx="5" sz="quarter"/>
-          </p:nvPr>
-        </p:nvSpPr>
-        <p:spPr/>
-      </p:sp>
-    </p:spTree>
-  </p:cSld>
-  <p:clrMapOvr>
-    <a:masterClrMapping/>
-  </p:clrMapOvr>
-</p:notes>
-</file>
-
 <file path=ppt/notesSlides/notesSlide2.xml><?xml version="1.0" encoding="utf-8"?>
 <p:notes xmlns:a="http://schemas.openxmlformats.org/drawingml/2006/main" xmlns:p="http://schemas.openxmlformats.org/presentationml/2006/main" xmlns:r="http://schemas.openxmlformats.org/officeDocument/2006/relationships">
   <p:cSld>
@@ -1299,147 +597,7 @@
           <a:lstStyle/>
           <a:p>
             <a:r>
-              <a:t>모델 사용 → 주요 연산 구현 → 교통 문제 적용</a:t>
-            </a:r>
-          </a:p>
-        </p:txBody>
-      </p:sp>
-      <p:sp>
-        <p:nvSpPr>
-          <p:cNvPr id="4" name="Slide Number Placeholder 3"/>
-          <p:cNvSpPr>
-            <a:spLocks noGrp="1"/>
-          </p:cNvSpPr>
-          <p:nvPr>
-            <p:ph type="sldNum" idx="5" sz="quarter"/>
-          </p:nvPr>
-        </p:nvSpPr>
-        <p:spPr/>
-      </p:sp>
-    </p:spTree>
-  </p:cSld>
-  <p:clrMapOvr>
-    <a:masterClrMapping/>
-  </p:clrMapOvr>
-</p:notes>
-</file>
-
-<file path=ppt/notesSlides/notesSlide20.xml><?xml version="1.0" encoding="utf-8"?>
-<p:notes xmlns:a="http://schemas.openxmlformats.org/drawingml/2006/main" xmlns:p="http://schemas.openxmlformats.org/presentationml/2006/main" xmlns:r="http://schemas.openxmlformats.org/officeDocument/2006/relationships">
-  <p:cSld>
-    <p:spTree>
-      <p:nvGrpSpPr>
-        <p:cNvPr id="1" name=""/>
-        <p:cNvGrpSpPr/>
-        <p:nvPr/>
-      </p:nvGrpSpPr>
-      <p:grpSpPr>
-        <a:xfrm>
-          <a:off x="0" y="0"/>
-          <a:ext cx="0" cy="0"/>
-          <a:chOff x="0" y="0"/>
-          <a:chExt cx="0" cy="0"/>
-        </a:xfrm>
-      </p:grpSpPr>
-      <p:sp>
-        <p:nvSpPr>
-          <p:cNvPr id="2" name="Slide Image Placeholder 1"/>
-          <p:cNvSpPr>
-            <a:spLocks noGrp="1"/>
-          </p:cNvSpPr>
-          <p:nvPr>
-            <p:ph type="sldImg" idx="2"/>
-          </p:nvPr>
-        </p:nvSpPr>
-        <p:spPr/>
-      </p:sp>
-      <p:sp>
-        <p:nvSpPr>
-          <p:cNvPr id="3" name="Notes Placeholder 2"/>
-          <p:cNvSpPr>
-            <a:spLocks noGrp="1"/>
-          </p:cNvSpPr>
-          <p:nvPr>
-            <p:ph type="body" idx="3" sz="quarter"/>
-          </p:nvPr>
-        </p:nvSpPr>
-        <p:spPr/>
-        <p:txBody>
-          <a:bodyPr/>
-          <a:lstStyle/>
-          <a:p>
-            <a:r>
-              <a:t>패키지 버전보다 import 성공 여부 확인</a:t>
-            </a:r>
-          </a:p>
-        </p:txBody>
-      </p:sp>
-      <p:sp>
-        <p:nvSpPr>
-          <p:cNvPr id="4" name="Slide Number Placeholder 3"/>
-          <p:cNvSpPr>
-            <a:spLocks noGrp="1"/>
-          </p:cNvSpPr>
-          <p:nvPr>
-            <p:ph type="sldNum" idx="5" sz="quarter"/>
-          </p:nvPr>
-        </p:nvSpPr>
-        <p:spPr/>
-      </p:sp>
-    </p:spTree>
-  </p:cSld>
-  <p:clrMapOvr>
-    <a:masterClrMapping/>
-  </p:clrMapOvr>
-</p:notes>
-</file>
-
-<file path=ppt/notesSlides/notesSlide21.xml><?xml version="1.0" encoding="utf-8"?>
-<p:notes xmlns:a="http://schemas.openxmlformats.org/drawingml/2006/main" xmlns:p="http://schemas.openxmlformats.org/presentationml/2006/main" xmlns:r="http://schemas.openxmlformats.org/officeDocument/2006/relationships">
-  <p:cSld>
-    <p:spTree>
-      <p:nvGrpSpPr>
-        <p:cNvPr id="1" name=""/>
-        <p:cNvGrpSpPr/>
-        <p:nvPr/>
-      </p:nvGrpSpPr>
-      <p:grpSpPr>
-        <a:xfrm>
-          <a:off x="0" y="0"/>
-          <a:ext cx="0" cy="0"/>
-          <a:chOff x="0" y="0"/>
-          <a:chExt cx="0" cy="0"/>
-        </a:xfrm>
-      </p:grpSpPr>
-      <p:sp>
-        <p:nvSpPr>
-          <p:cNvPr id="2" name="Slide Image Placeholder 1"/>
-          <p:cNvSpPr>
-            <a:spLocks noGrp="1"/>
-          </p:cNvSpPr>
-          <p:nvPr>
-            <p:ph type="sldImg" idx="2"/>
-          </p:nvPr>
-        </p:nvSpPr>
-        <p:spPr/>
-      </p:sp>
-      <p:sp>
-        <p:nvSpPr>
-          <p:cNvPr id="3" name="Notes Placeholder 2"/>
-          <p:cNvSpPr>
-            <a:spLocks noGrp="1"/>
-          </p:cNvSpPr>
-          <p:nvPr>
-            <p:ph type="body" idx="3" sz="quarter"/>
-          </p:nvPr>
-        </p:nvSpPr>
-        <p:spPr/>
-        <p:txBody>
-          <a:bodyPr/>
-          <a:lstStyle/>
-          <a:p>
-            <a:r>
-              <a:t>다음 주 HW1(데이터 정제·시각화) 배포</a:t>
+              <a:t>AI 모빌리티에서 다룬 ML·DL 기초를 스마트 교통물류의 예측·시뮬레이션 문제와 연결</a:t>
             </a:r>
           </a:p>
         </p:txBody>
@@ -1509,7 +667,7 @@
           <a:lstStyle/>
           <a:p>
             <a:r>
-              <a:t>AI 모빌리티에서 다룬 ML·DL 기초를 스마트 교통물류의 예측·시뮬레이션 문제와 연결</a:t>
+              <a:t>1~2주 데이터·환경 → 3~5주 ML → 6~7주 DL → 8주 휴강 → 9주 중간고사·팀 편성 → 10주 PyTorch → 11~12주 Transformer → 13~14주 ETA 프로젝트 → 15주 발표</a:t>
             </a:r>
           </a:p>
         </p:txBody>
@@ -1579,7 +737,7 @@
           <a:lstStyle/>
           <a:p>
             <a:r>
-              <a:t>한 학기 안에서 ML·DL 기초와 예측 문제에 집중</a:t>
+              <a:t>두 권 모두 주교재. 다음 주부터 『핸즈온 머신러닝 3판』 사용</a:t>
             </a:r>
           </a:p>
         </p:txBody>
@@ -1649,7 +807,7 @@
           <a:lstStyle/>
           <a:p>
             <a:r>
-              <a:t>자율주행 전체 시스템 개발은 수업 범위에서 제외</a:t>
+              <a:t>기말고사 대신 팀 프로젝트 발표·보고서로 평가</a:t>
             </a:r>
           </a:p>
         </p:txBody>
@@ -1719,7 +877,7 @@
           <a:lstStyle/>
           <a:p>
             <a:r>
-              <a:t>12주차 수요 예측과 3학년 배차 최적화의 차이</a:t>
+              <a:t>과제는 해당 내용을 다루는 이론이 끝난 뒤에 배포한다</a:t>
             </a:r>
           </a:p>
         </p:txBody>
@@ -1789,147 +947,7 @@
           <a:lstStyle/>
           <a:p>
             <a:r>
-              <a:t>환승 경로 추천에 앞서 필요한 각 구간의 소요시간 예측</a:t>
-            </a:r>
-          </a:p>
-        </p:txBody>
-      </p:sp>
-      <p:sp>
-        <p:nvSpPr>
-          <p:cNvPr id="4" name="Slide Number Placeholder 3"/>
-          <p:cNvSpPr>
-            <a:spLocks noGrp="1"/>
-          </p:cNvSpPr>
-          <p:nvPr>
-            <p:ph type="sldNum" idx="5" sz="quarter"/>
-          </p:nvPr>
-        </p:nvSpPr>
-        <p:spPr/>
-      </p:sp>
-    </p:spTree>
-  </p:cSld>
-  <p:clrMapOvr>
-    <a:masterClrMapping/>
-  </p:clrMapOvr>
-</p:notes>
-</file>
-
-<file path=ppt/notesSlides/notesSlide8.xml><?xml version="1.0" encoding="utf-8"?>
-<p:notes xmlns:a="http://schemas.openxmlformats.org/drawingml/2006/main" xmlns:p="http://schemas.openxmlformats.org/presentationml/2006/main" xmlns:r="http://schemas.openxmlformats.org/officeDocument/2006/relationships">
-  <p:cSld>
-    <p:spTree>
-      <p:nvGrpSpPr>
-        <p:cNvPr id="1" name=""/>
-        <p:cNvGrpSpPr/>
-        <p:nvPr/>
-      </p:nvGrpSpPr>
-      <p:grpSpPr>
-        <a:xfrm>
-          <a:off x="0" y="0"/>
-          <a:ext cx="0" cy="0"/>
-          <a:chOff x="0" y="0"/>
-          <a:chExt cx="0" cy="0"/>
-        </a:xfrm>
-      </p:grpSpPr>
-      <p:sp>
-        <p:nvSpPr>
-          <p:cNvPr id="2" name="Slide Image Placeholder 1"/>
-          <p:cNvSpPr>
-            <a:spLocks noGrp="1"/>
-          </p:cNvSpPr>
-          <p:nvPr>
-            <p:ph type="sldImg" idx="2"/>
-          </p:nvPr>
-        </p:nvSpPr>
-        <p:spPr/>
-      </p:sp>
-      <p:sp>
-        <p:nvSpPr>
-          <p:cNvPr id="3" name="Notes Placeholder 2"/>
-          <p:cNvSpPr>
-            <a:spLocks noGrp="1"/>
-          </p:cNvSpPr>
-          <p:nvPr>
-            <p:ph type="body" idx="3" sz="quarter"/>
-          </p:nvPr>
-        </p:nvSpPr>
-        <p:spPr/>
-        <p:txBody>
-          <a:bodyPr/>
-          <a:lstStyle/>
-          <a:p>
-            <a:r>
-              <a:t>각 응용 사례를 뒤의 주차별 계획과 연결</a:t>
-            </a:r>
-          </a:p>
-        </p:txBody>
-      </p:sp>
-      <p:sp>
-        <p:nvSpPr>
-          <p:cNvPr id="4" name="Slide Number Placeholder 3"/>
-          <p:cNvSpPr>
-            <a:spLocks noGrp="1"/>
-          </p:cNvSpPr>
-          <p:nvPr>
-            <p:ph type="sldNum" idx="5" sz="quarter"/>
-          </p:nvPr>
-        </p:nvSpPr>
-        <p:spPr/>
-      </p:sp>
-    </p:spTree>
-  </p:cSld>
-  <p:clrMapOvr>
-    <a:masterClrMapping/>
-  </p:clrMapOvr>
-</p:notes>
-</file>
-
-<file path=ppt/notesSlides/notesSlide9.xml><?xml version="1.0" encoding="utf-8"?>
-<p:notes xmlns:a="http://schemas.openxmlformats.org/drawingml/2006/main" xmlns:p="http://schemas.openxmlformats.org/presentationml/2006/main" xmlns:r="http://schemas.openxmlformats.org/officeDocument/2006/relationships">
-  <p:cSld>
-    <p:spTree>
-      <p:nvGrpSpPr>
-        <p:cNvPr id="1" name=""/>
-        <p:cNvGrpSpPr/>
-        <p:nvPr/>
-      </p:nvGrpSpPr>
-      <p:grpSpPr>
-        <a:xfrm>
-          <a:off x="0" y="0"/>
-          <a:ext cx="0" cy="0"/>
-          <a:chOff x="0" y="0"/>
-          <a:chExt cx="0" cy="0"/>
-        </a:xfrm>
-      </p:grpSpPr>
-      <p:sp>
-        <p:nvSpPr>
-          <p:cNvPr id="2" name="Slide Image Placeholder 1"/>
-          <p:cNvSpPr>
-            <a:spLocks noGrp="1"/>
-          </p:cNvSpPr>
-          <p:nvPr>
-            <p:ph type="sldImg" idx="2"/>
-          </p:nvPr>
-        </p:nvSpPr>
-        <p:spPr/>
-      </p:sp>
-      <p:sp>
-        <p:nvSpPr>
-          <p:cNvPr id="3" name="Notes Placeholder 2"/>
-          <p:cNvSpPr>
-            <a:spLocks noGrp="1"/>
-          </p:cNvSpPr>
-          <p:nvPr>
-            <p:ph type="body" idx="3" sz="quarter"/>
-          </p:nvPr>
-        </p:nvSpPr>
-        <p:spPr/>
-        <p:txBody>
-          <a:bodyPr/>
-          <a:lstStyle/>
-          <a:p>
-            <a:r>
-              <a:t>1~2주 데이터·환경 → 3~5주 ML → 6~7주 DL → 8주 휴강 → 9주 중간고사·팀 편성 → 10~11주 DL → 12~14주 응용 → 15주 발표</a:t>
+              <a:t>패키지 버전보다 import 성공 여부 확인</a:t>
             </a:r>
           </a:p>
         </p:txBody>
@@ -5564,12 +4582,12 @@
       <p:grpSpPr/>
       <p:sp>
         <p:nvSpPr>
-          <p:cNvPr id="2" name="Title 1"/>
-          <p:cNvSpPr>
-            <a:spLocks noGrp="1"/>
-          </p:cNvSpPr>
-          <p:nvPr>
-            <p:ph type="title" idx="100"/>
+          <p:cNvPr id="2" name="Text Placeholder 1"/>
+          <p:cNvSpPr>
+            <a:spLocks noGrp="1"/>
+          </p:cNvSpPr>
+          <p:nvPr>
+            <p:ph type="body" idx="100"/>
           </p:nvPr>
         </p:nvSpPr>
         <p:spPr/>
@@ -5578,19 +4596,19 @@
           <a:lstStyle/>
           <a:p>
             <a:r>
-              <a:t>2.2 수요응답형 교통(DRT)</a:t>
-            </a:r>
-          </a:p>
-        </p:txBody>
-      </p:sp>
-      <p:sp>
-        <p:nvSpPr>
-          <p:cNvPr id="3" name="Text Placeholder 2"/>
-          <p:cNvSpPr>
-            <a:spLocks noGrp="1"/>
-          </p:cNvSpPr>
-          <p:nvPr>
-            <p:ph type="body" idx="101"/>
+              <a:t>03</a:t>
+            </a:r>
+          </a:p>
+        </p:txBody>
+      </p:sp>
+      <p:sp>
+        <p:nvSpPr>
+          <p:cNvPr id="3" name="Title 2"/>
+          <p:cNvSpPr>
+            <a:spLocks noGrp="1"/>
+          </p:cNvSpPr>
+          <p:nvPr>
+            <p:ph type="title" idx="101"/>
           </p:nvPr>
         </p:nvSpPr>
         <p:spPr/>
@@ -5599,7 +4617,7 @@
           <a:lstStyle/>
           <a:p>
             <a:r>
-              <a:t>2. AI 모빌리티 개관</a:t>
+              <a:t>15주 로드맵</a:t>
             </a:r>
           </a:p>
         </p:txBody>
@@ -5619,76 +4637,94 @@
           <a:bodyPr/>
           <a:lstStyle/>
           <a:p>
-            <a:pPr/>
-            <a:r>
-              <a:t>고정 노선 대신 호출 수요에 맞춘 차량 운행</a:t>
-            </a:r>
-          </a:p>
-          <a:p>
-            <a:pPr/>
-            <a:r>
-              <a:t>활용 지역: 농어촌·신도시 등 수요가 분산된 지역</a:t>
-            </a:r>
-          </a:p>
-          <a:p>
-            <a:pPr/>
-            <a:r>
-              <a:t>예측 문제: 언제, 어디에서 호출이 발생하는가</a:t>
-            </a:r>
-          </a:p>
-          <a:p>
-            <a:pPr/>
-            <a:r>
-              <a:t>운영 문제: 차량을 어디에 배치하는가</a:t>
-            </a:r>
-          </a:p>
-        </p:txBody>
-      </p:sp>
-      <p:sp>
-        <p:nvSpPr>
-          <p:cNvPr id="25" name="Slide Number Placeholder 0"/>
-          <p:cNvSpPr>
-            <a:spLocks noGrp="1"/>
-          </p:cNvSpPr>
-          <p:nvPr>
-            <p:ph type="sldNum" sz="quarter" idx="4294967295"/>
-          </p:nvPr>
-        </p:nvSpPr>
-        <p:spPr>
-          <a:xfrm>
-            <a:off x="10591495" y="6355080"/>
-            <a:ext cx="914400" cy="274320"/>
-          </a:xfrm>
-          <a:prstGeom prst="rect">
-            <a:avLst/>
-          </a:prstGeom>
-          <a:extLst>
-            <a:ext uri="{C572A759-6A51-4108-AA02-DFA0A04FC94B}">
-              <ma14:wrappingTextBoxFlag xmlns:ma14="http://schemas.microsoft.com/office/mac/drawingml/2011/main" val="0"/>
-            </a:ext>
-          </a:extLst>
-        </p:spPr>
-        <p:txBody>
-          <a:bodyPr/>
-          <a:lstStyle>
-            <a:lvl1pPr>
-              <a:defRPr sz="1000">
+            <a:pPr>
+              <a:spcAft>
+                <a:spcPts val="1000"/>
+              </a:spcAft>
+            </a:pPr>
+            <a:r>
+              <a:rPr>
                 <a:solidFill>
                   <a:srgbClr val="AFAFAF"/>
                 </a:solidFill>
-                <a:latin typeface="Pretendard Medium"/>
-                <a:ea typeface="Pretendard Medium"/>
-                <a:cs typeface="Pretendard Medium"/>
-              </a:defRPr>
-            </a:lvl1pPr>
-          </a:lstStyle>
-          <a:p>
-            <a:pPr algn="r"/>
-            <a:fld id="{F7021451-1387-4CA6-816F-3879F97B5CBC}" type="slidenum">
-              <a:rPr b="0" lang="en-US"/>
-              <a:t>1004</a:t>
-            </a:fld>
-            <a:endParaRPr lang="en-US"/>
+              </a:rPr>
+              <a:t>3.1  </a:t>
+            </a:r>
+            <a:r>
+              <a:t>15주 전체 구성</a:t>
+            </a:r>
+          </a:p>
+          <a:p>
+            <a:pPr>
+              <a:spcAft>
+                <a:spcPts val="1000"/>
+              </a:spcAft>
+            </a:pPr>
+            <a:r>
+              <a:rPr>
+                <a:solidFill>
+                  <a:srgbClr val="AFAFAF"/>
+                </a:solidFill>
+              </a:rPr>
+              <a:t>3.2  </a:t>
+            </a:r>
+            <a:r>
+              <a:t>ML 파트 (3~5주)</a:t>
+            </a:r>
+          </a:p>
+          <a:p>
+            <a:pPr>
+              <a:spcAft>
+                <a:spcPts val="1000"/>
+              </a:spcAft>
+            </a:pPr>
+            <a:r>
+              <a:rPr>
+                <a:solidFill>
+                  <a:srgbClr val="AFAFAF"/>
+                </a:solidFill>
+              </a:rPr>
+              <a:t>3.3  </a:t>
+            </a:r>
+            <a:r>
+              <a:t>DL 파트 (6~7·10주)</a:t>
+            </a:r>
+          </a:p>
+          <a:p>
+            <a:pPr>
+              <a:spcAft>
+                <a:spcPts val="1000"/>
+              </a:spcAft>
+            </a:pPr>
+            <a:r>
+              <a:rPr>
+                <a:solidFill>
+                  <a:srgbClr val="AFAFAF"/>
+                </a:solidFill>
+              </a:rPr>
+              <a:t>3.4  </a:t>
+            </a:r>
+            <a:r>
+              <a:t>Transformer·ETA 파트</a:t>
+            </a:r>
+          </a:p>
+          <a:p>
+            <a:pPr>
+              <a:spcAft>
+                <a:spcPts val="1000"/>
+              </a:spcAft>
+            </a:pPr>
+            <a:r>
+              <a:rPr>
+                <a:solidFill>
+                  <a:srgbClr val="AFAFAF"/>
+                </a:solidFill>
+              </a:rPr>
+              <a:t>3.5  </a:t>
+            </a:r>
+            <a:r>
+              <a:t>교재 — 두 권 필수</a:t>
+            </a:r>
           </a:p>
         </p:txBody>
       </p:sp>
@@ -5726,7 +4762,7 @@
           <a:lstStyle/>
           <a:p>
             <a:r>
-              <a:t>2.3 MaaS와 통합 모빌리티</a:t>
+              <a:t>3.1 15주 전체 구성</a:t>
             </a:r>
           </a:p>
         </p:txBody>
@@ -5747,19 +4783,19 @@
           <a:lstStyle/>
           <a:p>
             <a:r>
-              <a:t>2. AI 모빌리티 개관</a:t>
-            </a:r>
-          </a:p>
-        </p:txBody>
-      </p:sp>
-      <p:sp>
-        <p:nvSpPr>
-          <p:cNvPr id="4" name="Text Placeholder 3"/>
-          <p:cNvSpPr>
-            <a:spLocks noGrp="1"/>
-          </p:cNvSpPr>
-          <p:nvPr>
-            <p:ph type="body" idx="102"/>
+              <a:t>3. 15주 로드맵</a:t>
+            </a:r>
+          </a:p>
+        </p:txBody>
+      </p:sp>
+      <p:sp>
+        <p:nvSpPr>
+          <p:cNvPr id="5" name="Text Placeholder 4"/>
+          <p:cNvSpPr>
+            <a:spLocks noGrp="1"/>
+          </p:cNvSpPr>
+          <p:nvPr>
+            <p:ph type="body" idx="103"/>
           </p:nvPr>
         </p:nvSpPr>
         <p:spPr/>
@@ -5767,1050 +4803,8 @@
           <a:bodyPr/>
           <a:lstStyle/>
           <a:p>
-            <a:pPr/>
-            <a:r>
-              <a:t>여러 이동수단의 검색·예약·결제를 하나의 서비스로 통합</a:t>
-            </a:r>
-          </a:p>
-          <a:p>
-            <a:pPr lvl="1"/>
-            <a:r>
-              <a:t>대중교통 + 공유자전거 + 호출 서비스</a:t>
-            </a:r>
-          </a:p>
-          <a:p>
-            <a:pPr/>
-            <a:r>
-              <a:t>경로 추천에 필요한 구간별 소요시간</a:t>
-            </a:r>
-          </a:p>
-          <a:p>
-            <a:pPr/>
-            <a:r>
-              <a:t>13주차 주제: ETA 예측</a:t>
-            </a:r>
-          </a:p>
-        </p:txBody>
-      </p:sp>
-      <p:sp>
-        <p:nvSpPr>
-          <p:cNvPr id="25" name="Slide Number Placeholder 0"/>
-          <p:cNvSpPr>
-            <a:spLocks noGrp="1"/>
-          </p:cNvSpPr>
-          <p:nvPr>
-            <p:ph type="sldNum" sz="quarter" idx="4294967295"/>
-          </p:nvPr>
-        </p:nvSpPr>
-        <p:spPr>
-          <a:xfrm>
-            <a:off x="10591495" y="6355080"/>
-            <a:ext cx="914400" cy="274320"/>
-          </a:xfrm>
-          <a:prstGeom prst="rect">
-            <a:avLst/>
-          </a:prstGeom>
-          <a:extLst>
-            <a:ext uri="{C572A759-6A51-4108-AA02-DFA0A04FC94B}">
-              <ma14:wrappingTextBoxFlag xmlns:ma14="http://schemas.microsoft.com/office/mac/drawingml/2011/main" val="0"/>
-            </a:ext>
-          </a:extLst>
-        </p:spPr>
-        <p:txBody>
-          <a:bodyPr/>
-          <a:lstStyle>
-            <a:lvl1pPr>
-              <a:defRPr sz="1000">
-                <a:solidFill>
-                  <a:srgbClr val="AFAFAF"/>
-                </a:solidFill>
-                <a:latin typeface="Pretendard Medium"/>
-                <a:ea typeface="Pretendard Medium"/>
-                <a:cs typeface="Pretendard Medium"/>
-              </a:defRPr>
-            </a:lvl1pPr>
-          </a:lstStyle>
-          <a:p>
-            <a:pPr algn="r"/>
-            <a:fld id="{F7021451-1387-4CA6-816F-3879F97B5CBC}" type="slidenum">
-              <a:rPr b="0" lang="en-US"/>
-              <a:t>1004</a:t>
-            </a:fld>
-            <a:endParaRPr lang="en-US"/>
-          </a:p>
-        </p:txBody>
-      </p:sp>
-    </p:spTree>
-  </p:cSld>
-  <p:clrMapOvr>
-    <a:masterClrMapping/>
-  </p:clrMapOvr>
-</p:sld>
-</file>
-
-<file path=ppt/slides/slide12.xml><?xml version="1.0" encoding="utf-8"?>
-<p:sld xmlns:a="http://schemas.openxmlformats.org/drawingml/2006/main" xmlns:p="http://schemas.openxmlformats.org/presentationml/2006/main" xmlns:r="http://schemas.openxmlformats.org/officeDocument/2006/relationships">
-  <p:cSld>
-    <p:spTree>
-      <p:nvGrpSpPr>
-        <p:cNvPr id="1" name=""/>
-        <p:cNvGrpSpPr/>
-        <p:nvPr/>
-      </p:nvGrpSpPr>
-      <p:grpSpPr/>
-      <p:sp>
-        <p:nvSpPr>
-          <p:cNvPr id="2" name="Title 1"/>
-          <p:cNvSpPr>
-            <a:spLocks noGrp="1"/>
-          </p:cNvSpPr>
-          <p:nvPr>
-            <p:ph type="title" idx="100"/>
-          </p:nvPr>
-        </p:nvSpPr>
-        <p:spPr/>
-        <p:txBody>
-          <a:bodyPr/>
-          <a:lstStyle/>
-          <a:p>
-            <a:r>
-              <a:t>2.4 AI가 실제로 쓰이는 지점</a:t>
-            </a:r>
-          </a:p>
-        </p:txBody>
-      </p:sp>
-      <p:sp>
-        <p:nvSpPr>
-          <p:cNvPr id="3" name="Text Placeholder 2"/>
-          <p:cNvSpPr>
-            <a:spLocks noGrp="1"/>
-          </p:cNvSpPr>
-          <p:nvPr>
-            <p:ph type="body" idx="101"/>
-          </p:nvPr>
-        </p:nvSpPr>
-        <p:spPr/>
-        <p:txBody>
-          <a:bodyPr/>
-          <a:lstStyle/>
-          <a:p>
-            <a:r>
-              <a:t>2. AI 모빌리티 개관</a:t>
-            </a:r>
-          </a:p>
-        </p:txBody>
-      </p:sp>
-      <p:sp>
-        <p:nvSpPr>
-          <p:cNvPr id="4" name="Text Placeholder 3"/>
-          <p:cNvSpPr>
-            <a:spLocks noGrp="1"/>
-          </p:cNvSpPr>
-          <p:nvPr>
-            <p:ph type="body" idx="102"/>
-          </p:nvPr>
-        </p:nvSpPr>
-        <p:spPr/>
-        <p:txBody>
-          <a:bodyPr/>
-          <a:lstStyle/>
-          <a:p>
-            <a:pPr/>
-            <a:r>
-              <a:t>서비스별 예측·의사결정 문제</a:t>
-            </a:r>
-          </a:p>
-          <a:p>
-            <a:pPr/>
-            <a:r>
-              <a:t>관련 수업: 11~14주차</a:t>
-            </a:r>
-          </a:p>
-        </p:txBody>
-      </p:sp>
-      <p:sp>
-        <p:nvSpPr>
-          <p:cNvPr id="5" name="Text Placeholder 4"/>
-          <p:cNvSpPr>
-            <a:spLocks noGrp="1"/>
-          </p:cNvSpPr>
-          <p:nvPr>
-            <p:ph type="body" idx="103"/>
-          </p:nvPr>
-        </p:nvSpPr>
-        <p:spPr/>
-        <p:txBody>
-          <a:bodyPr/>
-          <a:lstStyle/>
-          <a:p>
-            <a:r>
-              <a:t>표 2. 모빌리티 서비스와 주차별 대응</a:t>
-            </a:r>
-          </a:p>
-        </p:txBody>
-      </p:sp>
-      <p:graphicFrame>
-        <p:nvGraphicFramePr>
-          <p:cNvPr id="6" name="Table Placeholder 5"/>
-          <p:cNvGraphicFramePr>
-            <a:graphicFrameLocks noGrp="1"/>
-          </p:cNvGraphicFramePr>
-          <p:nvPr>
-            <p:ph type="tbl" idx="104"/>
-          </p:nvPr>
-        </p:nvGraphicFramePr>
-        <p:xfrm>
-          <a:off x="4937760" y="1828800"/>
-          <a:ext cx="6565392" cy="2946400"/>
-        </p:xfrm>
-        <a:graphic>
-          <a:graphicData uri="http://schemas.openxmlformats.org/drawingml/2006/table">
-            <a:tbl>
-              <a:tblPr firstRow="0" bandRow="0" firstCol="0" lastRow="0" lastCol="0" bandCol="0"/>
-              <a:tblGrid>
-                <a:gridCol w="2188464"/>
-                <a:gridCol w="2188464"/>
-                <a:gridCol w="2188464"/>
-              </a:tblGrid>
-              <a:tr h="406400">
-                <a:tc>
-                  <a:txBody>
-                    <a:bodyPr/>
-                    <a:lstStyle/>
-                    <a:p>
-                      <a:r>
-                        <a:rPr sz="1300" b="0">
-                          <a:solidFill>
-                            <a:srgbClr val="FFFFFF"/>
-                          </a:solidFill>
-                          <a:latin typeface="Pretendard Medium"/>
-                        </a:rPr>
-                        <a:t>서비스</a:t>
-                      </a:r>
-                    </a:p>
-                  </a:txBody>
-                  <a:tcPr marL="101600" marR="101600" marT="76200" marB="76200" anchor="ctr">
-                    <a:solidFill>
-                      <a:srgbClr val="000000"/>
-                    </a:solidFill>
-                    <a:lnL w="0">
-                      <a:noFill/>
-                    </a:lnL>
-                    <a:lnR w="0">
-                      <a:noFill/>
-                    </a:lnR>
-                    <a:lnT w="0">
-                      <a:noFill/>
-                    </a:lnT>
-                    <a:lnB w="0">
-                      <a:noFill/>
-                    </a:lnB>
-                  </a:tcPr>
-                </a:tc>
-                <a:tc>
-                  <a:txBody>
-                    <a:bodyPr/>
-                    <a:lstStyle/>
-                    <a:p>
-                      <a:r>
-                        <a:rPr sz="1300" b="0">
-                          <a:solidFill>
-                            <a:srgbClr val="FFFFFF"/>
-                          </a:solidFill>
-                          <a:latin typeface="Pretendard Medium"/>
-                        </a:rPr>
-                        <a:t>AI가 푸는 문제</a:t>
-                      </a:r>
-                    </a:p>
-                  </a:txBody>
-                  <a:tcPr marL="101600" marR="101600" marT="76200" marB="76200" anchor="ctr">
-                    <a:solidFill>
-                      <a:srgbClr val="000000"/>
-                    </a:solidFill>
-                    <a:lnL w="0">
-                      <a:noFill/>
-                    </a:lnL>
-                    <a:lnR w="0">
-                      <a:noFill/>
-                    </a:lnR>
-                    <a:lnT w="0">
-                      <a:noFill/>
-                    </a:lnT>
-                    <a:lnB w="0">
-                      <a:noFill/>
-                    </a:lnB>
-                  </a:tcPr>
-                </a:tc>
-                <a:tc>
-                  <a:txBody>
-                    <a:bodyPr/>
-                    <a:lstStyle/>
-                    <a:p>
-                      <a:r>
-                        <a:rPr sz="1300" b="0">
-                          <a:solidFill>
-                            <a:srgbClr val="FFFFFF"/>
-                          </a:solidFill>
-                          <a:latin typeface="Pretendard Medium"/>
-                        </a:rPr>
-                        <a:t>이 과목의 주차</a:t>
-                      </a:r>
-                    </a:p>
-                  </a:txBody>
-                  <a:tcPr marL="101600" marR="101600" marT="76200" marB="76200" anchor="ctr">
-                    <a:solidFill>
-                      <a:srgbClr val="000000"/>
-                    </a:solidFill>
-                    <a:lnL w="0">
-                      <a:noFill/>
-                    </a:lnL>
-                    <a:lnR w="0">
-                      <a:noFill/>
-                    </a:lnR>
-                    <a:lnT w="0">
-                      <a:noFill/>
-                    </a:lnT>
-                    <a:lnB w="0">
-                      <a:noFill/>
-                    </a:lnB>
-                  </a:tcPr>
-                </a:tc>
-              </a:tr>
-              <a:tr h="635000">
-                <a:tc>
-                  <a:txBody>
-                    <a:bodyPr/>
-                    <a:lstStyle/>
-                    <a:p>
-                      <a:r>
-                        <a:rPr sz="1300" b="1">
-                          <a:solidFill>
-                            <a:srgbClr val="000000"/>
-                          </a:solidFill>
-                          <a:latin typeface="Pretendard"/>
-                        </a:rPr>
-                        <a:t>내비게이션·지도</a:t>
-                      </a:r>
-                    </a:p>
-                  </a:txBody>
-                  <a:tcPr marL="101600" marR="101600" marT="101600" marB="101600" anchor="ctr">
-                    <a:solidFill>
-                      <a:srgbClr val="FFFFFF"/>
-                    </a:solidFill>
-                    <a:lnL w="0">
-                      <a:noFill/>
-                    </a:lnL>
-                    <a:lnR w="0">
-                      <a:noFill/>
-                    </a:lnR>
-                    <a:lnT w="0">
-                      <a:noFill/>
-                    </a:lnT>
-                    <a:lnB w="9525">
-                      <a:solidFill>
-                        <a:srgbClr val="E2E2E2"/>
-                      </a:solidFill>
-                    </a:lnB>
-                  </a:tcPr>
-                </a:tc>
-                <a:tc>
-                  <a:txBody>
-                    <a:bodyPr/>
-                    <a:lstStyle/>
-                    <a:p>
-                      <a:r>
-                        <a:rPr sz="1300" b="0">
-                          <a:solidFill>
-                            <a:srgbClr val="5E5E5E"/>
-                          </a:solidFill>
-                          <a:latin typeface="Pretendard Medium"/>
-                        </a:rPr>
-                        <a:t>도착시각 예측</a:t>
-                      </a:r>
-                    </a:p>
-                  </a:txBody>
-                  <a:tcPr marL="101600" marR="101600" marT="101600" marB="101600" anchor="ctr">
-                    <a:solidFill>
-                      <a:srgbClr val="FFFFFF"/>
-                    </a:solidFill>
-                    <a:lnL w="0">
-                      <a:noFill/>
-                    </a:lnL>
-                    <a:lnR w="0">
-                      <a:noFill/>
-                    </a:lnR>
-                    <a:lnT w="0">
-                      <a:noFill/>
-                    </a:lnT>
-                    <a:lnB w="9525">
-                      <a:solidFill>
-                        <a:srgbClr val="E2E2E2"/>
-                      </a:solidFill>
-                    </a:lnB>
-                  </a:tcPr>
-                </a:tc>
-                <a:tc>
-                  <a:txBody>
-                    <a:bodyPr/>
-                    <a:lstStyle/>
-                    <a:p>
-                      <a:r>
-                        <a:rPr sz="1300" b="0">
-                          <a:solidFill>
-                            <a:srgbClr val="5E5E5E"/>
-                          </a:solidFill>
-                          <a:latin typeface="Pretendard Medium"/>
-                        </a:rPr>
-                        <a:t>13주 (ETA)</a:t>
-                      </a:r>
-                    </a:p>
-                  </a:txBody>
-                  <a:tcPr marL="101600" marR="101600" marT="101600" marB="101600" anchor="ctr">
-                    <a:solidFill>
-                      <a:srgbClr val="FFFFFF"/>
-                    </a:solidFill>
-                    <a:lnL w="0">
-                      <a:noFill/>
-                    </a:lnL>
-                    <a:lnR w="0">
-                      <a:noFill/>
-                    </a:lnR>
-                    <a:lnT w="0">
-                      <a:noFill/>
-                    </a:lnT>
-                    <a:lnB w="9525">
-                      <a:solidFill>
-                        <a:srgbClr val="E2E2E2"/>
-                      </a:solidFill>
-                    </a:lnB>
-                  </a:tcPr>
-                </a:tc>
-              </a:tr>
-              <a:tr h="635000">
-                <a:tc>
-                  <a:txBody>
-                    <a:bodyPr/>
-                    <a:lstStyle/>
-                    <a:p>
-                      <a:r>
-                        <a:rPr sz="1300" b="1">
-                          <a:solidFill>
-                            <a:srgbClr val="000000"/>
-                          </a:solidFill>
-                          <a:latin typeface="Pretendard"/>
-                        </a:rPr>
-                        <a:t>호출 앱·DRT</a:t>
-                      </a:r>
-                    </a:p>
-                  </a:txBody>
-                  <a:tcPr marL="101600" marR="101600" marT="101600" marB="101600" anchor="ctr">
-                    <a:solidFill>
-                      <a:srgbClr val="FFFFFF"/>
-                    </a:solidFill>
-                    <a:lnL w="0">
-                      <a:noFill/>
-                    </a:lnL>
-                    <a:lnR w="0">
-                      <a:noFill/>
-                    </a:lnR>
-                    <a:lnT w="0">
-                      <a:noFill/>
-                    </a:lnT>
-                    <a:lnB w="9525">
-                      <a:solidFill>
-                        <a:srgbClr val="E2E2E2"/>
-                      </a:solidFill>
-                    </a:lnB>
-                  </a:tcPr>
-                </a:tc>
-                <a:tc>
-                  <a:txBody>
-                    <a:bodyPr/>
-                    <a:lstStyle/>
-                    <a:p>
-                      <a:r>
-                        <a:rPr sz="1300" b="0">
-                          <a:solidFill>
-                            <a:srgbClr val="5E5E5E"/>
-                          </a:solidFill>
-                          <a:latin typeface="Pretendard Medium"/>
-                        </a:rPr>
-                        <a:t>수요 예측</a:t>
-                      </a:r>
-                    </a:p>
-                  </a:txBody>
-                  <a:tcPr marL="101600" marR="101600" marT="101600" marB="101600" anchor="ctr">
-                    <a:solidFill>
-                      <a:srgbClr val="FFFFFF"/>
-                    </a:solidFill>
-                    <a:lnL w="0">
-                      <a:noFill/>
-                    </a:lnL>
-                    <a:lnR w="0">
-                      <a:noFill/>
-                    </a:lnR>
-                    <a:lnT w="0">
-                      <a:noFill/>
-                    </a:lnT>
-                    <a:lnB w="9525">
-                      <a:solidFill>
-                        <a:srgbClr val="E2E2E2"/>
-                      </a:solidFill>
-                    </a:lnB>
-                  </a:tcPr>
-                </a:tc>
-                <a:tc>
-                  <a:txBody>
-                    <a:bodyPr/>
-                    <a:lstStyle/>
-                    <a:p>
-                      <a:r>
-                        <a:rPr sz="1300" b="0">
-                          <a:solidFill>
-                            <a:srgbClr val="5E5E5E"/>
-                          </a:solidFill>
-                          <a:latin typeface="Pretendard Medium"/>
-                        </a:rPr>
-                        <a:t>12주</a:t>
-                      </a:r>
-                    </a:p>
-                  </a:txBody>
-                  <a:tcPr marL="101600" marR="101600" marT="101600" marB="101600" anchor="ctr">
-                    <a:solidFill>
-                      <a:srgbClr val="FFFFFF"/>
-                    </a:solidFill>
-                    <a:lnL w="0">
-                      <a:noFill/>
-                    </a:lnL>
-                    <a:lnR w="0">
-                      <a:noFill/>
-                    </a:lnR>
-                    <a:lnT w="0">
-                      <a:noFill/>
-                    </a:lnT>
-                    <a:lnB w="9525">
-                      <a:solidFill>
-                        <a:srgbClr val="E2E2E2"/>
-                      </a:solidFill>
-                    </a:lnB>
-                  </a:tcPr>
-                </a:tc>
-              </a:tr>
-              <a:tr h="635000">
-                <a:tc>
-                  <a:txBody>
-                    <a:bodyPr/>
-                    <a:lstStyle/>
-                    <a:p>
-                      <a:r>
-                        <a:rPr sz="1300" b="1">
-                          <a:solidFill>
-                            <a:srgbClr val="000000"/>
-                          </a:solidFill>
-                          <a:latin typeface="Pretendard"/>
-                        </a:rPr>
-                        <a:t>신호제어·배차 운영</a:t>
-                      </a:r>
-                    </a:p>
-                  </a:txBody>
-                  <a:tcPr marL="101600" marR="101600" marT="101600" marB="101600" anchor="ctr">
-                    <a:solidFill>
-                      <a:srgbClr val="FFFFFF"/>
-                    </a:solidFill>
-                    <a:lnL w="0">
-                      <a:noFill/>
-                    </a:lnL>
-                    <a:lnR w="0">
-                      <a:noFill/>
-                    </a:lnR>
-                    <a:lnT w="0">
-                      <a:noFill/>
-                    </a:lnT>
-                    <a:lnB w="9525">
-                      <a:solidFill>
-                        <a:srgbClr val="E2E2E2"/>
-                      </a:solidFill>
-                    </a:lnB>
-                  </a:tcPr>
-                </a:tc>
-                <a:tc>
-                  <a:txBody>
-                    <a:bodyPr/>
-                    <a:lstStyle/>
-                    <a:p>
-                      <a:r>
-                        <a:rPr sz="1300" b="0">
-                          <a:solidFill>
-                            <a:srgbClr val="5E5E5E"/>
-                          </a:solidFill>
-                          <a:latin typeface="Pretendard Medium"/>
-                        </a:rPr>
-                        <a:t>순차 의사결정</a:t>
-                      </a:r>
-                    </a:p>
-                  </a:txBody>
-                  <a:tcPr marL="101600" marR="101600" marT="101600" marB="101600" anchor="ctr">
-                    <a:solidFill>
-                      <a:srgbClr val="FFFFFF"/>
-                    </a:solidFill>
-                    <a:lnL w="0">
-                      <a:noFill/>
-                    </a:lnL>
-                    <a:lnR w="0">
-                      <a:noFill/>
-                    </a:lnR>
-                    <a:lnT w="0">
-                      <a:noFill/>
-                    </a:lnT>
-                    <a:lnB w="9525">
-                      <a:solidFill>
-                        <a:srgbClr val="E2E2E2"/>
-                      </a:solidFill>
-                    </a:lnB>
-                  </a:tcPr>
-                </a:tc>
-                <a:tc>
-                  <a:txBody>
-                    <a:bodyPr/>
-                    <a:lstStyle/>
-                    <a:p>
-                      <a:r>
-                        <a:rPr sz="1300" b="0">
-                          <a:solidFill>
-                            <a:srgbClr val="5E5E5E"/>
-                          </a:solidFill>
-                          <a:latin typeface="Pretendard Medium"/>
-                        </a:rPr>
-                        <a:t>14주 (RL)</a:t>
-                      </a:r>
-                    </a:p>
-                  </a:txBody>
-                  <a:tcPr marL="101600" marR="101600" marT="101600" marB="101600" anchor="ctr">
-                    <a:solidFill>
-                      <a:srgbClr val="FFFFFF"/>
-                    </a:solidFill>
-                    <a:lnL w="0">
-                      <a:noFill/>
-                    </a:lnL>
-                    <a:lnR w="0">
-                      <a:noFill/>
-                    </a:lnR>
-                    <a:lnT w="0">
-                      <a:noFill/>
-                    </a:lnT>
-                    <a:lnB w="9525">
-                      <a:solidFill>
-                        <a:srgbClr val="E2E2E2"/>
-                      </a:solidFill>
-                    </a:lnB>
-                  </a:tcPr>
-                </a:tc>
-              </a:tr>
-              <a:tr h="635000">
-                <a:tc>
-                  <a:txBody>
-                    <a:bodyPr/>
-                    <a:lstStyle/>
-                    <a:p>
-                      <a:r>
-                        <a:rPr sz="1300" b="1">
-                          <a:solidFill>
-                            <a:srgbClr val="000000"/>
-                          </a:solidFill>
-                          <a:latin typeface="Pretendard"/>
-                        </a:rPr>
-                        <a:t>자율주행 인지</a:t>
-                      </a:r>
-                    </a:p>
-                  </a:txBody>
-                  <a:tcPr marL="101600" marR="101600" marT="101600" marB="101600" anchor="ctr">
-                    <a:solidFill>
-                      <a:srgbClr val="FFFFFF"/>
-                    </a:solidFill>
-                    <a:lnL w="0">
-                      <a:noFill/>
-                    </a:lnL>
-                    <a:lnR w="0">
-                      <a:noFill/>
-                    </a:lnR>
-                    <a:lnT w="0">
-                      <a:noFill/>
-                    </a:lnT>
-                    <a:lnB w="9525">
-                      <a:solidFill>
-                        <a:srgbClr val="E2E2E2"/>
-                      </a:solidFill>
-                    </a:lnB>
-                  </a:tcPr>
-                </a:tc>
-                <a:tc>
-                  <a:txBody>
-                    <a:bodyPr/>
-                    <a:lstStyle/>
-                    <a:p>
-                      <a:r>
-                        <a:rPr sz="1300" b="0">
-                          <a:solidFill>
-                            <a:srgbClr val="5E5E5E"/>
-                          </a:solidFill>
-                          <a:latin typeface="Pretendard Medium"/>
-                        </a:rPr>
-                        <a:t>객체 인식</a:t>
-                      </a:r>
-                    </a:p>
-                  </a:txBody>
-                  <a:tcPr marL="101600" marR="101600" marT="101600" marB="101600" anchor="ctr">
-                    <a:solidFill>
-                      <a:srgbClr val="FFFFFF"/>
-                    </a:solidFill>
-                    <a:lnL w="0">
-                      <a:noFill/>
-                    </a:lnL>
-                    <a:lnR w="0">
-                      <a:noFill/>
-                    </a:lnR>
-                    <a:lnT w="0">
-                      <a:noFill/>
-                    </a:lnT>
-                    <a:lnB w="9525">
-                      <a:solidFill>
-                        <a:srgbClr val="E2E2E2"/>
-                      </a:solidFill>
-                    </a:lnB>
-                  </a:tcPr>
-                </a:tc>
-                <a:tc>
-                  <a:txBody>
-                    <a:bodyPr/>
-                    <a:lstStyle/>
-                    <a:p>
-                      <a:r>
-                        <a:rPr sz="1300" b="0">
-                          <a:solidFill>
-                            <a:srgbClr val="5E5E5E"/>
-                          </a:solidFill>
-                          <a:latin typeface="Pretendard Medium"/>
-                        </a:rPr>
-                        <a:t>11주 (CNN)</a:t>
-                      </a:r>
-                    </a:p>
-                  </a:txBody>
-                  <a:tcPr marL="101600" marR="101600" marT="101600" marB="101600" anchor="ctr">
-                    <a:solidFill>
-                      <a:srgbClr val="FFFFFF"/>
-                    </a:solidFill>
-                    <a:lnL w="0">
-                      <a:noFill/>
-                    </a:lnL>
-                    <a:lnR w="0">
-                      <a:noFill/>
-                    </a:lnR>
-                    <a:lnT w="0">
-                      <a:noFill/>
-                    </a:lnT>
-                    <a:lnB w="9525">
-                      <a:solidFill>
-                        <a:srgbClr val="E2E2E2"/>
-                      </a:solidFill>
-                    </a:lnB>
-                  </a:tcPr>
-                </a:tc>
-              </a:tr>
-            </a:tbl>
-          </a:graphicData>
-        </a:graphic>
-      </p:graphicFrame>
-      <p:sp>
-        <p:nvSpPr>
-          <p:cNvPr id="25" name="Slide Number Placeholder 0"/>
-          <p:cNvSpPr>
-            <a:spLocks noGrp="1"/>
-          </p:cNvSpPr>
-          <p:nvPr>
-            <p:ph type="sldNum" sz="quarter" idx="4294967295"/>
-          </p:nvPr>
-        </p:nvSpPr>
-        <p:spPr>
-          <a:xfrm>
-            <a:off x="10591495" y="6355080"/>
-            <a:ext cx="914400" cy="274320"/>
-          </a:xfrm>
-          <a:prstGeom prst="rect">
-            <a:avLst/>
-          </a:prstGeom>
-          <a:extLst>
-            <a:ext uri="{C572A759-6A51-4108-AA02-DFA0A04FC94B}">
-              <ma14:wrappingTextBoxFlag xmlns:ma14="http://schemas.microsoft.com/office/mac/drawingml/2011/main" val="0"/>
-            </a:ext>
-          </a:extLst>
-        </p:spPr>
-        <p:txBody>
-          <a:bodyPr/>
-          <a:lstStyle>
-            <a:lvl1pPr>
-              <a:defRPr sz="1000">
-                <a:solidFill>
-                  <a:srgbClr val="AFAFAF"/>
-                </a:solidFill>
-                <a:latin typeface="Pretendard Medium"/>
-                <a:ea typeface="Pretendard Medium"/>
-                <a:cs typeface="Pretendard Medium"/>
-              </a:defRPr>
-            </a:lvl1pPr>
-          </a:lstStyle>
-          <a:p>
-            <a:pPr algn="r"/>
-            <a:fld id="{F7021451-1387-4CA6-816F-3879F97B5CBC}" type="slidenum">
-              <a:rPr b="0" lang="en-US"/>
-              <a:t>1008</a:t>
-            </a:fld>
-            <a:endParaRPr lang="en-US"/>
-          </a:p>
-        </p:txBody>
-      </p:sp>
-    </p:spTree>
-  </p:cSld>
-  <p:clrMapOvr>
-    <a:masterClrMapping/>
-  </p:clrMapOvr>
-</p:sld>
-</file>
-
-<file path=ppt/slides/slide13.xml><?xml version="1.0" encoding="utf-8"?>
-<p:sld xmlns:a="http://schemas.openxmlformats.org/drawingml/2006/main" xmlns:p="http://schemas.openxmlformats.org/presentationml/2006/main" xmlns:r="http://schemas.openxmlformats.org/officeDocument/2006/relationships">
-  <p:cSld>
-    <p:spTree>
-      <p:nvGrpSpPr>
-        <p:cNvPr id="1" name=""/>
-        <p:cNvGrpSpPr/>
-        <p:nvPr/>
-      </p:nvGrpSpPr>
-      <p:grpSpPr/>
-      <p:sp>
-        <p:nvSpPr>
-          <p:cNvPr id="2" name="Text Placeholder 1"/>
-          <p:cNvSpPr>
-            <a:spLocks noGrp="1"/>
-          </p:cNvSpPr>
-          <p:nvPr>
-            <p:ph type="body" idx="100"/>
-          </p:nvPr>
-        </p:nvSpPr>
-        <p:spPr/>
-        <p:txBody>
-          <a:bodyPr/>
-          <a:lstStyle/>
-          <a:p>
-            <a:r>
-              <a:t>03</a:t>
-            </a:r>
-          </a:p>
-        </p:txBody>
-      </p:sp>
-      <p:sp>
-        <p:nvSpPr>
-          <p:cNvPr id="3" name="Title 2"/>
-          <p:cNvSpPr>
-            <a:spLocks noGrp="1"/>
-          </p:cNvSpPr>
-          <p:nvPr>
-            <p:ph type="title" idx="101"/>
-          </p:nvPr>
-        </p:nvSpPr>
-        <p:spPr/>
-        <p:txBody>
-          <a:bodyPr/>
-          <a:lstStyle/>
-          <a:p>
-            <a:r>
-              <a:t>15주 로드맵</a:t>
-            </a:r>
-          </a:p>
-        </p:txBody>
-      </p:sp>
-      <p:sp>
-        <p:nvSpPr>
-          <p:cNvPr id="4" name="Text Placeholder 3"/>
-          <p:cNvSpPr>
-            <a:spLocks noGrp="1"/>
-          </p:cNvSpPr>
-          <p:nvPr>
-            <p:ph type="body" idx="102"/>
-          </p:nvPr>
-        </p:nvSpPr>
-        <p:spPr/>
-        <p:txBody>
-          <a:bodyPr/>
-          <a:lstStyle/>
-          <a:p>
-            <a:pPr>
-              <a:spcAft>
-                <a:spcPts val="1000"/>
-              </a:spcAft>
-            </a:pPr>
-            <a:r>
-              <a:rPr>
-                <a:solidFill>
-                  <a:srgbClr val="AFAFAF"/>
-                </a:solidFill>
-              </a:rPr>
-              <a:t>3.1  </a:t>
-            </a:r>
-            <a:r>
-              <a:t>15주 전체 구성</a:t>
-            </a:r>
-          </a:p>
-          <a:p>
-            <a:pPr>
-              <a:spcAft>
-                <a:spcPts val="1000"/>
-              </a:spcAft>
-            </a:pPr>
-            <a:r>
-              <a:rPr>
-                <a:solidFill>
-                  <a:srgbClr val="AFAFAF"/>
-                </a:solidFill>
-              </a:rPr>
-              <a:t>3.2  </a:t>
-            </a:r>
-            <a:r>
-              <a:t>ML 파트 (3~5주)</a:t>
-            </a:r>
-          </a:p>
-          <a:p>
-            <a:pPr>
-              <a:spcAft>
-                <a:spcPts val="1000"/>
-              </a:spcAft>
-            </a:pPr>
-            <a:r>
-              <a:rPr>
-                <a:solidFill>
-                  <a:srgbClr val="AFAFAF"/>
-                </a:solidFill>
-              </a:rPr>
-              <a:t>3.3  </a:t>
-            </a:r>
-            <a:r>
-              <a:t>DL 파트 (6~7·10~11주)</a:t>
-            </a:r>
-          </a:p>
-          <a:p>
-            <a:pPr>
-              <a:spcAft>
-                <a:spcPts val="1000"/>
-              </a:spcAft>
-            </a:pPr>
-            <a:r>
-              <a:rPr>
-                <a:solidFill>
-                  <a:srgbClr val="AFAFAF"/>
-                </a:solidFill>
-              </a:rPr>
-              <a:t>3.4  </a:t>
-            </a:r>
-            <a:r>
-              <a:t>응용 파트 (12~14주)</a:t>
-            </a:r>
-          </a:p>
-          <a:p>
-            <a:pPr>
-              <a:spcAft>
-                <a:spcPts val="1000"/>
-              </a:spcAft>
-            </a:pPr>
-            <a:r>
-              <a:rPr>
-                <a:solidFill>
-                  <a:srgbClr val="AFAFAF"/>
-                </a:solidFill>
-              </a:rPr>
-              <a:t>3.5  </a:t>
-            </a:r>
-            <a:r>
-              <a:t>교재 — 두 권 필수</a:t>
-            </a:r>
-          </a:p>
-        </p:txBody>
-      </p:sp>
-    </p:spTree>
-  </p:cSld>
-  <p:clrMapOvr>
-    <a:masterClrMapping/>
-  </p:clrMapOvr>
-</p:sld>
-</file>
-
-<file path=ppt/slides/slide14.xml><?xml version="1.0" encoding="utf-8"?>
-<p:sld xmlns:a="http://schemas.openxmlformats.org/drawingml/2006/main" xmlns:p="http://schemas.openxmlformats.org/presentationml/2006/main" xmlns:r="http://schemas.openxmlformats.org/officeDocument/2006/relationships">
-  <p:cSld>
-    <p:spTree>
-      <p:nvGrpSpPr>
-        <p:cNvPr id="1" name=""/>
-        <p:cNvGrpSpPr/>
-        <p:nvPr/>
-      </p:nvGrpSpPr>
-      <p:grpSpPr/>
-      <p:sp>
-        <p:nvSpPr>
-          <p:cNvPr id="2" name="Title 1"/>
-          <p:cNvSpPr>
-            <a:spLocks noGrp="1"/>
-          </p:cNvSpPr>
-          <p:nvPr>
-            <p:ph type="title" idx="100"/>
-          </p:nvPr>
-        </p:nvSpPr>
-        <p:spPr/>
-        <p:txBody>
-          <a:bodyPr/>
-          <a:lstStyle/>
-          <a:p>
-            <a:r>
-              <a:t>3.1 15주 전체 구성</a:t>
-            </a:r>
-          </a:p>
-        </p:txBody>
-      </p:sp>
-      <p:sp>
-        <p:nvSpPr>
-          <p:cNvPr id="3" name="Text Placeholder 2"/>
-          <p:cNvSpPr>
-            <a:spLocks noGrp="1"/>
-          </p:cNvSpPr>
-          <p:nvPr>
-            <p:ph type="body" idx="101"/>
-          </p:nvPr>
-        </p:nvSpPr>
-        <p:spPr/>
-        <p:txBody>
-          <a:bodyPr/>
-          <a:lstStyle/>
-          <a:p>
-            <a:r>
-              <a:t>3. 15주 로드맵</a:t>
-            </a:r>
-          </a:p>
-        </p:txBody>
-      </p:sp>
-      <p:sp>
-        <p:nvSpPr>
-          <p:cNvPr id="5" name="Text Placeholder 4"/>
-          <p:cNvSpPr>
-            <a:spLocks noGrp="1"/>
-          </p:cNvSpPr>
-          <p:nvPr>
-            <p:ph type="body" idx="103"/>
-          </p:nvPr>
-        </p:nvSpPr>
-        <p:spPr/>
-        <p:txBody>
-          <a:bodyPr/>
-          <a:lstStyle/>
-          <a:p>
-            <a:r>
-              <a:t>그림 1. 15주 구성 — ML → DL → 교통 응용 → 팀 프로젝트 발표</a:t>
+            <a:r>
+              <a:t>그림 1. 15주 구성 — ML → DL → Transformer → ETA 프로젝트</a:t>
             </a:r>
           </a:p>
         </p:txBody>
@@ -6895,6 +4889,450 @@
 </p:sld>
 </file>
 
+<file path=ppt/slides/slide12.xml><?xml version="1.0" encoding="utf-8"?>
+<p:sld xmlns:a="http://schemas.openxmlformats.org/drawingml/2006/main" xmlns:p="http://schemas.openxmlformats.org/presentationml/2006/main" xmlns:r="http://schemas.openxmlformats.org/officeDocument/2006/relationships">
+  <p:cSld>
+    <p:spTree>
+      <p:nvGrpSpPr>
+        <p:cNvPr id="1" name=""/>
+        <p:cNvGrpSpPr/>
+        <p:nvPr/>
+      </p:nvGrpSpPr>
+      <p:grpSpPr/>
+      <p:sp>
+        <p:nvSpPr>
+          <p:cNvPr id="2" name="Title 1"/>
+          <p:cNvSpPr>
+            <a:spLocks noGrp="1"/>
+          </p:cNvSpPr>
+          <p:nvPr>
+            <p:ph type="title" idx="100"/>
+          </p:nvPr>
+        </p:nvSpPr>
+        <p:spPr/>
+        <p:txBody>
+          <a:bodyPr/>
+          <a:lstStyle/>
+          <a:p>
+            <a:r>
+              <a:t>3.2 ML 파트 (3~5주)</a:t>
+            </a:r>
+          </a:p>
+        </p:txBody>
+      </p:sp>
+      <p:sp>
+        <p:nvSpPr>
+          <p:cNvPr id="3" name="Text Placeholder 2"/>
+          <p:cNvSpPr>
+            <a:spLocks noGrp="1"/>
+          </p:cNvSpPr>
+          <p:nvPr>
+            <p:ph type="body" idx="101"/>
+          </p:nvPr>
+        </p:nvSpPr>
+        <p:spPr/>
+        <p:txBody>
+          <a:bodyPr/>
+          <a:lstStyle/>
+          <a:p>
+            <a:r>
+              <a:t>3. 15주 로드맵</a:t>
+            </a:r>
+          </a:p>
+        </p:txBody>
+      </p:sp>
+      <p:sp>
+        <p:nvSpPr>
+          <p:cNvPr id="4" name="Text Placeholder 3"/>
+          <p:cNvSpPr>
+            <a:spLocks noGrp="1"/>
+          </p:cNvSpPr>
+          <p:nvPr>
+            <p:ph type="body" idx="102"/>
+          </p:nvPr>
+        </p:nvSpPr>
+        <p:spPr/>
+        <p:txBody>
+          <a:bodyPr/>
+          <a:lstStyle/>
+          <a:p>
+            <a:pPr/>
+            <a:r>
+              <a:t>Ch1·2·3(발췌)·4·6·7</a:t>
+            </a:r>
+          </a:p>
+          <a:p>
+            <a:pPr/>
+            <a:r>
+              <a:t>Ch2: End-to-End 프로젝트 흐름</a:t>
+            </a:r>
+          </a:p>
+          <a:p>
+            <a:pPr/>
+            <a:r>
+              <a:t>4주차: 경사하강법·비용함수·규제</a:t>
+            </a:r>
+          </a:p>
+          <a:p>
+            <a:pPr/>
+            <a:r>
+              <a:t>5주차: Random Forest·XGBoost</a:t>
+            </a:r>
+          </a:p>
+        </p:txBody>
+      </p:sp>
+      <p:sp>
+        <p:nvSpPr>
+          <p:cNvPr id="25" name="Slide Number Placeholder 0"/>
+          <p:cNvSpPr>
+            <a:spLocks noGrp="1"/>
+          </p:cNvSpPr>
+          <p:nvPr>
+            <p:ph type="sldNum" sz="quarter" idx="4294967295"/>
+          </p:nvPr>
+        </p:nvSpPr>
+        <p:spPr>
+          <a:xfrm>
+            <a:off x="10591495" y="6355080"/>
+            <a:ext cx="914400" cy="274320"/>
+          </a:xfrm>
+          <a:prstGeom prst="rect">
+            <a:avLst/>
+          </a:prstGeom>
+          <a:extLst>
+            <a:ext uri="{C572A759-6A51-4108-AA02-DFA0A04FC94B}">
+              <ma14:wrappingTextBoxFlag xmlns:ma14="http://schemas.microsoft.com/office/mac/drawingml/2011/main" val="0"/>
+            </a:ext>
+          </a:extLst>
+        </p:spPr>
+        <p:txBody>
+          <a:bodyPr/>
+          <a:lstStyle>
+            <a:lvl1pPr>
+              <a:defRPr sz="1000">
+                <a:solidFill>
+                  <a:srgbClr val="AFAFAF"/>
+                </a:solidFill>
+                <a:latin typeface="Pretendard Medium"/>
+                <a:ea typeface="Pretendard Medium"/>
+                <a:cs typeface="Pretendard Medium"/>
+              </a:defRPr>
+            </a:lvl1pPr>
+          </a:lstStyle>
+          <a:p>
+            <a:pPr algn="r"/>
+            <a:fld id="{F7021451-1387-4CA6-816F-3879F97B5CBC}" type="slidenum">
+              <a:rPr b="0" lang="en-US"/>
+              <a:t>1004</a:t>
+            </a:fld>
+            <a:endParaRPr lang="en-US"/>
+          </a:p>
+        </p:txBody>
+      </p:sp>
+    </p:spTree>
+  </p:cSld>
+  <p:clrMapOvr>
+    <a:masterClrMapping/>
+  </p:clrMapOvr>
+</p:sld>
+</file>
+
+<file path=ppt/slides/slide13.xml><?xml version="1.0" encoding="utf-8"?>
+<p:sld xmlns:a="http://schemas.openxmlformats.org/drawingml/2006/main" xmlns:p="http://schemas.openxmlformats.org/presentationml/2006/main" xmlns:r="http://schemas.openxmlformats.org/officeDocument/2006/relationships">
+  <p:cSld>
+    <p:spTree>
+      <p:nvGrpSpPr>
+        <p:cNvPr id="1" name=""/>
+        <p:cNvGrpSpPr/>
+        <p:nvPr/>
+      </p:nvGrpSpPr>
+      <p:grpSpPr/>
+      <p:sp>
+        <p:nvSpPr>
+          <p:cNvPr id="2" name="Title 1"/>
+          <p:cNvSpPr>
+            <a:spLocks noGrp="1"/>
+          </p:cNvSpPr>
+          <p:nvPr>
+            <p:ph type="title" idx="100"/>
+          </p:nvPr>
+        </p:nvSpPr>
+        <p:spPr/>
+        <p:txBody>
+          <a:bodyPr/>
+          <a:lstStyle/>
+          <a:p>
+            <a:r>
+              <a:t>3.3 DL 파트 (6~7·10주)</a:t>
+            </a:r>
+          </a:p>
+        </p:txBody>
+      </p:sp>
+      <p:sp>
+        <p:nvSpPr>
+          <p:cNvPr id="3" name="Text Placeholder 2"/>
+          <p:cNvSpPr>
+            <a:spLocks noGrp="1"/>
+          </p:cNvSpPr>
+          <p:nvPr>
+            <p:ph type="body" idx="101"/>
+          </p:nvPr>
+        </p:nvSpPr>
+        <p:spPr/>
+        <p:txBody>
+          <a:bodyPr/>
+          <a:lstStyle/>
+          <a:p>
+            <a:r>
+              <a:t>3. 15주 로드맵</a:t>
+            </a:r>
+          </a:p>
+        </p:txBody>
+      </p:sp>
+      <p:sp>
+        <p:nvSpPr>
+          <p:cNvPr id="4" name="Text Placeholder 3"/>
+          <p:cNvSpPr>
+            <a:spLocks noGrp="1"/>
+          </p:cNvSpPr>
+          <p:nvPr>
+            <p:ph type="body" idx="102"/>
+          </p:nvPr>
+        </p:nvSpPr>
+        <p:spPr/>
+        <p:txBody>
+          <a:bodyPr/>
+          <a:lstStyle/>
+          <a:p>
+            <a:pPr/>
+            <a:r>
+              <a:t>numpy 기반 신경망 구현</a:t>
+            </a:r>
+          </a:p>
+          <a:p>
+            <a:pPr lvl="1"/>
+            <a:r>
+              <a:t>순전파(6주) → 손실함수·경사법(7주) → 오차역전파(7주)</a:t>
+            </a:r>
+          </a:p>
+          <a:p>
+            <a:pPr/>
+            <a:r>
+              <a:t>계산 그래프를 이용한 역전파</a:t>
+            </a:r>
+          </a:p>
+          <a:p>
+            <a:pPr/>
+            <a:r>
+              <a:t>10주차 PyTorch·MLP·옵티마이저</a:t>
+            </a:r>
+          </a:p>
+        </p:txBody>
+      </p:sp>
+      <p:sp>
+        <p:nvSpPr>
+          <p:cNvPr id="25" name="Slide Number Placeholder 0"/>
+          <p:cNvSpPr>
+            <a:spLocks noGrp="1"/>
+          </p:cNvSpPr>
+          <p:nvPr>
+            <p:ph type="sldNum" sz="quarter" idx="4294967295"/>
+          </p:nvPr>
+        </p:nvSpPr>
+        <p:spPr>
+          <a:xfrm>
+            <a:off x="10591495" y="6355080"/>
+            <a:ext cx="914400" cy="274320"/>
+          </a:xfrm>
+          <a:prstGeom prst="rect">
+            <a:avLst/>
+          </a:prstGeom>
+          <a:extLst>
+            <a:ext uri="{C572A759-6A51-4108-AA02-DFA0A04FC94B}">
+              <ma14:wrappingTextBoxFlag xmlns:ma14="http://schemas.microsoft.com/office/mac/drawingml/2011/main" val="0"/>
+            </a:ext>
+          </a:extLst>
+        </p:spPr>
+        <p:txBody>
+          <a:bodyPr/>
+          <a:lstStyle>
+            <a:lvl1pPr>
+              <a:defRPr sz="1000">
+                <a:solidFill>
+                  <a:srgbClr val="AFAFAF"/>
+                </a:solidFill>
+                <a:latin typeface="Pretendard Medium"/>
+                <a:ea typeface="Pretendard Medium"/>
+                <a:cs typeface="Pretendard Medium"/>
+              </a:defRPr>
+            </a:lvl1pPr>
+          </a:lstStyle>
+          <a:p>
+            <a:pPr algn="r"/>
+            <a:fld id="{F7021451-1387-4CA6-816F-3879F97B5CBC}" type="slidenum">
+              <a:rPr b="0" lang="en-US"/>
+              <a:t>1004</a:t>
+            </a:fld>
+            <a:endParaRPr lang="en-US"/>
+          </a:p>
+        </p:txBody>
+      </p:sp>
+    </p:spTree>
+  </p:cSld>
+  <p:clrMapOvr>
+    <a:masterClrMapping/>
+  </p:clrMapOvr>
+</p:sld>
+</file>
+
+<file path=ppt/slides/slide14.xml><?xml version="1.0" encoding="utf-8"?>
+<p:sld xmlns:a="http://schemas.openxmlformats.org/drawingml/2006/main" xmlns:p="http://schemas.openxmlformats.org/presentationml/2006/main" xmlns:r="http://schemas.openxmlformats.org/officeDocument/2006/relationships">
+  <p:cSld>
+    <p:spTree>
+      <p:nvGrpSpPr>
+        <p:cNvPr id="1" name=""/>
+        <p:cNvGrpSpPr/>
+        <p:nvPr/>
+      </p:nvGrpSpPr>
+      <p:grpSpPr/>
+      <p:sp>
+        <p:nvSpPr>
+          <p:cNvPr id="2" name="Title 1"/>
+          <p:cNvSpPr>
+            <a:spLocks noGrp="1"/>
+          </p:cNvSpPr>
+          <p:nvPr>
+            <p:ph type="title" idx="100"/>
+          </p:nvPr>
+        </p:nvSpPr>
+        <p:spPr/>
+        <p:txBody>
+          <a:bodyPr/>
+          <a:lstStyle/>
+          <a:p>
+            <a:r>
+              <a:t>3.4 Transformer·ETA 파트</a:t>
+            </a:r>
+          </a:p>
+        </p:txBody>
+      </p:sp>
+      <p:sp>
+        <p:nvSpPr>
+          <p:cNvPr id="3" name="Text Placeholder 2"/>
+          <p:cNvSpPr>
+            <a:spLocks noGrp="1"/>
+          </p:cNvSpPr>
+          <p:nvPr>
+            <p:ph type="body" idx="101"/>
+          </p:nvPr>
+        </p:nvSpPr>
+        <p:spPr/>
+        <p:txBody>
+          <a:bodyPr/>
+          <a:lstStyle/>
+          <a:p>
+            <a:r>
+              <a:t>3. 15주 로드맵</a:t>
+            </a:r>
+          </a:p>
+        </p:txBody>
+      </p:sp>
+      <p:sp>
+        <p:nvSpPr>
+          <p:cNvPr id="4" name="Text Placeholder 3"/>
+          <p:cNvSpPr>
+            <a:spLocks noGrp="1"/>
+          </p:cNvSpPr>
+          <p:nvPr>
+            <p:ph type="body" idx="102"/>
+          </p:nvPr>
+        </p:nvSpPr>
+        <p:spPr/>
+        <p:txBody>
+          <a:bodyPr/>
+          <a:lstStyle/>
+          <a:p>
+            <a:pPr/>
+            <a:r>
+              <a:t>11주차: 시계열 입력과 Self-Attention</a:t>
+            </a:r>
+          </a:p>
+          <a:p>
+            <a:pPr/>
+            <a:r>
+              <a:t>12주차: Transformer Encoder 기반 회귀</a:t>
+            </a:r>
+          </a:p>
+          <a:p>
+            <a:pPr/>
+            <a:r>
+              <a:t>13주차: 노선별 BIS 데이터와 ETA 모델</a:t>
+            </a:r>
+          </a:p>
+          <a:p>
+            <a:pPr/>
+            <a:r>
+              <a:t>14주차: 모델 비교와 오차 분석</a:t>
+            </a:r>
+          </a:p>
+        </p:txBody>
+      </p:sp>
+      <p:sp>
+        <p:nvSpPr>
+          <p:cNvPr id="25" name="Slide Number Placeholder 0"/>
+          <p:cNvSpPr>
+            <a:spLocks noGrp="1"/>
+          </p:cNvSpPr>
+          <p:nvPr>
+            <p:ph type="sldNum" sz="quarter" idx="4294967295"/>
+          </p:nvPr>
+        </p:nvSpPr>
+        <p:spPr>
+          <a:xfrm>
+            <a:off x="10591495" y="6355080"/>
+            <a:ext cx="914400" cy="274320"/>
+          </a:xfrm>
+          <a:prstGeom prst="rect">
+            <a:avLst/>
+          </a:prstGeom>
+          <a:extLst>
+            <a:ext uri="{C572A759-6A51-4108-AA02-DFA0A04FC94B}">
+              <ma14:wrappingTextBoxFlag xmlns:ma14="http://schemas.microsoft.com/office/mac/drawingml/2011/main" val="0"/>
+            </a:ext>
+          </a:extLst>
+        </p:spPr>
+        <p:txBody>
+          <a:bodyPr/>
+          <a:lstStyle>
+            <a:lvl1pPr>
+              <a:defRPr sz="1000">
+                <a:solidFill>
+                  <a:srgbClr val="AFAFAF"/>
+                </a:solidFill>
+                <a:latin typeface="Pretendard Medium"/>
+                <a:ea typeface="Pretendard Medium"/>
+                <a:cs typeface="Pretendard Medium"/>
+              </a:defRPr>
+            </a:lvl1pPr>
+          </a:lstStyle>
+          <a:p>
+            <a:pPr algn="r"/>
+            <a:fld id="{F7021451-1387-4CA6-816F-3879F97B5CBC}" type="slidenum">
+              <a:rPr b="0" lang="en-US"/>
+              <a:t>1004</a:t>
+            </a:fld>
+            <a:endParaRPr lang="en-US"/>
+          </a:p>
+        </p:txBody>
+      </p:sp>
+    </p:spTree>
+  </p:cSld>
+  <p:clrMapOvr>
+    <a:masterClrMapping/>
+  </p:clrMapOvr>
+</p:sld>
+</file>
+
 <file path=ppt/slides/slide15.xml><?xml version="1.0" encoding="utf-8"?>
 <p:sld xmlns:a="http://schemas.openxmlformats.org/drawingml/2006/main" xmlns:p="http://schemas.openxmlformats.org/presentationml/2006/main" xmlns:r="http://schemas.openxmlformats.org/officeDocument/2006/relationships">
   <p:cSld>
@@ -6921,7 +5359,7 @@
           <a:lstStyle/>
           <a:p>
             <a:r>
-              <a:t>3.2 ML 파트 (3~5주)</a:t>
+              <a:t>3.5 교재 — 두 권 필수</a:t>
             </a:r>
           </a:p>
         </p:txBody>
@@ -6964,25 +5402,25 @@
           <a:p>
             <a:pPr/>
             <a:r>
-              <a:t>Ch1·2·3(발췌)·4·6·7</a:t>
+              <a:t>『핸즈온 머신러닝 3판』 — ML · 3~5주</a:t>
             </a:r>
           </a:p>
           <a:p>
             <a:pPr/>
             <a:r>
-              <a:t>Ch2: End-to-End 프로젝트 흐름</a:t>
+              <a:t>『밑바닥부터 시작하는 딥러닝 1』 — DL · 6~7·10주</a:t>
             </a:r>
           </a:p>
           <a:p>
             <a:pPr/>
             <a:r>
-              <a:t>4주차: 경사하강법·비용함수·규제</a:t>
+              <a:t>Attention·Transformer — 강의노트</a:t>
             </a:r>
           </a:p>
           <a:p>
             <a:pPr/>
             <a:r>
-              <a:t>5주차: Random Forest·XGBoost</a:t>
+              <a:t>실습 코드: GitHub 공개</a:t>
             </a:r>
           </a:p>
         </p:txBody>
@@ -7055,12 +5493,12 @@
       <p:grpSpPr/>
       <p:sp>
         <p:nvSpPr>
-          <p:cNvPr id="2" name="Title 1"/>
-          <p:cNvSpPr>
-            <a:spLocks noGrp="1"/>
-          </p:cNvSpPr>
-          <p:nvPr>
-            <p:ph type="title" idx="100"/>
+          <p:cNvPr id="2" name="Text Placeholder 1"/>
+          <p:cNvSpPr>
+            <a:spLocks noGrp="1"/>
+          </p:cNvSpPr>
+          <p:nvPr>
+            <p:ph type="body" idx="100"/>
           </p:nvPr>
         </p:nvSpPr>
         <p:spPr/>
@@ -7069,19 +5507,19 @@
           <a:lstStyle/>
           <a:p>
             <a:r>
-              <a:t>3.3 DL 파트 (6~7·10~11주)</a:t>
-            </a:r>
-          </a:p>
-        </p:txBody>
-      </p:sp>
-      <p:sp>
-        <p:nvSpPr>
-          <p:cNvPr id="3" name="Text Placeholder 2"/>
-          <p:cNvSpPr>
-            <a:spLocks noGrp="1"/>
-          </p:cNvSpPr>
-          <p:nvPr>
-            <p:ph type="body" idx="101"/>
+              <a:t>04</a:t>
+            </a:r>
+          </a:p>
+        </p:txBody>
+      </p:sp>
+      <p:sp>
+        <p:nvSpPr>
+          <p:cNvPr id="3" name="Title 2"/>
+          <p:cNvSpPr>
+            <a:spLocks noGrp="1"/>
+          </p:cNvSpPr>
+          <p:nvPr>
+            <p:ph type="title" idx="101"/>
           </p:nvPr>
         </p:nvSpPr>
         <p:spPr/>
@@ -7090,7 +5528,7 @@
           <a:lstStyle/>
           <a:p>
             <a:r>
-              <a:t>3. 15주 로드맵</a:t>
+              <a:t>평가와 운영</a:t>
             </a:r>
           </a:p>
         </p:txBody>
@@ -7110,76 +5548,94 @@
           <a:bodyPr/>
           <a:lstStyle/>
           <a:p>
-            <a:pPr/>
-            <a:r>
-              <a:t>numpy 기반 신경망 구현</a:t>
-            </a:r>
-          </a:p>
-          <a:p>
-            <a:pPr lvl="1"/>
-            <a:r>
-              <a:t>순전파(6주) → 손실함수·경사법(7주) → 오차역전파(7주)</a:t>
-            </a:r>
-          </a:p>
-          <a:p>
-            <a:pPr/>
-            <a:r>
-              <a:t>계산 그래프를 이용한 역전파</a:t>
-            </a:r>
-          </a:p>
-          <a:p>
-            <a:pPr/>
-            <a:r>
-              <a:t>10주차 PyTorch, 11주차 CNN</a:t>
-            </a:r>
-          </a:p>
-        </p:txBody>
-      </p:sp>
-      <p:sp>
-        <p:nvSpPr>
-          <p:cNvPr id="25" name="Slide Number Placeholder 0"/>
-          <p:cNvSpPr>
-            <a:spLocks noGrp="1"/>
-          </p:cNvSpPr>
-          <p:nvPr>
-            <p:ph type="sldNum" sz="quarter" idx="4294967295"/>
-          </p:nvPr>
-        </p:nvSpPr>
-        <p:spPr>
-          <a:xfrm>
-            <a:off x="10591495" y="6355080"/>
-            <a:ext cx="914400" cy="274320"/>
-          </a:xfrm>
-          <a:prstGeom prst="rect">
-            <a:avLst/>
-          </a:prstGeom>
-          <a:extLst>
-            <a:ext uri="{C572A759-6A51-4108-AA02-DFA0A04FC94B}">
-              <ma14:wrappingTextBoxFlag xmlns:ma14="http://schemas.microsoft.com/office/mac/drawingml/2011/main" val="0"/>
-            </a:ext>
-          </a:extLst>
-        </p:spPr>
-        <p:txBody>
-          <a:bodyPr/>
-          <a:lstStyle>
-            <a:lvl1pPr>
-              <a:defRPr sz="1000">
+            <a:pPr>
+              <a:spcAft>
+                <a:spcPts val="1000"/>
+              </a:spcAft>
+            </a:pPr>
+            <a:r>
+              <a:rPr>
                 <a:solidFill>
                   <a:srgbClr val="AFAFAF"/>
                 </a:solidFill>
-                <a:latin typeface="Pretendard Medium"/>
-                <a:ea typeface="Pretendard Medium"/>
-                <a:cs typeface="Pretendard Medium"/>
-              </a:defRPr>
-            </a:lvl1pPr>
-          </a:lstStyle>
-          <a:p>
-            <a:pPr algn="r"/>
-            <a:fld id="{F7021451-1387-4CA6-816F-3879F97B5CBC}" type="slidenum">
-              <a:rPr b="0" lang="en-US"/>
-              <a:t>1004</a:t>
-            </a:fld>
-            <a:endParaRPr lang="en-US"/>
+              </a:rPr>
+              <a:t>4.1  </a:t>
+            </a:r>
+            <a:r>
+              <a:t>평가 비중</a:t>
+            </a:r>
+          </a:p>
+          <a:p>
+            <a:pPr>
+              <a:spcAft>
+                <a:spcPts val="1000"/>
+              </a:spcAft>
+            </a:pPr>
+            <a:r>
+              <a:rPr>
+                <a:solidFill>
+                  <a:srgbClr val="AFAFAF"/>
+                </a:solidFill>
+              </a:rPr>
+              <a:t>4.2  </a:t>
+            </a:r>
+            <a:r>
+              <a:t>중간고사와 팀 프로젝트</a:t>
+            </a:r>
+          </a:p>
+          <a:p>
+            <a:pPr>
+              <a:spcAft>
+                <a:spcPts val="1000"/>
+              </a:spcAft>
+            </a:pPr>
+            <a:r>
+              <a:rPr>
+                <a:solidFill>
+                  <a:srgbClr val="AFAFAF"/>
+                </a:solidFill>
+              </a:rPr>
+              <a:t>4.3  </a:t>
+            </a:r>
+            <a:r>
+              <a:t>실습 과제 3회</a:t>
+            </a:r>
+          </a:p>
+          <a:p>
+            <a:pPr>
+              <a:spcAft>
+                <a:spcPts val="1000"/>
+              </a:spcAft>
+            </a:pPr>
+            <a:r>
+              <a:rPr>
+                <a:solidFill>
+                  <a:srgbClr val="AFAFAF"/>
+                </a:solidFill>
+              </a:rPr>
+              <a:t>4.4  </a:t>
+            </a:r>
+            <a:r>
+              <a:t>과제 작성 원칙</a:t>
+            </a:r>
+          </a:p>
+          <a:p>
+            <a:pPr>
+              <a:spcAft>
+                <a:spcPts val="1000"/>
+              </a:spcAft>
+            </a:pPr>
+            <a:r>
+              <a:rPr>
+                <a:solidFill>
+                  <a:srgbClr val="AFAFAF"/>
+                </a:solidFill>
+              </a:rPr>
+              <a:t>4.5  </a:t>
+            </a:r>
+            <a:r>
+              <a:t>출결·휴강·연락</a:t>
+            </a:r>
           </a:p>
         </p:txBody>
       </p:sp>
@@ -7217,7 +5673,7 @@
           <a:lstStyle/>
           <a:p>
             <a:r>
-              <a:t>3.4 응용 파트 (12~14주)</a:t>
+              <a:t>4.1 평가 비중</a:t>
             </a:r>
           </a:p>
         </p:txBody>
@@ -7238,7 +5694,7 @@
           <a:lstStyle/>
           <a:p>
             <a:r>
-              <a:t>3. 15주 로드맵</a:t>
+              <a:t>4. 평가와 운영</a:t>
             </a:r>
           </a:p>
         </p:txBody>
@@ -7258,31 +5714,583 @@
           <a:bodyPr/>
           <a:lstStyle/>
           <a:p>
-            <a:pPr/>
-            <a:r>
-              <a:t>수요 예측(12주): 시계열 분할, 데이터 누수</a:t>
-            </a:r>
-          </a:p>
-          <a:p>
-            <a:pPr/>
-            <a:r>
-              <a:t>ETA(13주): 오차 분포와 비대칭 비용</a:t>
-            </a:r>
-          </a:p>
-          <a:p>
-            <a:pPr/>
-            <a:r>
-              <a:t>강화학습(14주): 신호제어·배차 사례</a:t>
-            </a:r>
-          </a:p>
-          <a:p>
-            <a:pPr lvl="1"/>
-            <a:r>
-              <a:t>강화학습이 필요한 문제와 예측으로 충분한 문제</a:t>
-            </a:r>
-          </a:p>
-        </p:txBody>
-      </p:sp>
+            <a:r>
+              <a:t>표 3. 평가 항목과 비중</a:t>
+            </a:r>
+          </a:p>
+        </p:txBody>
+      </p:sp>
+      <p:graphicFrame>
+        <p:nvGraphicFramePr>
+          <p:cNvPr id="5" name="Table Placeholder 4"/>
+          <p:cNvGraphicFramePr>
+            <a:graphicFrameLocks noGrp="1"/>
+          </p:cNvGraphicFramePr>
+          <p:nvPr>
+            <p:ph type="tbl" idx="103"/>
+          </p:nvPr>
+        </p:nvGraphicFramePr>
+        <p:xfrm>
+          <a:off x="685800" y="1828800"/>
+          <a:ext cx="10820095" cy="2946400"/>
+        </p:xfrm>
+        <a:graphic>
+          <a:graphicData uri="http://schemas.openxmlformats.org/drawingml/2006/table">
+            <a:tbl>
+              <a:tblPr firstRow="0" bandRow="0" firstCol="0" lastRow="0" lastCol="0" bandCol="0"/>
+              <a:tblGrid>
+                <a:gridCol w="3606698"/>
+                <a:gridCol w="3606698"/>
+                <a:gridCol w="3606699"/>
+              </a:tblGrid>
+              <a:tr h="406400">
+                <a:tc>
+                  <a:txBody>
+                    <a:bodyPr/>
+                    <a:lstStyle/>
+                    <a:p>
+                      <a:r>
+                        <a:rPr sz="1300" b="0">
+                          <a:solidFill>
+                            <a:srgbClr val="FFFFFF"/>
+                          </a:solidFill>
+                          <a:latin typeface="Pretendard Medium"/>
+                        </a:rPr>
+                        <a:t>항목</a:t>
+                      </a:r>
+                    </a:p>
+                  </a:txBody>
+                  <a:tcPr marL="101600" marR="101600" marT="76200" marB="76200" anchor="ctr">
+                    <a:solidFill>
+                      <a:srgbClr val="000000"/>
+                    </a:solidFill>
+                    <a:lnL w="0">
+                      <a:noFill/>
+                    </a:lnL>
+                    <a:lnR w="0">
+                      <a:noFill/>
+                    </a:lnR>
+                    <a:lnT w="0">
+                      <a:noFill/>
+                    </a:lnT>
+                    <a:lnB w="0">
+                      <a:noFill/>
+                    </a:lnB>
+                  </a:tcPr>
+                </a:tc>
+                <a:tc>
+                  <a:txBody>
+                    <a:bodyPr/>
+                    <a:lstStyle/>
+                    <a:p>
+                      <a:r>
+                        <a:rPr sz="1300" b="0">
+                          <a:solidFill>
+                            <a:srgbClr val="FFFFFF"/>
+                          </a:solidFill>
+                          <a:latin typeface="Pretendard Medium"/>
+                        </a:rPr>
+                        <a:t>비중</a:t>
+                      </a:r>
+                    </a:p>
+                  </a:txBody>
+                  <a:tcPr marL="101600" marR="101600" marT="76200" marB="76200" anchor="ctr">
+                    <a:solidFill>
+                      <a:srgbClr val="000000"/>
+                    </a:solidFill>
+                    <a:lnL w="0">
+                      <a:noFill/>
+                    </a:lnL>
+                    <a:lnR w="0">
+                      <a:noFill/>
+                    </a:lnR>
+                    <a:lnT w="0">
+                      <a:noFill/>
+                    </a:lnT>
+                    <a:lnB w="0">
+                      <a:noFill/>
+                    </a:lnB>
+                  </a:tcPr>
+                </a:tc>
+                <a:tc>
+                  <a:txBody>
+                    <a:bodyPr/>
+                    <a:lstStyle/>
+                    <a:p>
+                      <a:r>
+                        <a:rPr sz="1300" b="0">
+                          <a:solidFill>
+                            <a:srgbClr val="FFFFFF"/>
+                          </a:solidFill>
+                          <a:latin typeface="Pretendard Medium"/>
+                        </a:rPr>
+                        <a:t>비고</a:t>
+                      </a:r>
+                    </a:p>
+                  </a:txBody>
+                  <a:tcPr marL="101600" marR="101600" marT="76200" marB="76200" anchor="ctr">
+                    <a:solidFill>
+                      <a:srgbClr val="000000"/>
+                    </a:solidFill>
+                    <a:lnL w="0">
+                      <a:noFill/>
+                    </a:lnL>
+                    <a:lnR w="0">
+                      <a:noFill/>
+                    </a:lnR>
+                    <a:lnT w="0">
+                      <a:noFill/>
+                    </a:lnT>
+                    <a:lnB w="0">
+                      <a:noFill/>
+                    </a:lnB>
+                  </a:tcPr>
+                </a:tc>
+              </a:tr>
+              <a:tr h="635000">
+                <a:tc>
+                  <a:txBody>
+                    <a:bodyPr/>
+                    <a:lstStyle/>
+                    <a:p>
+                      <a:r>
+                        <a:rPr sz="1300" b="1">
+                          <a:solidFill>
+                            <a:srgbClr val="000000"/>
+                          </a:solidFill>
+                          <a:latin typeface="Pretendard"/>
+                        </a:rPr>
+                        <a:t>중간고사</a:t>
+                      </a:r>
+                    </a:p>
+                  </a:txBody>
+                  <a:tcPr marL="101600" marR="101600" marT="101600" marB="101600" anchor="ctr">
+                    <a:solidFill>
+                      <a:srgbClr val="FFFFFF"/>
+                    </a:solidFill>
+                    <a:lnL w="0">
+                      <a:noFill/>
+                    </a:lnL>
+                    <a:lnR w="0">
+                      <a:noFill/>
+                    </a:lnR>
+                    <a:lnT w="0">
+                      <a:noFill/>
+                    </a:lnT>
+                    <a:lnB w="9525">
+                      <a:solidFill>
+                        <a:srgbClr val="E2E2E2"/>
+                      </a:solidFill>
+                    </a:lnB>
+                  </a:tcPr>
+                </a:tc>
+                <a:tc>
+                  <a:txBody>
+                    <a:bodyPr/>
+                    <a:lstStyle/>
+                    <a:p>
+                      <a:r>
+                        <a:rPr sz="1300" b="0">
+                          <a:solidFill>
+                            <a:srgbClr val="5E5E5E"/>
+                          </a:solidFill>
+                          <a:latin typeface="Pretendard Medium"/>
+                        </a:rPr>
+                        <a:t>30%</a:t>
+                      </a:r>
+                    </a:p>
+                  </a:txBody>
+                  <a:tcPr marL="101600" marR="101600" marT="101600" marB="101600" anchor="ctr">
+                    <a:solidFill>
+                      <a:srgbClr val="FFFFFF"/>
+                    </a:solidFill>
+                    <a:lnL w="0">
+                      <a:noFill/>
+                    </a:lnL>
+                    <a:lnR w="0">
+                      <a:noFill/>
+                    </a:lnR>
+                    <a:lnT w="0">
+                      <a:noFill/>
+                    </a:lnT>
+                    <a:lnB w="9525">
+                      <a:solidFill>
+                        <a:srgbClr val="E2E2E2"/>
+                      </a:solidFill>
+                    </a:lnB>
+                  </a:tcPr>
+                </a:tc>
+                <a:tc>
+                  <a:txBody>
+                    <a:bodyPr/>
+                    <a:lstStyle/>
+                    <a:p>
+                      <a:r>
+                        <a:rPr sz="1300" b="0">
+                          <a:solidFill>
+                            <a:srgbClr val="5E5E5E"/>
+                          </a:solidFill>
+                          <a:latin typeface="Pretendard Medium"/>
+                        </a:rPr>
+                        <a:t>10-27 시행</a:t>
+                      </a:r>
+                    </a:p>
+                  </a:txBody>
+                  <a:tcPr marL="101600" marR="101600" marT="101600" marB="101600" anchor="ctr">
+                    <a:solidFill>
+                      <a:srgbClr val="FFFFFF"/>
+                    </a:solidFill>
+                    <a:lnL w="0">
+                      <a:noFill/>
+                    </a:lnL>
+                    <a:lnR w="0">
+                      <a:noFill/>
+                    </a:lnR>
+                    <a:lnT w="0">
+                      <a:noFill/>
+                    </a:lnT>
+                    <a:lnB w="9525">
+                      <a:solidFill>
+                        <a:srgbClr val="E2E2E2"/>
+                      </a:solidFill>
+                    </a:lnB>
+                  </a:tcPr>
+                </a:tc>
+              </a:tr>
+              <a:tr h="635000">
+                <a:tc>
+                  <a:txBody>
+                    <a:bodyPr/>
+                    <a:lstStyle/>
+                    <a:p>
+                      <a:r>
+                        <a:rPr sz="1300" b="1">
+                          <a:solidFill>
+                            <a:srgbClr val="000000"/>
+                          </a:solidFill>
+                          <a:latin typeface="Pretendard"/>
+                        </a:rPr>
+                        <a:t>팀 프로젝트</a:t>
+                      </a:r>
+                    </a:p>
+                  </a:txBody>
+                  <a:tcPr marL="101600" marR="101600" marT="101600" marB="101600" anchor="ctr">
+                    <a:solidFill>
+                      <a:srgbClr val="FFFFFF"/>
+                    </a:solidFill>
+                    <a:lnL w="0">
+                      <a:noFill/>
+                    </a:lnL>
+                    <a:lnR w="0">
+                      <a:noFill/>
+                    </a:lnR>
+                    <a:lnT w="0">
+                      <a:noFill/>
+                    </a:lnT>
+                    <a:lnB w="9525">
+                      <a:solidFill>
+                        <a:srgbClr val="E2E2E2"/>
+                      </a:solidFill>
+                    </a:lnB>
+                  </a:tcPr>
+                </a:tc>
+                <a:tc>
+                  <a:txBody>
+                    <a:bodyPr/>
+                    <a:lstStyle/>
+                    <a:p>
+                      <a:r>
+                        <a:rPr sz="1300" b="0">
+                          <a:solidFill>
+                            <a:srgbClr val="5E5E5E"/>
+                          </a:solidFill>
+                          <a:latin typeface="Pretendard Medium"/>
+                        </a:rPr>
+                        <a:t>35%</a:t>
+                      </a:r>
+                    </a:p>
+                  </a:txBody>
+                  <a:tcPr marL="101600" marR="101600" marT="101600" marB="101600" anchor="ctr">
+                    <a:solidFill>
+                      <a:srgbClr val="FFFFFF"/>
+                    </a:solidFill>
+                    <a:lnL w="0">
+                      <a:noFill/>
+                    </a:lnL>
+                    <a:lnR w="0">
+                      <a:noFill/>
+                    </a:lnR>
+                    <a:lnT w="0">
+                      <a:noFill/>
+                    </a:lnT>
+                    <a:lnB w="9525">
+                      <a:solidFill>
+                        <a:srgbClr val="E2E2E2"/>
+                      </a:solidFill>
+                    </a:lnB>
+                  </a:tcPr>
+                </a:tc>
+                <a:tc>
+                  <a:txBody>
+                    <a:bodyPr/>
+                    <a:lstStyle/>
+                    <a:p>
+                      <a:r>
+                        <a:rPr sz="1300" b="0">
+                          <a:solidFill>
+                            <a:srgbClr val="5E5E5E"/>
+                          </a:solidFill>
+                          <a:latin typeface="Pretendard Medium"/>
+                        </a:rPr>
+                        <a:t>발표 25 · 보고서 10</a:t>
+                      </a:r>
+                    </a:p>
+                  </a:txBody>
+                  <a:tcPr marL="101600" marR="101600" marT="101600" marB="101600" anchor="ctr">
+                    <a:solidFill>
+                      <a:srgbClr val="FFFFFF"/>
+                    </a:solidFill>
+                    <a:lnL w="0">
+                      <a:noFill/>
+                    </a:lnL>
+                    <a:lnR w="0">
+                      <a:noFill/>
+                    </a:lnR>
+                    <a:lnT w="0">
+                      <a:noFill/>
+                    </a:lnT>
+                    <a:lnB w="9525">
+                      <a:solidFill>
+                        <a:srgbClr val="E2E2E2"/>
+                      </a:solidFill>
+                    </a:lnB>
+                  </a:tcPr>
+                </a:tc>
+              </a:tr>
+              <a:tr h="635000">
+                <a:tc>
+                  <a:txBody>
+                    <a:bodyPr/>
+                    <a:lstStyle/>
+                    <a:p>
+                      <a:r>
+                        <a:rPr sz="1300" b="1">
+                          <a:solidFill>
+                            <a:srgbClr val="000000"/>
+                          </a:solidFill>
+                          <a:latin typeface="Pretendard"/>
+                        </a:rPr>
+                        <a:t>실습 과제</a:t>
+                      </a:r>
+                    </a:p>
+                  </a:txBody>
+                  <a:tcPr marL="101600" marR="101600" marT="101600" marB="101600" anchor="ctr">
+                    <a:solidFill>
+                      <a:srgbClr val="FFFFFF"/>
+                    </a:solidFill>
+                    <a:lnL w="0">
+                      <a:noFill/>
+                    </a:lnL>
+                    <a:lnR w="0">
+                      <a:noFill/>
+                    </a:lnR>
+                    <a:lnT w="0">
+                      <a:noFill/>
+                    </a:lnT>
+                    <a:lnB w="9525">
+                      <a:solidFill>
+                        <a:srgbClr val="E2E2E2"/>
+                      </a:solidFill>
+                    </a:lnB>
+                  </a:tcPr>
+                </a:tc>
+                <a:tc>
+                  <a:txBody>
+                    <a:bodyPr/>
+                    <a:lstStyle/>
+                    <a:p>
+                      <a:r>
+                        <a:rPr sz="1300" b="0">
+                          <a:solidFill>
+                            <a:srgbClr val="5E5E5E"/>
+                          </a:solidFill>
+                          <a:latin typeface="Pretendard Medium"/>
+                        </a:rPr>
+                        <a:t>25%</a:t>
+                      </a:r>
+                    </a:p>
+                  </a:txBody>
+                  <a:tcPr marL="101600" marR="101600" marT="101600" marB="101600" anchor="ctr">
+                    <a:solidFill>
+                      <a:srgbClr val="FFFFFF"/>
+                    </a:solidFill>
+                    <a:lnL w="0">
+                      <a:noFill/>
+                    </a:lnL>
+                    <a:lnR w="0">
+                      <a:noFill/>
+                    </a:lnR>
+                    <a:lnT w="0">
+                      <a:noFill/>
+                    </a:lnT>
+                    <a:lnB w="9525">
+                      <a:solidFill>
+                        <a:srgbClr val="E2E2E2"/>
+                      </a:solidFill>
+                    </a:lnB>
+                  </a:tcPr>
+                </a:tc>
+                <a:tc>
+                  <a:txBody>
+                    <a:bodyPr/>
+                    <a:lstStyle/>
+                    <a:p>
+                      <a:r>
+                        <a:rPr sz="1300" b="0">
+                          <a:solidFill>
+                            <a:srgbClr val="5E5E5E"/>
+                          </a:solidFill>
+                          <a:latin typeface="Pretendard Medium"/>
+                        </a:rPr>
+                        <a:t>HW1~HW3</a:t>
+                      </a:r>
+                    </a:p>
+                  </a:txBody>
+                  <a:tcPr marL="101600" marR="101600" marT="101600" marB="101600" anchor="ctr">
+                    <a:solidFill>
+                      <a:srgbClr val="FFFFFF"/>
+                    </a:solidFill>
+                    <a:lnL w="0">
+                      <a:noFill/>
+                    </a:lnL>
+                    <a:lnR w="0">
+                      <a:noFill/>
+                    </a:lnR>
+                    <a:lnT w="0">
+                      <a:noFill/>
+                    </a:lnT>
+                    <a:lnB w="9525">
+                      <a:solidFill>
+                        <a:srgbClr val="E2E2E2"/>
+                      </a:solidFill>
+                    </a:lnB>
+                  </a:tcPr>
+                </a:tc>
+              </a:tr>
+              <a:tr h="635000">
+                <a:tc>
+                  <a:txBody>
+                    <a:bodyPr/>
+                    <a:lstStyle/>
+                    <a:p>
+                      <a:r>
+                        <a:rPr sz="1300" b="1">
+                          <a:solidFill>
+                            <a:srgbClr val="000000"/>
+                          </a:solidFill>
+                          <a:latin typeface="Pretendard"/>
+                        </a:rPr>
+                        <a:t>출석·참여</a:t>
+                      </a:r>
+                    </a:p>
+                  </a:txBody>
+                  <a:tcPr marL="101600" marR="101600" marT="101600" marB="101600" anchor="ctr">
+                    <a:solidFill>
+                      <a:srgbClr val="FFFFFF"/>
+                    </a:solidFill>
+                    <a:lnL w="0">
+                      <a:noFill/>
+                    </a:lnL>
+                    <a:lnR w="0">
+                      <a:noFill/>
+                    </a:lnR>
+                    <a:lnT w="0">
+                      <a:noFill/>
+                    </a:lnT>
+                    <a:lnB w="9525">
+                      <a:solidFill>
+                        <a:srgbClr val="E2E2E2"/>
+                      </a:solidFill>
+                    </a:lnB>
+                  </a:tcPr>
+                </a:tc>
+                <a:tc>
+                  <a:txBody>
+                    <a:bodyPr/>
+                    <a:lstStyle/>
+                    <a:p>
+                      <a:r>
+                        <a:rPr sz="1300" b="0">
+                          <a:solidFill>
+                            <a:srgbClr val="5E5E5E"/>
+                          </a:solidFill>
+                          <a:latin typeface="Pretendard Medium"/>
+                        </a:rPr>
+                        <a:t>10%</a:t>
+                      </a:r>
+                    </a:p>
+                  </a:txBody>
+                  <a:tcPr marL="101600" marR="101600" marT="101600" marB="101600" anchor="ctr">
+                    <a:solidFill>
+                      <a:srgbClr val="FFFFFF"/>
+                    </a:solidFill>
+                    <a:lnL w="0">
+                      <a:noFill/>
+                    </a:lnL>
+                    <a:lnR w="0">
+                      <a:noFill/>
+                    </a:lnR>
+                    <a:lnT w="0">
+                      <a:noFill/>
+                    </a:lnT>
+                    <a:lnB w="9525">
+                      <a:solidFill>
+                        <a:srgbClr val="E2E2E2"/>
+                      </a:solidFill>
+                    </a:lnB>
+                  </a:tcPr>
+                </a:tc>
+                <a:tc>
+                  <a:txBody>
+                    <a:bodyPr/>
+                    <a:lstStyle/>
+                    <a:p>
+                      <a:r>
+                        <a:rPr sz="1300" b="0">
+                          <a:solidFill>
+                            <a:srgbClr val="5E5E5E"/>
+                          </a:solidFill>
+                          <a:latin typeface="Pretendard Medium"/>
+                        </a:rPr>
+                        <a:t>학칙 적용</a:t>
+                      </a:r>
+                    </a:p>
+                  </a:txBody>
+                  <a:tcPr marL="101600" marR="101600" marT="101600" marB="101600" anchor="ctr">
+                    <a:solidFill>
+                      <a:srgbClr val="FFFFFF"/>
+                    </a:solidFill>
+                    <a:lnL w="0">
+                      <a:noFill/>
+                    </a:lnL>
+                    <a:lnR w="0">
+                      <a:noFill/>
+                    </a:lnR>
+                    <a:lnT w="0">
+                      <a:noFill/>
+                    </a:lnT>
+                    <a:lnB w="9525">
+                      <a:solidFill>
+                        <a:srgbClr val="E2E2E2"/>
+                      </a:solidFill>
+                    </a:lnB>
+                  </a:tcPr>
+                </a:tc>
+              </a:tr>
+            </a:tbl>
+          </a:graphicData>
+        </a:graphic>
+      </p:graphicFrame>
       <p:sp>
         <p:nvSpPr>
           <p:cNvPr id="25" name="Slide Number Placeholder 0"/>
@@ -7325,7 +6333,7 @@
             <a:pPr algn="r"/>
             <a:fld id="{F7021451-1387-4CA6-816F-3879F97B5CBC}" type="slidenum">
               <a:rPr b="0" lang="en-US"/>
-              <a:t>1004</a:t>
+              <a:t>1007</a:t>
             </a:fld>
             <a:endParaRPr lang="en-US"/>
           </a:p>
@@ -7365,7 +6373,7 @@
           <a:lstStyle/>
           <a:p>
             <a:r>
-              <a:t>3.5 교재 — 두 권 필수</a:t>
+              <a:t>4.2 중간고사와 팀 프로젝트</a:t>
             </a:r>
           </a:p>
         </p:txBody>
@@ -7386,7 +6394,7 @@
           <a:lstStyle/>
           <a:p>
             <a:r>
-              <a:t>3. 15주 로드맵</a:t>
+              <a:t>4. 평가와 운영</a:t>
             </a:r>
           </a:p>
         </p:txBody>
@@ -7408,25 +6416,43 @@
           <a:p>
             <a:pPr/>
             <a:r>
-              <a:t>『핸즈온 머신러닝 3판』 — ML · 3~5주</a:t>
+              <a:t>중간고사(9주차)</a:t>
+            </a:r>
+          </a:p>
+          <a:p>
+            <a:pPr lvl="1"/>
+            <a:r>
+              <a:t>개념 단답: closed-book</a:t>
+            </a:r>
+          </a:p>
+          <a:p>
+            <a:pPr lvl="1"/>
+            <a:r>
+              <a:t>코드 해석·수정: open-book</a:t>
             </a:r>
           </a:p>
           <a:p>
             <a:pPr/>
             <a:r>
-              <a:t>『밑바닥부터 시작하는 딥러닝 1』 — DL · 6~11주</a:t>
+              <a:t>팀 프로젝트: 8개 팀, 팀당 4~5인</a:t>
+            </a:r>
+          </a:p>
+          <a:p>
+            <a:pPr lvl="1"/>
+            <a:r>
+              <a:t>서울시 BIS 기반 노선별 버스 ETA</a:t>
             </a:r>
           </a:p>
           <a:p>
             <a:pPr/>
             <a:r>
-              <a:t>실습 코드: GitHub 공개</a:t>
+              <a:t>대상: 최대 4개 노선, 노선당 2개 팀</a:t>
             </a:r>
           </a:p>
           <a:p>
             <a:pPr/>
             <a:r>
-              <a:t>『밑바닥부터 시작하는 딥러닝 4』 — 구매 불필요, 14주차 강의노트 제공</a:t>
+              <a:t>최종 발표: 15주차(12-08), 팀당 발표 8분·질의응답 4분</a:t>
             </a:r>
           </a:p>
         </p:txBody>
@@ -7499,12 +6525,12 @@
       <p:grpSpPr/>
       <p:sp>
         <p:nvSpPr>
-          <p:cNvPr id="2" name="Text Placeholder 1"/>
-          <p:cNvSpPr>
-            <a:spLocks noGrp="1"/>
-          </p:cNvSpPr>
-          <p:nvPr>
-            <p:ph type="body" idx="100"/>
+          <p:cNvPr id="2" name="Title 1"/>
+          <p:cNvSpPr>
+            <a:spLocks noGrp="1"/>
+          </p:cNvSpPr>
+          <p:nvPr>
+            <p:ph type="title" idx="100"/>
           </p:nvPr>
         </p:nvSpPr>
         <p:spPr/>
@@ -7513,19 +6539,19 @@
           <a:lstStyle/>
           <a:p>
             <a:r>
-              <a:t>04</a:t>
-            </a:r>
-          </a:p>
-        </p:txBody>
-      </p:sp>
-      <p:sp>
-        <p:nvSpPr>
-          <p:cNvPr id="3" name="Title 2"/>
-          <p:cNvSpPr>
-            <a:spLocks noGrp="1"/>
-          </p:cNvSpPr>
-          <p:nvPr>
-            <p:ph type="title" idx="101"/>
+              <a:t>4.3 실습 과제 3회</a:t>
+            </a:r>
+          </a:p>
+        </p:txBody>
+      </p:sp>
+      <p:sp>
+        <p:nvSpPr>
+          <p:cNvPr id="3" name="Text Placeholder 2"/>
+          <p:cNvSpPr>
+            <a:spLocks noGrp="1"/>
+          </p:cNvSpPr>
+          <p:nvPr>
+            <p:ph type="body" idx="101"/>
           </p:nvPr>
         </p:nvSpPr>
         <p:spPr/>
@@ -7534,7 +6560,7 @@
           <a:lstStyle/>
           <a:p>
             <a:r>
-              <a:t>평가와 운영</a:t>
+              <a:t>4. 평가와 운영</a:t>
             </a:r>
           </a:p>
         </p:txBody>
@@ -7554,94 +6580,558 @@
           <a:bodyPr/>
           <a:lstStyle/>
           <a:p>
-            <a:pPr>
-              <a:spcAft>
-                <a:spcPts val="1000"/>
-              </a:spcAft>
-            </a:pPr>
-            <a:r>
-              <a:rPr>
+            <a:pPr/>
+            <a:r>
+              <a:t>제출: repository의 assignments 폴더 안내</a:t>
+            </a:r>
+          </a:p>
+          <a:p>
+            <a:pPr/>
+            <a:r>
+              <a:t>지각 제출: 하루당 10% 감점</a:t>
+            </a:r>
+          </a:p>
+          <a:p>
+            <a:pPr/>
+            <a:r>
+              <a:t>2~4주차는 과제 없음 — 이론과 실습에 집중</a:t>
+            </a:r>
+          </a:p>
+          <a:p>
+            <a:pPr/>
+            <a:r>
+              <a:t>HW2: 8주차 휴강 대체 과제</a:t>
+            </a:r>
+          </a:p>
+        </p:txBody>
+      </p:sp>
+      <p:sp>
+        <p:nvSpPr>
+          <p:cNvPr id="5" name="Text Placeholder 4"/>
+          <p:cNvSpPr>
+            <a:spLocks noGrp="1"/>
+          </p:cNvSpPr>
+          <p:nvPr>
+            <p:ph type="body" idx="103"/>
+          </p:nvPr>
+        </p:nvSpPr>
+        <p:spPr/>
+        <p:txBody>
+          <a:bodyPr/>
+          <a:lstStyle/>
+          <a:p>
+            <a:r>
+              <a:t>표 4. 과제 3회의 내용과 기한</a:t>
+            </a:r>
+          </a:p>
+        </p:txBody>
+      </p:sp>
+      <p:graphicFrame>
+        <p:nvGraphicFramePr>
+          <p:cNvPr id="6" name="Table Placeholder 5"/>
+          <p:cNvGraphicFramePr>
+            <a:graphicFrameLocks noGrp="1"/>
+          </p:cNvGraphicFramePr>
+          <p:nvPr>
+            <p:ph type="tbl" idx="104"/>
+          </p:nvPr>
+        </p:nvGraphicFramePr>
+        <p:xfrm>
+          <a:off x="4937760" y="1828800"/>
+          <a:ext cx="6565392" cy="2311400"/>
+        </p:xfrm>
+        <a:graphic>
+          <a:graphicData uri="http://schemas.openxmlformats.org/drawingml/2006/table">
+            <a:tbl>
+              <a:tblPr firstRow="0" bandRow="0" firstCol="0" lastRow="0" lastCol="0" bandCol="0"/>
+              <a:tblGrid>
+                <a:gridCol w="2188464"/>
+                <a:gridCol w="2188464"/>
+                <a:gridCol w="2188464"/>
+              </a:tblGrid>
+              <a:tr h="406400">
+                <a:tc>
+                  <a:txBody>
+                    <a:bodyPr/>
+                    <a:lstStyle/>
+                    <a:p>
+                      <a:r>
+                        <a:rPr sz="1300" b="0">
+                          <a:solidFill>
+                            <a:srgbClr val="FFFFFF"/>
+                          </a:solidFill>
+                          <a:latin typeface="Pretendard Medium"/>
+                        </a:rPr>
+                        <a:t>과제</a:t>
+                      </a:r>
+                    </a:p>
+                  </a:txBody>
+                  <a:tcPr marL="101600" marR="101600" marT="76200" marB="76200" anchor="ctr">
+                    <a:solidFill>
+                      <a:srgbClr val="000000"/>
+                    </a:solidFill>
+                    <a:lnL w="0">
+                      <a:noFill/>
+                    </a:lnL>
+                    <a:lnR w="0">
+                      <a:noFill/>
+                    </a:lnR>
+                    <a:lnT w="0">
+                      <a:noFill/>
+                    </a:lnT>
+                    <a:lnB w="0">
+                      <a:noFill/>
+                    </a:lnB>
+                  </a:tcPr>
+                </a:tc>
+                <a:tc>
+                  <a:txBody>
+                    <a:bodyPr/>
+                    <a:lstStyle/>
+                    <a:p>
+                      <a:r>
+                        <a:rPr sz="1300" b="0">
+                          <a:solidFill>
+                            <a:srgbClr val="FFFFFF"/>
+                          </a:solidFill>
+                          <a:latin typeface="Pretendard Medium"/>
+                        </a:rPr>
+                        <a:t>내용</a:t>
+                      </a:r>
+                    </a:p>
+                  </a:txBody>
+                  <a:tcPr marL="101600" marR="101600" marT="76200" marB="76200" anchor="ctr">
+                    <a:solidFill>
+                      <a:srgbClr val="000000"/>
+                    </a:solidFill>
+                    <a:lnL w="0">
+                      <a:noFill/>
+                    </a:lnL>
+                    <a:lnR w="0">
+                      <a:noFill/>
+                    </a:lnR>
+                    <a:lnT w="0">
+                      <a:noFill/>
+                    </a:lnT>
+                    <a:lnB w="0">
+                      <a:noFill/>
+                    </a:lnB>
+                  </a:tcPr>
+                </a:tc>
+                <a:tc>
+                  <a:txBody>
+                    <a:bodyPr/>
+                    <a:lstStyle/>
+                    <a:p>
+                      <a:r>
+                        <a:rPr sz="1300" b="0">
+                          <a:solidFill>
+                            <a:srgbClr val="FFFFFF"/>
+                          </a:solidFill>
+                          <a:latin typeface="Pretendard Medium"/>
+                        </a:rPr>
+                        <a:t>배포 → 마감</a:t>
+                      </a:r>
+                    </a:p>
+                  </a:txBody>
+                  <a:tcPr marL="101600" marR="101600" marT="76200" marB="76200" anchor="ctr">
+                    <a:solidFill>
+                      <a:srgbClr val="000000"/>
+                    </a:solidFill>
+                    <a:lnL w="0">
+                      <a:noFill/>
+                    </a:lnL>
+                    <a:lnR w="0">
+                      <a:noFill/>
+                    </a:lnR>
+                    <a:lnT w="0">
+                      <a:noFill/>
+                    </a:lnT>
+                    <a:lnB w="0">
+                      <a:noFill/>
+                    </a:lnB>
+                  </a:tcPr>
+                </a:tc>
+              </a:tr>
+              <a:tr h="635000">
+                <a:tc>
+                  <a:txBody>
+                    <a:bodyPr/>
+                    <a:lstStyle/>
+                    <a:p>
+                      <a:r>
+                        <a:rPr sz="1300" b="1">
+                          <a:solidFill>
+                            <a:srgbClr val="000000"/>
+                          </a:solidFill>
+                          <a:latin typeface="Pretendard"/>
+                        </a:rPr>
+                        <a:t>HW1</a:t>
+                      </a:r>
+                    </a:p>
+                  </a:txBody>
+                  <a:tcPr marL="101600" marR="101600" marT="101600" marB="101600" anchor="ctr">
+                    <a:solidFill>
+                      <a:srgbClr val="FFFFFF"/>
+                    </a:solidFill>
+                    <a:lnL w="0">
+                      <a:noFill/>
+                    </a:lnL>
+                    <a:lnR w="0">
+                      <a:noFill/>
+                    </a:lnR>
+                    <a:lnT w="0">
+                      <a:noFill/>
+                    </a:lnT>
+                    <a:lnB w="9525">
+                      <a:solidFill>
+                        <a:srgbClr val="E2E2E2"/>
+                      </a:solidFill>
+                    </a:lnB>
+                  </a:tcPr>
+                </a:tc>
+                <a:tc>
+                  <a:txBody>
+                    <a:bodyPr/>
+                    <a:lstStyle/>
+                    <a:p>
+                      <a:r>
+                        <a:rPr sz="1300" b="0">
+                          <a:solidFill>
+                            <a:srgbClr val="5E5E5E"/>
+                          </a:solidFill>
+                          <a:latin typeface="Pretendard Medium"/>
+                        </a:rPr>
+                        <a:t>제주 데이터 End-to-End</a:t>
+                      </a:r>
+                    </a:p>
+                  </a:txBody>
+                  <a:tcPr marL="101600" marR="101600" marT="101600" marB="101600" anchor="ctr">
+                    <a:solidFill>
+                      <a:srgbClr val="FFFFFF"/>
+                    </a:solidFill>
+                    <a:lnL w="0">
+                      <a:noFill/>
+                    </a:lnL>
+                    <a:lnR w="0">
+                      <a:noFill/>
+                    </a:lnR>
+                    <a:lnT w="0">
+                      <a:noFill/>
+                    </a:lnT>
+                    <a:lnB w="9525">
+                      <a:solidFill>
+                        <a:srgbClr val="E2E2E2"/>
+                      </a:solidFill>
+                    </a:lnB>
+                  </a:tcPr>
+                </a:tc>
+                <a:tc>
+                  <a:txBody>
+                    <a:bodyPr/>
+                    <a:lstStyle/>
+                    <a:p>
+                      <a:r>
+                        <a:rPr sz="1300" b="0">
+                          <a:solidFill>
+                            <a:srgbClr val="5E5E5E"/>
+                          </a:solidFill>
+                          <a:latin typeface="Pretendard Medium"/>
+                        </a:rPr>
+                        <a:t>5 → 7주</a:t>
+                      </a:r>
+                    </a:p>
+                  </a:txBody>
+                  <a:tcPr marL="101600" marR="101600" marT="101600" marB="101600" anchor="ctr">
+                    <a:solidFill>
+                      <a:srgbClr val="FFFFFF"/>
+                    </a:solidFill>
+                    <a:lnL w="0">
+                      <a:noFill/>
+                    </a:lnL>
+                    <a:lnR w="0">
+                      <a:noFill/>
+                    </a:lnR>
+                    <a:lnT w="0">
+                      <a:noFill/>
+                    </a:lnT>
+                    <a:lnB w="9525">
+                      <a:solidFill>
+                        <a:srgbClr val="E2E2E2"/>
+                      </a:solidFill>
+                    </a:lnB>
+                  </a:tcPr>
+                </a:tc>
+              </a:tr>
+              <a:tr h="635000">
+                <a:tc>
+                  <a:txBody>
+                    <a:bodyPr/>
+                    <a:lstStyle/>
+                    <a:p>
+                      <a:r>
+                        <a:rPr sz="1300" b="1">
+                          <a:solidFill>
+                            <a:srgbClr val="000000"/>
+                          </a:solidFill>
+                          <a:latin typeface="Pretendard"/>
+                        </a:rPr>
+                        <a:t>HW2</a:t>
+                      </a:r>
+                    </a:p>
+                  </a:txBody>
+                  <a:tcPr marL="101600" marR="101600" marT="101600" marB="101600" anchor="ctr">
+                    <a:solidFill>
+                      <a:srgbClr val="FFFFFF"/>
+                    </a:solidFill>
+                    <a:lnL w="0">
+                      <a:noFill/>
+                    </a:lnL>
+                    <a:lnR w="0">
+                      <a:noFill/>
+                    </a:lnR>
+                    <a:lnT w="0">
+                      <a:noFill/>
+                    </a:lnT>
+                    <a:lnB w="9525">
+                      <a:solidFill>
+                        <a:srgbClr val="E2E2E2"/>
+                      </a:solidFill>
+                    </a:lnB>
+                  </a:tcPr>
+                </a:tc>
+                <a:tc>
+                  <a:txBody>
+                    <a:bodyPr/>
+                    <a:lstStyle/>
+                    <a:p>
+                      <a:r>
+                        <a:rPr sz="1300" b="0">
+                          <a:solidFill>
+                            <a:srgbClr val="5E5E5E"/>
+                          </a:solidFill>
+                          <a:latin typeface="Pretendard Medium"/>
+                        </a:rPr>
+                        <a:t>앙상블 비교 리포트</a:t>
+                      </a:r>
+                    </a:p>
+                  </a:txBody>
+                  <a:tcPr marL="101600" marR="101600" marT="101600" marB="101600" anchor="ctr">
+                    <a:solidFill>
+                      <a:srgbClr val="FFFFFF"/>
+                    </a:solidFill>
+                    <a:lnL w="0">
+                      <a:noFill/>
+                    </a:lnL>
+                    <a:lnR w="0">
+                      <a:noFill/>
+                    </a:lnR>
+                    <a:lnT w="0">
+                      <a:noFill/>
+                    </a:lnT>
+                    <a:lnB w="9525">
+                      <a:solidFill>
+                        <a:srgbClr val="E2E2E2"/>
+                      </a:solidFill>
+                    </a:lnB>
+                  </a:tcPr>
+                </a:tc>
+                <a:tc>
+                  <a:txBody>
+                    <a:bodyPr/>
+                    <a:lstStyle/>
+                    <a:p>
+                      <a:r>
+                        <a:rPr sz="1300" b="0">
+                          <a:solidFill>
+                            <a:srgbClr val="5E5E5E"/>
+                          </a:solidFill>
+                          <a:latin typeface="Pretendard Medium"/>
+                        </a:rPr>
+                        <a:t>8 → 11주</a:t>
+                      </a:r>
+                    </a:p>
+                  </a:txBody>
+                  <a:tcPr marL="101600" marR="101600" marT="101600" marB="101600" anchor="ctr">
+                    <a:solidFill>
+                      <a:srgbClr val="FFFFFF"/>
+                    </a:solidFill>
+                    <a:lnL w="0">
+                      <a:noFill/>
+                    </a:lnL>
+                    <a:lnR w="0">
+                      <a:noFill/>
+                    </a:lnR>
+                    <a:lnT w="0">
+                      <a:noFill/>
+                    </a:lnT>
+                    <a:lnB w="9525">
+                      <a:solidFill>
+                        <a:srgbClr val="E2E2E2"/>
+                      </a:solidFill>
+                    </a:lnB>
+                  </a:tcPr>
+                </a:tc>
+              </a:tr>
+              <a:tr h="635000">
+                <a:tc>
+                  <a:txBody>
+                    <a:bodyPr/>
+                    <a:lstStyle/>
+                    <a:p>
+                      <a:r>
+                        <a:rPr sz="1300" b="1">
+                          <a:solidFill>
+                            <a:srgbClr val="000000"/>
+                          </a:solidFill>
+                          <a:latin typeface="Pretendard"/>
+                        </a:rPr>
+                        <a:t>HW3</a:t>
+                      </a:r>
+                    </a:p>
+                  </a:txBody>
+                  <a:tcPr marL="101600" marR="101600" marT="101600" marB="101600" anchor="ctr">
+                    <a:solidFill>
+                      <a:srgbClr val="FFFFFF"/>
+                    </a:solidFill>
+                    <a:lnL w="0">
+                      <a:noFill/>
+                    </a:lnL>
+                    <a:lnR w="0">
+                      <a:noFill/>
+                    </a:lnR>
+                    <a:lnT w="0">
+                      <a:noFill/>
+                    </a:lnT>
+                    <a:lnB w="9525">
+                      <a:solidFill>
+                        <a:srgbClr val="E2E2E2"/>
+                      </a:solidFill>
+                    </a:lnB>
+                  </a:tcPr>
+                </a:tc>
+                <a:tc>
+                  <a:txBody>
+                    <a:bodyPr/>
+                    <a:lstStyle/>
+                    <a:p>
+                      <a:r>
+                        <a:rPr sz="1300" b="0">
+                          <a:solidFill>
+                            <a:srgbClr val="5E5E5E"/>
+                          </a:solidFill>
+                          <a:latin typeface="Pretendard Medium"/>
+                        </a:rPr>
+                        <a:t>역전파·옵티마이저</a:t>
+                      </a:r>
+                    </a:p>
+                  </a:txBody>
+                  <a:tcPr marL="101600" marR="101600" marT="101600" marB="101600" anchor="ctr">
+                    <a:solidFill>
+                      <a:srgbClr val="FFFFFF"/>
+                    </a:solidFill>
+                    <a:lnL w="0">
+                      <a:noFill/>
+                    </a:lnL>
+                    <a:lnR w="0">
+                      <a:noFill/>
+                    </a:lnR>
+                    <a:lnT w="0">
+                      <a:noFill/>
+                    </a:lnT>
+                    <a:lnB w="9525">
+                      <a:solidFill>
+                        <a:srgbClr val="E2E2E2"/>
+                      </a:solidFill>
+                    </a:lnB>
+                  </a:tcPr>
+                </a:tc>
+                <a:tc>
+                  <a:txBody>
+                    <a:bodyPr/>
+                    <a:lstStyle/>
+                    <a:p>
+                      <a:r>
+                        <a:rPr sz="1300" b="0">
+                          <a:solidFill>
+                            <a:srgbClr val="5E5E5E"/>
+                          </a:solidFill>
+                          <a:latin typeface="Pretendard Medium"/>
+                        </a:rPr>
+                        <a:t>11 → 13주</a:t>
+                      </a:r>
+                    </a:p>
+                  </a:txBody>
+                  <a:tcPr marL="101600" marR="101600" marT="101600" marB="101600" anchor="ctr">
+                    <a:solidFill>
+                      <a:srgbClr val="FFFFFF"/>
+                    </a:solidFill>
+                    <a:lnL w="0">
+                      <a:noFill/>
+                    </a:lnL>
+                    <a:lnR w="0">
+                      <a:noFill/>
+                    </a:lnR>
+                    <a:lnT w="0">
+                      <a:noFill/>
+                    </a:lnT>
+                    <a:lnB w="9525">
+                      <a:solidFill>
+                        <a:srgbClr val="E2E2E2"/>
+                      </a:solidFill>
+                    </a:lnB>
+                  </a:tcPr>
+                </a:tc>
+              </a:tr>
+            </a:tbl>
+          </a:graphicData>
+        </a:graphic>
+      </p:graphicFrame>
+      <p:sp>
+        <p:nvSpPr>
+          <p:cNvPr id="25" name="Slide Number Placeholder 0"/>
+          <p:cNvSpPr>
+            <a:spLocks noGrp="1"/>
+          </p:cNvSpPr>
+          <p:nvPr>
+            <p:ph type="sldNum" sz="quarter" idx="4294967295"/>
+          </p:nvPr>
+        </p:nvSpPr>
+        <p:spPr>
+          <a:xfrm>
+            <a:off x="10591495" y="6355080"/>
+            <a:ext cx="914400" cy="274320"/>
+          </a:xfrm>
+          <a:prstGeom prst="rect">
+            <a:avLst/>
+          </a:prstGeom>
+          <a:extLst>
+            <a:ext uri="{C572A759-6A51-4108-AA02-DFA0A04FC94B}">
+              <ma14:wrappingTextBoxFlag xmlns:ma14="http://schemas.microsoft.com/office/mac/drawingml/2011/main" val="0"/>
+            </a:ext>
+          </a:extLst>
+        </p:spPr>
+        <p:txBody>
+          <a:bodyPr/>
+          <a:lstStyle>
+            <a:lvl1pPr>
+              <a:defRPr sz="1000">
                 <a:solidFill>
                   <a:srgbClr val="AFAFAF"/>
                 </a:solidFill>
-              </a:rPr>
-              <a:t>4.1  </a:t>
-            </a:r>
-            <a:r>
-              <a:t>평가 비중</a:t>
-            </a:r>
-          </a:p>
-          <a:p>
-            <a:pPr>
-              <a:spcAft>
-                <a:spcPts val="1000"/>
-              </a:spcAft>
-            </a:pPr>
-            <a:r>
-              <a:rPr>
-                <a:solidFill>
-                  <a:srgbClr val="AFAFAF"/>
-                </a:solidFill>
-              </a:rPr>
-              <a:t>4.2  </a:t>
-            </a:r>
-            <a:r>
-              <a:t>중간고사와 팀 프로젝트</a:t>
-            </a:r>
-          </a:p>
-          <a:p>
-            <a:pPr>
-              <a:spcAft>
-                <a:spcPts val="1000"/>
-              </a:spcAft>
-            </a:pPr>
-            <a:r>
-              <a:rPr>
-                <a:solidFill>
-                  <a:srgbClr val="AFAFAF"/>
-                </a:solidFill>
-              </a:rPr>
-              <a:t>4.3  </a:t>
-            </a:r>
-            <a:r>
-              <a:t>실습 과제 4회</a:t>
-            </a:r>
-          </a:p>
-          <a:p>
-            <a:pPr>
-              <a:spcAft>
-                <a:spcPts val="1000"/>
-              </a:spcAft>
-            </a:pPr>
-            <a:r>
-              <a:rPr>
-                <a:solidFill>
-                  <a:srgbClr val="AFAFAF"/>
-                </a:solidFill>
-              </a:rPr>
-              <a:t>4.4  </a:t>
-            </a:r>
-            <a:r>
-              <a:t>생성형 AI 활용 정책</a:t>
-            </a:r>
-          </a:p>
-          <a:p>
-            <a:pPr>
-              <a:spcAft>
-                <a:spcPts val="1000"/>
-              </a:spcAft>
-            </a:pPr>
-            <a:r>
-              <a:rPr>
-                <a:solidFill>
-                  <a:srgbClr val="AFAFAF"/>
-                </a:solidFill>
-              </a:rPr>
-              <a:t>4.5  </a:t>
-            </a:r>
-            <a:r>
-              <a:t>출결·휴강·연락</a:t>
-            </a:r>
+                <a:latin typeface="Pretendard Medium"/>
+                <a:ea typeface="Pretendard Medium"/>
+                <a:cs typeface="Pretendard Medium"/>
+              </a:defRPr>
+            </a:lvl1pPr>
+          </a:lstStyle>
+          <a:p>
+            <a:pPr algn="r"/>
+            <a:fld id="{F7021451-1387-4CA6-816F-3879F97B5CBC}" type="slidenum">
+              <a:rPr b="0" lang="en-US"/>
+              <a:t>1008</a:t>
+            </a:fld>
+            <a:endParaRPr lang="en-US"/>
           </a:p>
         </p:txBody>
       </p:sp>
@@ -7813,7 +7303,7 @@
                           </a:solidFill>
                           <a:latin typeface="Pretendard Medium"/>
                         </a:rPr>
-                        <a:t>1.1 교과목 개요  ·  1.2 이 과목의 세 단계  ·  1.3 모빌리티 트랙에서의 위치  ·  1.4 다루지 않는 것</a:t>
+                        <a:t>1.1 수업 내용  ·  1.2 이 과목의 세 단계  ·  1.3 교통 &amp; 모빌리티 트랙에서의 위치</a:t>
                       </a:r>
                     </a:p>
                   </a:txBody>
@@ -7887,7 +7377,7 @@
                           </a:solidFill>
                           <a:latin typeface="Pretendard"/>
                         </a:rPr>
-                        <a:t>AI 모빌리티 개관</a:t>
+                        <a:t>AI 모빌리티 적용 분야</a:t>
                       </a:r>
                     </a:p>
                   </a:txBody>
@@ -7923,7 +7413,7 @@
                           </a:solidFill>
                           <a:latin typeface="Pretendard Medium"/>
                         </a:rPr>
-                        <a:t>2.1 자율주행 — 인지·판단·제어  ·  2.2 수요응답형 교통(DRT)  ·  2.3 MaaS와 통합 모빌리티  ·  2.4 AI가 실제로 쓰이는 지점</a:t>
+                        <a:t>2.1 주요 예측 문제  ·  2.2 수업 적용 주제</a:t>
                       </a:r>
                     </a:p>
                   </a:txBody>
@@ -8033,7 +7523,7 @@
                           </a:solidFill>
                           <a:latin typeface="Pretendard Medium"/>
                         </a:rPr>
-                        <a:t>3.1 15주 전체 구성  ·  3.2 ML 파트 (3~5주)  ·  3.3 DL 파트 (6~7·10~11주)  ·  3.4 응용 파트 (12~14주)  ·  3.5 교재 — 두 권 필수</a:t>
+                        <a:t>3.1 15주 전체 구성  ·  3.2 ML 파트 (3~5주)  ·  3.3 DL 파트 (6~7·10주)  ·  3.4 Transformer·ETA 파트  ·  3.5 교재 — 두 권 필수</a:t>
                       </a:r>
                     </a:p>
                   </a:txBody>
@@ -8143,7 +7633,7 @@
                           </a:solidFill>
                           <a:latin typeface="Pretendard Medium"/>
                         </a:rPr>
-                        <a:t>4.1 평가 비중  ·  4.2 중간고사와 팀 프로젝트  ·  4.3 실습 과제 4회  ·  4.4 생성형 AI 활용 정책  ·  4.5 출결·휴강·연락</a:t>
+                        <a:t>4.1 평가 비중  ·  4.2 중간고사와 팀 프로젝트  ·  4.3 실습 과제 3회  ·  4.4 과제 작성 원칙  ·  4.5 출결·휴강·연락</a:t>
                       </a:r>
                     </a:p>
                   </a:txBody>
@@ -8253,7 +7743,7 @@
                           </a:solidFill>
                           <a:latin typeface="Pretendard Medium"/>
                         </a:rPr>
-                        <a:t>5.1 실습 도구  ·  5.2 환경 점검 미리보기  ·  5.3 이번 주 할 일</a:t>
+                        <a:t>5.1 분석 도구  ·  5.2 AI 코딩 도구  ·  5.3 환경 점검 미리보기  ·  5.4 이번 주 할 일</a:t>
                       </a:r>
                     </a:p>
                   </a:txBody>
@@ -8364,7 +7854,7 @@
           <a:lstStyle/>
           <a:p>
             <a:r>
-              <a:t>4.1 평가 비중</a:t>
+              <a:t>4.4 과제 작성 원칙</a:t>
             </a:r>
           </a:p>
         </p:txBody>
@@ -8405,583 +7895,55 @@
           <a:bodyPr/>
           <a:lstStyle/>
           <a:p>
-            <a:r>
-              <a:t>표 3. 평가 항목과 비중</a:t>
-            </a:r>
-          </a:p>
-        </p:txBody>
-      </p:sp>
-      <p:graphicFrame>
-        <p:nvGraphicFramePr>
-          <p:cNvPr id="5" name="Table Placeholder 4"/>
-          <p:cNvGraphicFramePr>
-            <a:graphicFrameLocks noGrp="1"/>
-          </p:cNvGraphicFramePr>
-          <p:nvPr>
-            <p:ph type="tbl" idx="103"/>
-          </p:nvPr>
-        </p:nvGraphicFramePr>
-        <p:xfrm>
-          <a:off x="685800" y="1828800"/>
-          <a:ext cx="10820095" cy="2946400"/>
-        </p:xfrm>
-        <a:graphic>
-          <a:graphicData uri="http://schemas.openxmlformats.org/drawingml/2006/table">
-            <a:tbl>
-              <a:tblPr firstRow="0" bandRow="0" firstCol="0" lastRow="0" lastCol="0" bandCol="0"/>
-              <a:tblGrid>
-                <a:gridCol w="3606698"/>
-                <a:gridCol w="3606698"/>
-                <a:gridCol w="3606699"/>
-              </a:tblGrid>
-              <a:tr h="406400">
-                <a:tc>
-                  <a:txBody>
-                    <a:bodyPr/>
-                    <a:lstStyle/>
-                    <a:p>
-                      <a:r>
-                        <a:rPr sz="1300" b="0">
-                          <a:solidFill>
-                            <a:srgbClr val="FFFFFF"/>
-                          </a:solidFill>
-                          <a:latin typeface="Pretendard Medium"/>
-                        </a:rPr>
-                        <a:t>항목</a:t>
-                      </a:r>
-                    </a:p>
-                  </a:txBody>
-                  <a:tcPr marL="101600" marR="101600" marT="76200" marB="76200" anchor="ctr">
-                    <a:solidFill>
-                      <a:srgbClr val="000000"/>
-                    </a:solidFill>
-                    <a:lnL w="0">
-                      <a:noFill/>
-                    </a:lnL>
-                    <a:lnR w="0">
-                      <a:noFill/>
-                    </a:lnR>
-                    <a:lnT w="0">
-                      <a:noFill/>
-                    </a:lnT>
-                    <a:lnB w="0">
-                      <a:noFill/>
-                    </a:lnB>
-                  </a:tcPr>
-                </a:tc>
-                <a:tc>
-                  <a:txBody>
-                    <a:bodyPr/>
-                    <a:lstStyle/>
-                    <a:p>
-                      <a:r>
-                        <a:rPr sz="1300" b="0">
-                          <a:solidFill>
-                            <a:srgbClr val="FFFFFF"/>
-                          </a:solidFill>
-                          <a:latin typeface="Pretendard Medium"/>
-                        </a:rPr>
-                        <a:t>비중</a:t>
-                      </a:r>
-                    </a:p>
-                  </a:txBody>
-                  <a:tcPr marL="101600" marR="101600" marT="76200" marB="76200" anchor="ctr">
-                    <a:solidFill>
-                      <a:srgbClr val="000000"/>
-                    </a:solidFill>
-                    <a:lnL w="0">
-                      <a:noFill/>
-                    </a:lnL>
-                    <a:lnR w="0">
-                      <a:noFill/>
-                    </a:lnR>
-                    <a:lnT w="0">
-                      <a:noFill/>
-                    </a:lnT>
-                    <a:lnB w="0">
-                      <a:noFill/>
-                    </a:lnB>
-                  </a:tcPr>
-                </a:tc>
-                <a:tc>
-                  <a:txBody>
-                    <a:bodyPr/>
-                    <a:lstStyle/>
-                    <a:p>
-                      <a:r>
-                        <a:rPr sz="1300" b="0">
-                          <a:solidFill>
-                            <a:srgbClr val="FFFFFF"/>
-                          </a:solidFill>
-                          <a:latin typeface="Pretendard Medium"/>
-                        </a:rPr>
-                        <a:t>비고</a:t>
-                      </a:r>
-                    </a:p>
-                  </a:txBody>
-                  <a:tcPr marL="101600" marR="101600" marT="76200" marB="76200" anchor="ctr">
-                    <a:solidFill>
-                      <a:srgbClr val="000000"/>
-                    </a:solidFill>
-                    <a:lnL w="0">
-                      <a:noFill/>
-                    </a:lnL>
-                    <a:lnR w="0">
-                      <a:noFill/>
-                    </a:lnR>
-                    <a:lnT w="0">
-                      <a:noFill/>
-                    </a:lnT>
-                    <a:lnB w="0">
-                      <a:noFill/>
-                    </a:lnB>
-                  </a:tcPr>
-                </a:tc>
-              </a:tr>
-              <a:tr h="635000">
-                <a:tc>
-                  <a:txBody>
-                    <a:bodyPr/>
-                    <a:lstStyle/>
-                    <a:p>
-                      <a:r>
-                        <a:rPr sz="1300" b="1">
-                          <a:solidFill>
-                            <a:srgbClr val="000000"/>
-                          </a:solidFill>
-                          <a:latin typeface="Pretendard"/>
-                        </a:rPr>
-                        <a:t>중간고사</a:t>
-                      </a:r>
-                    </a:p>
-                  </a:txBody>
-                  <a:tcPr marL="101600" marR="101600" marT="101600" marB="101600" anchor="ctr">
-                    <a:solidFill>
-                      <a:srgbClr val="FFFFFF"/>
-                    </a:solidFill>
-                    <a:lnL w="0">
-                      <a:noFill/>
-                    </a:lnL>
-                    <a:lnR w="0">
-                      <a:noFill/>
-                    </a:lnR>
-                    <a:lnT w="0">
-                      <a:noFill/>
-                    </a:lnT>
-                    <a:lnB w="9525">
-                      <a:solidFill>
-                        <a:srgbClr val="E2E2E2"/>
-                      </a:solidFill>
-                    </a:lnB>
-                  </a:tcPr>
-                </a:tc>
-                <a:tc>
-                  <a:txBody>
-                    <a:bodyPr/>
-                    <a:lstStyle/>
-                    <a:p>
-                      <a:r>
-                        <a:rPr sz="1300" b="0">
-                          <a:solidFill>
-                            <a:srgbClr val="5E5E5E"/>
-                          </a:solidFill>
-                          <a:latin typeface="Pretendard Medium"/>
-                        </a:rPr>
-                        <a:t>30%</a:t>
-                      </a:r>
-                    </a:p>
-                  </a:txBody>
-                  <a:tcPr marL="101600" marR="101600" marT="101600" marB="101600" anchor="ctr">
-                    <a:solidFill>
-                      <a:srgbClr val="FFFFFF"/>
-                    </a:solidFill>
-                    <a:lnL w="0">
-                      <a:noFill/>
-                    </a:lnL>
-                    <a:lnR w="0">
-                      <a:noFill/>
-                    </a:lnR>
-                    <a:lnT w="0">
-                      <a:noFill/>
-                    </a:lnT>
-                    <a:lnB w="9525">
-                      <a:solidFill>
-                        <a:srgbClr val="E2E2E2"/>
-                      </a:solidFill>
-                    </a:lnB>
-                  </a:tcPr>
-                </a:tc>
-                <a:tc>
-                  <a:txBody>
-                    <a:bodyPr/>
-                    <a:lstStyle/>
-                    <a:p>
-                      <a:r>
-                        <a:rPr sz="1300" b="0">
-                          <a:solidFill>
-                            <a:srgbClr val="5E5E5E"/>
-                          </a:solidFill>
-                          <a:latin typeface="Pretendard Medium"/>
-                        </a:rPr>
-                        <a:t>10-27 시행</a:t>
-                      </a:r>
-                    </a:p>
-                  </a:txBody>
-                  <a:tcPr marL="101600" marR="101600" marT="101600" marB="101600" anchor="ctr">
-                    <a:solidFill>
-                      <a:srgbClr val="FFFFFF"/>
-                    </a:solidFill>
-                    <a:lnL w="0">
-                      <a:noFill/>
-                    </a:lnL>
-                    <a:lnR w="0">
-                      <a:noFill/>
-                    </a:lnR>
-                    <a:lnT w="0">
-                      <a:noFill/>
-                    </a:lnT>
-                    <a:lnB w="9525">
-                      <a:solidFill>
-                        <a:srgbClr val="E2E2E2"/>
-                      </a:solidFill>
-                    </a:lnB>
-                  </a:tcPr>
-                </a:tc>
-              </a:tr>
-              <a:tr h="635000">
-                <a:tc>
-                  <a:txBody>
-                    <a:bodyPr/>
-                    <a:lstStyle/>
-                    <a:p>
-                      <a:r>
-                        <a:rPr sz="1300" b="1">
-                          <a:solidFill>
-                            <a:srgbClr val="000000"/>
-                          </a:solidFill>
-                          <a:latin typeface="Pretendard"/>
-                        </a:rPr>
-                        <a:t>팀 프로젝트</a:t>
-                      </a:r>
-                    </a:p>
-                  </a:txBody>
-                  <a:tcPr marL="101600" marR="101600" marT="101600" marB="101600" anchor="ctr">
-                    <a:solidFill>
-                      <a:srgbClr val="FFFFFF"/>
-                    </a:solidFill>
-                    <a:lnL w="0">
-                      <a:noFill/>
-                    </a:lnL>
-                    <a:lnR w="0">
-                      <a:noFill/>
-                    </a:lnR>
-                    <a:lnT w="0">
-                      <a:noFill/>
-                    </a:lnT>
-                    <a:lnB w="9525">
-                      <a:solidFill>
-                        <a:srgbClr val="E2E2E2"/>
-                      </a:solidFill>
-                    </a:lnB>
-                  </a:tcPr>
-                </a:tc>
-                <a:tc>
-                  <a:txBody>
-                    <a:bodyPr/>
-                    <a:lstStyle/>
-                    <a:p>
-                      <a:r>
-                        <a:rPr sz="1300" b="0">
-                          <a:solidFill>
-                            <a:srgbClr val="5E5E5E"/>
-                          </a:solidFill>
-                          <a:latin typeface="Pretendard Medium"/>
-                        </a:rPr>
-                        <a:t>35%</a:t>
-                      </a:r>
-                    </a:p>
-                  </a:txBody>
-                  <a:tcPr marL="101600" marR="101600" marT="101600" marB="101600" anchor="ctr">
-                    <a:solidFill>
-                      <a:srgbClr val="FFFFFF"/>
-                    </a:solidFill>
-                    <a:lnL w="0">
-                      <a:noFill/>
-                    </a:lnL>
-                    <a:lnR w="0">
-                      <a:noFill/>
-                    </a:lnR>
-                    <a:lnT w="0">
-                      <a:noFill/>
-                    </a:lnT>
-                    <a:lnB w="9525">
-                      <a:solidFill>
-                        <a:srgbClr val="E2E2E2"/>
-                      </a:solidFill>
-                    </a:lnB>
-                  </a:tcPr>
-                </a:tc>
-                <a:tc>
-                  <a:txBody>
-                    <a:bodyPr/>
-                    <a:lstStyle/>
-                    <a:p>
-                      <a:r>
-                        <a:rPr sz="1300" b="0">
-                          <a:solidFill>
-                            <a:srgbClr val="5E5E5E"/>
-                          </a:solidFill>
-                          <a:latin typeface="Pretendard Medium"/>
-                        </a:rPr>
-                        <a:t>발표 25 · 보고서 10</a:t>
-                      </a:r>
-                    </a:p>
-                  </a:txBody>
-                  <a:tcPr marL="101600" marR="101600" marT="101600" marB="101600" anchor="ctr">
-                    <a:solidFill>
-                      <a:srgbClr val="FFFFFF"/>
-                    </a:solidFill>
-                    <a:lnL w="0">
-                      <a:noFill/>
-                    </a:lnL>
-                    <a:lnR w="0">
-                      <a:noFill/>
-                    </a:lnR>
-                    <a:lnT w="0">
-                      <a:noFill/>
-                    </a:lnT>
-                    <a:lnB w="9525">
-                      <a:solidFill>
-                        <a:srgbClr val="E2E2E2"/>
-                      </a:solidFill>
-                    </a:lnB>
-                  </a:tcPr>
-                </a:tc>
-              </a:tr>
-              <a:tr h="635000">
-                <a:tc>
-                  <a:txBody>
-                    <a:bodyPr/>
-                    <a:lstStyle/>
-                    <a:p>
-                      <a:r>
-                        <a:rPr sz="1300" b="1">
-                          <a:solidFill>
-                            <a:srgbClr val="000000"/>
-                          </a:solidFill>
-                          <a:latin typeface="Pretendard"/>
-                        </a:rPr>
-                        <a:t>실습 과제</a:t>
-                      </a:r>
-                    </a:p>
-                  </a:txBody>
-                  <a:tcPr marL="101600" marR="101600" marT="101600" marB="101600" anchor="ctr">
-                    <a:solidFill>
-                      <a:srgbClr val="FFFFFF"/>
-                    </a:solidFill>
-                    <a:lnL w="0">
-                      <a:noFill/>
-                    </a:lnL>
-                    <a:lnR w="0">
-                      <a:noFill/>
-                    </a:lnR>
-                    <a:lnT w="0">
-                      <a:noFill/>
-                    </a:lnT>
-                    <a:lnB w="9525">
-                      <a:solidFill>
-                        <a:srgbClr val="E2E2E2"/>
-                      </a:solidFill>
-                    </a:lnB>
-                  </a:tcPr>
-                </a:tc>
-                <a:tc>
-                  <a:txBody>
-                    <a:bodyPr/>
-                    <a:lstStyle/>
-                    <a:p>
-                      <a:r>
-                        <a:rPr sz="1300" b="0">
-                          <a:solidFill>
-                            <a:srgbClr val="5E5E5E"/>
-                          </a:solidFill>
-                          <a:latin typeface="Pretendard Medium"/>
-                        </a:rPr>
-                        <a:t>25%</a:t>
-                      </a:r>
-                    </a:p>
-                  </a:txBody>
-                  <a:tcPr marL="101600" marR="101600" marT="101600" marB="101600" anchor="ctr">
-                    <a:solidFill>
-                      <a:srgbClr val="FFFFFF"/>
-                    </a:solidFill>
-                    <a:lnL w="0">
-                      <a:noFill/>
-                    </a:lnL>
-                    <a:lnR w="0">
-                      <a:noFill/>
-                    </a:lnR>
-                    <a:lnT w="0">
-                      <a:noFill/>
-                    </a:lnT>
-                    <a:lnB w="9525">
-                      <a:solidFill>
-                        <a:srgbClr val="E2E2E2"/>
-                      </a:solidFill>
-                    </a:lnB>
-                  </a:tcPr>
-                </a:tc>
-                <a:tc>
-                  <a:txBody>
-                    <a:bodyPr/>
-                    <a:lstStyle/>
-                    <a:p>
-                      <a:r>
-                        <a:rPr sz="1300" b="0">
-                          <a:solidFill>
-                            <a:srgbClr val="5E5E5E"/>
-                          </a:solidFill>
-                          <a:latin typeface="Pretendard Medium"/>
-                        </a:rPr>
-                        <a:t>HW1~HW4</a:t>
-                      </a:r>
-                    </a:p>
-                  </a:txBody>
-                  <a:tcPr marL="101600" marR="101600" marT="101600" marB="101600" anchor="ctr">
-                    <a:solidFill>
-                      <a:srgbClr val="FFFFFF"/>
-                    </a:solidFill>
-                    <a:lnL w="0">
-                      <a:noFill/>
-                    </a:lnL>
-                    <a:lnR w="0">
-                      <a:noFill/>
-                    </a:lnR>
-                    <a:lnT w="0">
-                      <a:noFill/>
-                    </a:lnT>
-                    <a:lnB w="9525">
-                      <a:solidFill>
-                        <a:srgbClr val="E2E2E2"/>
-                      </a:solidFill>
-                    </a:lnB>
-                  </a:tcPr>
-                </a:tc>
-              </a:tr>
-              <a:tr h="635000">
-                <a:tc>
-                  <a:txBody>
-                    <a:bodyPr/>
-                    <a:lstStyle/>
-                    <a:p>
-                      <a:r>
-                        <a:rPr sz="1300" b="1">
-                          <a:solidFill>
-                            <a:srgbClr val="000000"/>
-                          </a:solidFill>
-                          <a:latin typeface="Pretendard"/>
-                        </a:rPr>
-                        <a:t>출석·참여</a:t>
-                      </a:r>
-                    </a:p>
-                  </a:txBody>
-                  <a:tcPr marL="101600" marR="101600" marT="101600" marB="101600" anchor="ctr">
-                    <a:solidFill>
-                      <a:srgbClr val="FFFFFF"/>
-                    </a:solidFill>
-                    <a:lnL w="0">
-                      <a:noFill/>
-                    </a:lnL>
-                    <a:lnR w="0">
-                      <a:noFill/>
-                    </a:lnR>
-                    <a:lnT w="0">
-                      <a:noFill/>
-                    </a:lnT>
-                    <a:lnB w="9525">
-                      <a:solidFill>
-                        <a:srgbClr val="E2E2E2"/>
-                      </a:solidFill>
-                    </a:lnB>
-                  </a:tcPr>
-                </a:tc>
-                <a:tc>
-                  <a:txBody>
-                    <a:bodyPr/>
-                    <a:lstStyle/>
-                    <a:p>
-                      <a:r>
-                        <a:rPr sz="1300" b="0">
-                          <a:solidFill>
-                            <a:srgbClr val="5E5E5E"/>
-                          </a:solidFill>
-                          <a:latin typeface="Pretendard Medium"/>
-                        </a:rPr>
-                        <a:t>10%</a:t>
-                      </a:r>
-                    </a:p>
-                  </a:txBody>
-                  <a:tcPr marL="101600" marR="101600" marT="101600" marB="101600" anchor="ctr">
-                    <a:solidFill>
-                      <a:srgbClr val="FFFFFF"/>
-                    </a:solidFill>
-                    <a:lnL w="0">
-                      <a:noFill/>
-                    </a:lnL>
-                    <a:lnR w="0">
-                      <a:noFill/>
-                    </a:lnR>
-                    <a:lnT w="0">
-                      <a:noFill/>
-                    </a:lnT>
-                    <a:lnB w="9525">
-                      <a:solidFill>
-                        <a:srgbClr val="E2E2E2"/>
-                      </a:solidFill>
-                    </a:lnB>
-                  </a:tcPr>
-                </a:tc>
-                <a:tc>
-                  <a:txBody>
-                    <a:bodyPr/>
-                    <a:lstStyle/>
-                    <a:p>
-                      <a:r>
-                        <a:rPr sz="1300" b="0">
-                          <a:solidFill>
-                            <a:srgbClr val="5E5E5E"/>
-                          </a:solidFill>
-                          <a:latin typeface="Pretendard Medium"/>
-                        </a:rPr>
-                        <a:t>학칙 적용</a:t>
-                      </a:r>
-                    </a:p>
-                  </a:txBody>
-                  <a:tcPr marL="101600" marR="101600" marT="101600" marB="101600" anchor="ctr">
-                    <a:solidFill>
-                      <a:srgbClr val="FFFFFF"/>
-                    </a:solidFill>
-                    <a:lnL w="0">
-                      <a:noFill/>
-                    </a:lnL>
-                    <a:lnR w="0">
-                      <a:noFill/>
-                    </a:lnR>
-                    <a:lnT w="0">
-                      <a:noFill/>
-                    </a:lnT>
-                    <a:lnB w="9525">
-                      <a:solidFill>
-                        <a:srgbClr val="E2E2E2"/>
-                      </a:solidFill>
-                    </a:lnB>
-                  </a:tcPr>
-                </a:tc>
-              </a:tr>
-            </a:tbl>
-          </a:graphicData>
-        </a:graphic>
-      </p:graphicFrame>
+            <a:pPr/>
+            <a:r>
+              <a:t>외부 자료와 코드의 출처 명시</a:t>
+            </a:r>
+          </a:p>
+          <a:p>
+            <a:pPr/>
+            <a:r>
+              <a:t>실행 가능한 분석 코드 제출</a:t>
+            </a:r>
+          </a:p>
+          <a:p>
+            <a:pPr/>
+            <a:r>
+              <a:t>AI 코딩 도구는 제한 없이 사용</a:t>
+            </a:r>
+          </a:p>
+          <a:p>
+            <a:pPr lvl="1"/>
+            <a:r>
+              <a:t>정확성의 책임은 제출한 학생에게</a:t>
+            </a:r>
+          </a:p>
+          <a:p>
+            <a:pPr/>
+            <a:r>
+              <a:t>제출물은 노트북 + 검토표 한 장</a:t>
+            </a:r>
+          </a:p>
+          <a:p>
+            <a:pPr lvl="1"/>
+            <a:r>
+              <a:t>결과의 주요 숫자를 옮겨 적고 기준선과 비교</a:t>
+            </a:r>
+          </a:p>
+          <a:p>
+            <a:pPr/>
+            <a:r>
+              <a:t>마감 다음 주 실습에서 전원 숫자를 익명 비교</a:t>
+            </a:r>
+          </a:p>
+          <a:p>
+            <a:pPr lvl="1"/>
+            <a:r>
+              <a:t>이상을 찾으면 한 주 안에 감점 없이 재제출</a:t>
+            </a:r>
+          </a:p>
+        </p:txBody>
+      </p:sp>
       <p:sp>
         <p:nvSpPr>
           <p:cNvPr id="25" name="Slide Number Placeholder 0"/>
@@ -9024,7 +7986,7 @@
             <a:pPr algn="r"/>
             <a:fld id="{F7021451-1387-4CA6-816F-3879F97B5CBC}" type="slidenum">
               <a:rPr b="0" lang="en-US"/>
-              <a:t>1007</a:t>
+              <a:t>1004</a:t>
             </a:fld>
             <a:endParaRPr lang="en-US"/>
           </a:p>
@@ -9064,7 +8026,7 @@
           <a:lstStyle/>
           <a:p>
             <a:r>
-              <a:t>4.2 중간고사와 팀 프로젝트</a:t>
+              <a:t>4.5 출결·휴강·연락</a:t>
             </a:r>
           </a:p>
         </p:txBody>
@@ -9107,37 +8069,31 @@
           <a:p>
             <a:pPr/>
             <a:r>
-              <a:t>중간고사(9주차)</a:t>
-            </a:r>
-          </a:p>
-          <a:p>
-            <a:pPr lvl="1"/>
-            <a:r>
-              <a:t>개념 단답: closed-book</a:t>
-            </a:r>
-          </a:p>
-          <a:p>
-            <a:pPr lvl="1"/>
-            <a:r>
-              <a:t>코드 해석·수정: open-book, LLM 사용 가능</a:t>
+              <a:t>8주차(10/20–21): 휴강, HW2 대체</a:t>
             </a:r>
           </a:p>
           <a:p>
             <a:pPr/>
             <a:r>
-              <a:t>팀 프로젝트: 3~4인, 9주차 주제 공지·팀 편성</a:t>
-            </a:r>
-          </a:p>
-          <a:p>
-            <a:pPr lvl="1"/>
-            <a:r>
-              <a:t>수요 예측 또는 ETA</a:t>
+              <a:t>출결: 학칙 적용, 결석 초과 시 F</a:t>
             </a:r>
           </a:p>
           <a:p>
             <a:pPr/>
             <a:r>
-              <a:t>최종 발표: 15주차(12-08), 팀당 발표 10분·질의응답 5분</a:t>
+              <a:t>강의 자료·과제: GitHub repository</a:t>
+            </a:r>
+          </a:p>
+          <a:p>
+            <a:pPr/>
+            <a:r>
+              <a:t>오피스 아워: 수 17:00–20:00</a:t>
+            </a:r>
+          </a:p>
+          <a:p>
+            <a:pPr/>
+            <a:r>
+              <a:t>연락: jihoyeo@gachon.ac.kr</a:t>
             </a:r>
           </a:p>
         </p:txBody>
@@ -9210,12 +8166,12 @@
       <p:grpSpPr/>
       <p:sp>
         <p:nvSpPr>
-          <p:cNvPr id="2" name="Title 1"/>
-          <p:cNvSpPr>
-            <a:spLocks noGrp="1"/>
-          </p:cNvSpPr>
-          <p:nvPr>
-            <p:ph type="title" idx="100"/>
+          <p:cNvPr id="2" name="Text Placeholder 1"/>
+          <p:cNvSpPr>
+            <a:spLocks noGrp="1"/>
+          </p:cNvSpPr>
+          <p:nvPr>
+            <p:ph type="body" idx="100"/>
           </p:nvPr>
         </p:nvSpPr>
         <p:spPr/>
@@ -9224,19 +8180,19 @@
           <a:lstStyle/>
           <a:p>
             <a:r>
-              <a:t>4.3 실습 과제 4회</a:t>
-            </a:r>
-          </a:p>
-        </p:txBody>
-      </p:sp>
-      <p:sp>
-        <p:nvSpPr>
-          <p:cNvPr id="3" name="Text Placeholder 2"/>
-          <p:cNvSpPr>
-            <a:spLocks noGrp="1"/>
-          </p:cNvSpPr>
-          <p:nvPr>
-            <p:ph type="body" idx="101"/>
+              <a:t>05</a:t>
+            </a:r>
+          </a:p>
+        </p:txBody>
+      </p:sp>
+      <p:sp>
+        <p:nvSpPr>
+          <p:cNvPr id="3" name="Title 2"/>
+          <p:cNvSpPr>
+            <a:spLocks noGrp="1"/>
+          </p:cNvSpPr>
+          <p:nvPr>
+            <p:ph type="title" idx="101"/>
           </p:nvPr>
         </p:nvSpPr>
         <p:spPr/>
@@ -9245,7 +8201,7 @@
           <a:lstStyle/>
           <a:p>
             <a:r>
-              <a:t>4. 평가와 운영</a:t>
+              <a:t>실습 환경과 다음 주</a:t>
             </a:r>
           </a:p>
         </p:txBody>
@@ -9265,662 +8221,76 @@
           <a:bodyPr/>
           <a:lstStyle/>
           <a:p>
-            <a:pPr/>
-            <a:r>
-              <a:t>제출: repository의 `assignments/` 안내</a:t>
-            </a:r>
-          </a:p>
-          <a:p>
-            <a:pPr/>
-            <a:r>
-              <a:t>지각 제출: 하루당 10% 감점</a:t>
-            </a:r>
-          </a:p>
-          <a:p>
-            <a:pPr/>
-            <a:r>
-              <a:t>HW3: 8주차 휴강 대체 과제</a:t>
-            </a:r>
-          </a:p>
-        </p:txBody>
-      </p:sp>
-      <p:sp>
-        <p:nvSpPr>
-          <p:cNvPr id="5" name="Text Placeholder 4"/>
-          <p:cNvSpPr>
-            <a:spLocks noGrp="1"/>
-          </p:cNvSpPr>
-          <p:nvPr>
-            <p:ph type="body" idx="103"/>
-          </p:nvPr>
-        </p:nvSpPr>
-        <p:spPr/>
-        <p:txBody>
-          <a:bodyPr/>
-          <a:lstStyle/>
-          <a:p>
-            <a:r>
-              <a:t>표 4. 과제 4회의 내용과 기한</a:t>
-            </a:r>
-          </a:p>
-        </p:txBody>
-      </p:sp>
-      <p:graphicFrame>
-        <p:nvGraphicFramePr>
-          <p:cNvPr id="6" name="Table Placeholder 5"/>
-          <p:cNvGraphicFramePr>
-            <a:graphicFrameLocks noGrp="1"/>
-          </p:cNvGraphicFramePr>
-          <p:nvPr>
-            <p:ph type="tbl" idx="104"/>
-          </p:nvPr>
-        </p:nvGraphicFramePr>
-        <p:xfrm>
-          <a:off x="4937760" y="1828800"/>
-          <a:ext cx="6565392" cy="2946400"/>
-        </p:xfrm>
-        <a:graphic>
-          <a:graphicData uri="http://schemas.openxmlformats.org/drawingml/2006/table">
-            <a:tbl>
-              <a:tblPr firstRow="0" bandRow="0" firstCol="0" lastRow="0" lastCol="0" bandCol="0"/>
-              <a:tblGrid>
-                <a:gridCol w="2188464"/>
-                <a:gridCol w="2188464"/>
-                <a:gridCol w="2188464"/>
-              </a:tblGrid>
-              <a:tr h="406400">
-                <a:tc>
-                  <a:txBody>
-                    <a:bodyPr/>
-                    <a:lstStyle/>
-                    <a:p>
-                      <a:r>
-                        <a:rPr sz="1300" b="0">
-                          <a:solidFill>
-                            <a:srgbClr val="FFFFFF"/>
-                          </a:solidFill>
-                          <a:latin typeface="Pretendard Medium"/>
-                        </a:rPr>
-                        <a:t>과제</a:t>
-                      </a:r>
-                    </a:p>
-                  </a:txBody>
-                  <a:tcPr marL="101600" marR="101600" marT="76200" marB="76200" anchor="ctr">
-                    <a:solidFill>
-                      <a:srgbClr val="000000"/>
-                    </a:solidFill>
-                    <a:lnL w="0">
-                      <a:noFill/>
-                    </a:lnL>
-                    <a:lnR w="0">
-                      <a:noFill/>
-                    </a:lnR>
-                    <a:lnT w="0">
-                      <a:noFill/>
-                    </a:lnT>
-                    <a:lnB w="0">
-                      <a:noFill/>
-                    </a:lnB>
-                  </a:tcPr>
-                </a:tc>
-                <a:tc>
-                  <a:txBody>
-                    <a:bodyPr/>
-                    <a:lstStyle/>
-                    <a:p>
-                      <a:r>
-                        <a:rPr sz="1300" b="0">
-                          <a:solidFill>
-                            <a:srgbClr val="FFFFFF"/>
-                          </a:solidFill>
-                          <a:latin typeface="Pretendard Medium"/>
-                        </a:rPr>
-                        <a:t>내용</a:t>
-                      </a:r>
-                    </a:p>
-                  </a:txBody>
-                  <a:tcPr marL="101600" marR="101600" marT="76200" marB="76200" anchor="ctr">
-                    <a:solidFill>
-                      <a:srgbClr val="000000"/>
-                    </a:solidFill>
-                    <a:lnL w="0">
-                      <a:noFill/>
-                    </a:lnL>
-                    <a:lnR w="0">
-                      <a:noFill/>
-                    </a:lnR>
-                    <a:lnT w="0">
-                      <a:noFill/>
-                    </a:lnT>
-                    <a:lnB w="0">
-                      <a:noFill/>
-                    </a:lnB>
-                  </a:tcPr>
-                </a:tc>
-                <a:tc>
-                  <a:txBody>
-                    <a:bodyPr/>
-                    <a:lstStyle/>
-                    <a:p>
-                      <a:r>
-                        <a:rPr sz="1300" b="0">
-                          <a:solidFill>
-                            <a:srgbClr val="FFFFFF"/>
-                          </a:solidFill>
-                          <a:latin typeface="Pretendard Medium"/>
-                        </a:rPr>
-                        <a:t>배포 → 마감</a:t>
-                      </a:r>
-                    </a:p>
-                  </a:txBody>
-                  <a:tcPr marL="101600" marR="101600" marT="76200" marB="76200" anchor="ctr">
-                    <a:solidFill>
-                      <a:srgbClr val="000000"/>
-                    </a:solidFill>
-                    <a:lnL w="0">
-                      <a:noFill/>
-                    </a:lnL>
-                    <a:lnR w="0">
-                      <a:noFill/>
-                    </a:lnR>
-                    <a:lnT w="0">
-                      <a:noFill/>
-                    </a:lnT>
-                    <a:lnB w="0">
-                      <a:noFill/>
-                    </a:lnB>
-                  </a:tcPr>
-                </a:tc>
-              </a:tr>
-              <a:tr h="635000">
-                <a:tc>
-                  <a:txBody>
-                    <a:bodyPr/>
-                    <a:lstStyle/>
-                    <a:p>
-                      <a:r>
-                        <a:rPr sz="1300" b="1">
-                          <a:solidFill>
-                            <a:srgbClr val="000000"/>
-                          </a:solidFill>
-                          <a:latin typeface="Pretendard"/>
-                        </a:rPr>
-                        <a:t>HW1</a:t>
-                      </a:r>
-                    </a:p>
-                  </a:txBody>
-                  <a:tcPr marL="101600" marR="101600" marT="101600" marB="101600" anchor="ctr">
-                    <a:solidFill>
-                      <a:srgbClr val="FFFFFF"/>
-                    </a:solidFill>
-                    <a:lnL w="0">
-                      <a:noFill/>
-                    </a:lnL>
-                    <a:lnR w="0">
-                      <a:noFill/>
-                    </a:lnR>
-                    <a:lnT w="0">
-                      <a:noFill/>
-                    </a:lnT>
-                    <a:lnB w="9525">
-                      <a:solidFill>
-                        <a:srgbClr val="E2E2E2"/>
-                      </a:solidFill>
-                    </a:lnB>
-                  </a:tcPr>
-                </a:tc>
-                <a:tc>
-                  <a:txBody>
-                    <a:bodyPr/>
-                    <a:lstStyle/>
-                    <a:p>
-                      <a:r>
-                        <a:rPr sz="1300" b="0">
-                          <a:solidFill>
-                            <a:srgbClr val="5E5E5E"/>
-                          </a:solidFill>
-                          <a:latin typeface="Pretendard Medium"/>
-                        </a:rPr>
-                        <a:t>데이터 정제·시각화</a:t>
-                      </a:r>
-                    </a:p>
-                  </a:txBody>
-                  <a:tcPr marL="101600" marR="101600" marT="101600" marB="101600" anchor="ctr">
-                    <a:solidFill>
-                      <a:srgbClr val="FFFFFF"/>
-                    </a:solidFill>
-                    <a:lnL w="0">
-                      <a:noFill/>
-                    </a:lnL>
-                    <a:lnR w="0">
-                      <a:noFill/>
-                    </a:lnR>
-                    <a:lnT w="0">
-                      <a:noFill/>
-                    </a:lnT>
-                    <a:lnB w="9525">
-                      <a:solidFill>
-                        <a:srgbClr val="E2E2E2"/>
-                      </a:solidFill>
-                    </a:lnB>
-                  </a:tcPr>
-                </a:tc>
-                <a:tc>
-                  <a:txBody>
-                    <a:bodyPr/>
-                    <a:lstStyle/>
-                    <a:p>
-                      <a:r>
-                        <a:rPr sz="1300" b="0">
-                          <a:solidFill>
-                            <a:srgbClr val="5E5E5E"/>
-                          </a:solidFill>
-                          <a:latin typeface="Pretendard Medium"/>
-                        </a:rPr>
-                        <a:t>2 → 4주</a:t>
-                      </a:r>
-                    </a:p>
-                  </a:txBody>
-                  <a:tcPr marL="101600" marR="101600" marT="101600" marB="101600" anchor="ctr">
-                    <a:solidFill>
-                      <a:srgbClr val="FFFFFF"/>
-                    </a:solidFill>
-                    <a:lnL w="0">
-                      <a:noFill/>
-                    </a:lnL>
-                    <a:lnR w="0">
-                      <a:noFill/>
-                    </a:lnR>
-                    <a:lnT w="0">
-                      <a:noFill/>
-                    </a:lnT>
-                    <a:lnB w="9525">
-                      <a:solidFill>
-                        <a:srgbClr val="E2E2E2"/>
-                      </a:solidFill>
-                    </a:lnB>
-                  </a:tcPr>
-                </a:tc>
-              </a:tr>
-              <a:tr h="635000">
-                <a:tc>
-                  <a:txBody>
-                    <a:bodyPr/>
-                    <a:lstStyle/>
-                    <a:p>
-                      <a:r>
-                        <a:rPr sz="1300" b="1">
-                          <a:solidFill>
-                            <a:srgbClr val="000000"/>
-                          </a:solidFill>
-                          <a:latin typeface="Pretendard"/>
-                        </a:rPr>
-                        <a:t>HW2</a:t>
-                      </a:r>
-                    </a:p>
-                  </a:txBody>
-                  <a:tcPr marL="101600" marR="101600" marT="101600" marB="101600" anchor="ctr">
-                    <a:solidFill>
-                      <a:srgbClr val="FFFFFF"/>
-                    </a:solidFill>
-                    <a:lnL w="0">
-                      <a:noFill/>
-                    </a:lnL>
-                    <a:lnR w="0">
-                      <a:noFill/>
-                    </a:lnR>
-                    <a:lnT w="0">
-                      <a:noFill/>
-                    </a:lnT>
-                    <a:lnB w="9525">
-                      <a:solidFill>
-                        <a:srgbClr val="E2E2E2"/>
-                      </a:solidFill>
-                    </a:lnB>
-                  </a:tcPr>
-                </a:tc>
-                <a:tc>
-                  <a:txBody>
-                    <a:bodyPr/>
-                    <a:lstStyle/>
-                    <a:p>
-                      <a:r>
-                        <a:rPr sz="1300" b="0">
-                          <a:solidFill>
-                            <a:srgbClr val="5E5E5E"/>
-                          </a:solidFill>
-                          <a:latin typeface="Pretendard Medium"/>
-                        </a:rPr>
-                        <a:t>End-to-End 재현</a:t>
-                      </a:r>
-                    </a:p>
-                  </a:txBody>
-                  <a:tcPr marL="101600" marR="101600" marT="101600" marB="101600" anchor="ctr">
-                    <a:solidFill>
-                      <a:srgbClr val="FFFFFF"/>
-                    </a:solidFill>
-                    <a:lnL w="0">
-                      <a:noFill/>
-                    </a:lnL>
-                    <a:lnR w="0">
-                      <a:noFill/>
-                    </a:lnR>
-                    <a:lnT w="0">
-                      <a:noFill/>
-                    </a:lnT>
-                    <a:lnB w="9525">
-                      <a:solidFill>
-                        <a:srgbClr val="E2E2E2"/>
-                      </a:solidFill>
-                    </a:lnB>
-                  </a:tcPr>
-                </a:tc>
-                <a:tc>
-                  <a:txBody>
-                    <a:bodyPr/>
-                    <a:lstStyle/>
-                    <a:p>
-                      <a:r>
-                        <a:rPr sz="1300" b="0">
-                          <a:solidFill>
-                            <a:srgbClr val="5E5E5E"/>
-                          </a:solidFill>
-                          <a:latin typeface="Pretendard Medium"/>
-                        </a:rPr>
-                        <a:t>3 → 5주</a:t>
-                      </a:r>
-                    </a:p>
-                  </a:txBody>
-                  <a:tcPr marL="101600" marR="101600" marT="101600" marB="101600" anchor="ctr">
-                    <a:solidFill>
-                      <a:srgbClr val="FFFFFF"/>
-                    </a:solidFill>
-                    <a:lnL w="0">
-                      <a:noFill/>
-                    </a:lnL>
-                    <a:lnR w="0">
-                      <a:noFill/>
-                    </a:lnR>
-                    <a:lnT w="0">
-                      <a:noFill/>
-                    </a:lnT>
-                    <a:lnB w="9525">
-                      <a:solidFill>
-                        <a:srgbClr val="E2E2E2"/>
-                      </a:solidFill>
-                    </a:lnB>
-                  </a:tcPr>
-                </a:tc>
-              </a:tr>
-              <a:tr h="635000">
-                <a:tc>
-                  <a:txBody>
-                    <a:bodyPr/>
-                    <a:lstStyle/>
-                    <a:p>
-                      <a:r>
-                        <a:rPr sz="1300" b="1">
-                          <a:solidFill>
-                            <a:srgbClr val="000000"/>
-                          </a:solidFill>
-                          <a:latin typeface="Pretendard"/>
-                        </a:rPr>
-                        <a:t>HW3</a:t>
-                      </a:r>
-                    </a:p>
-                  </a:txBody>
-                  <a:tcPr marL="101600" marR="101600" marT="101600" marB="101600" anchor="ctr">
-                    <a:solidFill>
-                      <a:srgbClr val="FFFFFF"/>
-                    </a:solidFill>
-                    <a:lnL w="0">
-                      <a:noFill/>
-                    </a:lnL>
-                    <a:lnR w="0">
-                      <a:noFill/>
-                    </a:lnR>
-                    <a:lnT w="0">
-                      <a:noFill/>
-                    </a:lnT>
-                    <a:lnB w="9525">
-                      <a:solidFill>
-                        <a:srgbClr val="E2E2E2"/>
-                      </a:solidFill>
-                    </a:lnB>
-                  </a:tcPr>
-                </a:tc>
-                <a:tc>
-                  <a:txBody>
-                    <a:bodyPr/>
-                    <a:lstStyle/>
-                    <a:p>
-                      <a:r>
-                        <a:rPr sz="1300" b="0">
-                          <a:solidFill>
-                            <a:srgbClr val="5E5E5E"/>
-                          </a:solidFill>
-                          <a:latin typeface="Pretendard Medium"/>
-                        </a:rPr>
-                        <a:t>앙상블 비교 리포트</a:t>
-                      </a:r>
-                    </a:p>
-                  </a:txBody>
-                  <a:tcPr marL="101600" marR="101600" marT="101600" marB="101600" anchor="ctr">
-                    <a:solidFill>
-                      <a:srgbClr val="FFFFFF"/>
-                    </a:solidFill>
-                    <a:lnL w="0">
-                      <a:noFill/>
-                    </a:lnL>
-                    <a:lnR w="0">
-                      <a:noFill/>
-                    </a:lnR>
-                    <a:lnT w="0">
-                      <a:noFill/>
-                    </a:lnT>
-                    <a:lnB w="9525">
-                      <a:solidFill>
-                        <a:srgbClr val="E2E2E2"/>
-                      </a:solidFill>
-                    </a:lnB>
-                  </a:tcPr>
-                </a:tc>
-                <a:tc>
-                  <a:txBody>
-                    <a:bodyPr/>
-                    <a:lstStyle/>
-                    <a:p>
-                      <a:r>
-                        <a:rPr sz="1300" b="0">
-                          <a:solidFill>
-                            <a:srgbClr val="5E5E5E"/>
-                          </a:solidFill>
-                          <a:latin typeface="Pretendard Medium"/>
-                        </a:rPr>
-                        <a:t>8 → 10주</a:t>
-                      </a:r>
-                    </a:p>
-                  </a:txBody>
-                  <a:tcPr marL="101600" marR="101600" marT="101600" marB="101600" anchor="ctr">
-                    <a:solidFill>
-                      <a:srgbClr val="FFFFFF"/>
-                    </a:solidFill>
-                    <a:lnL w="0">
-                      <a:noFill/>
-                    </a:lnL>
-                    <a:lnR w="0">
-                      <a:noFill/>
-                    </a:lnR>
-                    <a:lnT w="0">
-                      <a:noFill/>
-                    </a:lnT>
-                    <a:lnB w="9525">
-                      <a:solidFill>
-                        <a:srgbClr val="E2E2E2"/>
-                      </a:solidFill>
-                    </a:lnB>
-                  </a:tcPr>
-                </a:tc>
-              </a:tr>
-              <a:tr h="635000">
-                <a:tc>
-                  <a:txBody>
-                    <a:bodyPr/>
-                    <a:lstStyle/>
-                    <a:p>
-                      <a:r>
-                        <a:rPr sz="1300" b="1">
-                          <a:solidFill>
-                            <a:srgbClr val="000000"/>
-                          </a:solidFill>
-                          <a:latin typeface="Pretendard"/>
-                        </a:rPr>
-                        <a:t>HW4</a:t>
-                      </a:r>
-                    </a:p>
-                  </a:txBody>
-                  <a:tcPr marL="101600" marR="101600" marT="101600" marB="101600" anchor="ctr">
-                    <a:solidFill>
-                      <a:srgbClr val="FFFFFF"/>
-                    </a:solidFill>
-                    <a:lnL w="0">
-                      <a:noFill/>
-                    </a:lnL>
-                    <a:lnR w="0">
-                      <a:noFill/>
-                    </a:lnR>
-                    <a:lnT w="0">
-                      <a:noFill/>
-                    </a:lnT>
-                    <a:lnB w="9525">
-                      <a:solidFill>
-                        <a:srgbClr val="E2E2E2"/>
-                      </a:solidFill>
-                    </a:lnB>
-                  </a:tcPr>
-                </a:tc>
-                <a:tc>
-                  <a:txBody>
-                    <a:bodyPr/>
-                    <a:lstStyle/>
-                    <a:p>
-                      <a:r>
-                        <a:rPr sz="1300" b="0">
-                          <a:solidFill>
-                            <a:srgbClr val="5E5E5E"/>
-                          </a:solidFill>
-                          <a:latin typeface="Pretendard Medium"/>
-                        </a:rPr>
-                        <a:t>역전파·옵티마이저</a:t>
-                      </a:r>
-                    </a:p>
-                  </a:txBody>
-                  <a:tcPr marL="101600" marR="101600" marT="101600" marB="101600" anchor="ctr">
-                    <a:solidFill>
-                      <a:srgbClr val="FFFFFF"/>
-                    </a:solidFill>
-                    <a:lnL w="0">
-                      <a:noFill/>
-                    </a:lnL>
-                    <a:lnR w="0">
-                      <a:noFill/>
-                    </a:lnR>
-                    <a:lnT w="0">
-                      <a:noFill/>
-                    </a:lnT>
-                    <a:lnB w="9525">
-                      <a:solidFill>
-                        <a:srgbClr val="E2E2E2"/>
-                      </a:solidFill>
-                    </a:lnB>
-                  </a:tcPr>
-                </a:tc>
-                <a:tc>
-                  <a:txBody>
-                    <a:bodyPr/>
-                    <a:lstStyle/>
-                    <a:p>
-                      <a:r>
-                        <a:rPr sz="1300" b="0">
-                          <a:solidFill>
-                            <a:srgbClr val="5E5E5E"/>
-                          </a:solidFill>
-                          <a:latin typeface="Pretendard Medium"/>
-                        </a:rPr>
-                        <a:t>10 → 12주</a:t>
-                      </a:r>
-                    </a:p>
-                  </a:txBody>
-                  <a:tcPr marL="101600" marR="101600" marT="101600" marB="101600" anchor="ctr">
-                    <a:solidFill>
-                      <a:srgbClr val="FFFFFF"/>
-                    </a:solidFill>
-                    <a:lnL w="0">
-                      <a:noFill/>
-                    </a:lnL>
-                    <a:lnR w="0">
-                      <a:noFill/>
-                    </a:lnR>
-                    <a:lnT w="0">
-                      <a:noFill/>
-                    </a:lnT>
-                    <a:lnB w="9525">
-                      <a:solidFill>
-                        <a:srgbClr val="E2E2E2"/>
-                      </a:solidFill>
-                    </a:lnB>
-                  </a:tcPr>
-                </a:tc>
-              </a:tr>
-            </a:tbl>
-          </a:graphicData>
-        </a:graphic>
-      </p:graphicFrame>
-      <p:sp>
-        <p:nvSpPr>
-          <p:cNvPr id="25" name="Slide Number Placeholder 0"/>
-          <p:cNvSpPr>
-            <a:spLocks noGrp="1"/>
-          </p:cNvSpPr>
-          <p:nvPr>
-            <p:ph type="sldNum" sz="quarter" idx="4294967295"/>
-          </p:nvPr>
-        </p:nvSpPr>
-        <p:spPr>
-          <a:xfrm>
-            <a:off x="10591495" y="6355080"/>
-            <a:ext cx="914400" cy="274320"/>
-          </a:xfrm>
-          <a:prstGeom prst="rect">
-            <a:avLst/>
-          </a:prstGeom>
-          <a:extLst>
-            <a:ext uri="{C572A759-6A51-4108-AA02-DFA0A04FC94B}">
-              <ma14:wrappingTextBoxFlag xmlns:ma14="http://schemas.microsoft.com/office/mac/drawingml/2011/main" val="0"/>
-            </a:ext>
-          </a:extLst>
-        </p:spPr>
-        <p:txBody>
-          <a:bodyPr/>
-          <a:lstStyle>
-            <a:lvl1pPr>
-              <a:defRPr sz="1000">
+            <a:pPr>
+              <a:spcAft>
+                <a:spcPts val="1000"/>
+              </a:spcAft>
+            </a:pPr>
+            <a:r>
+              <a:rPr>
                 <a:solidFill>
                   <a:srgbClr val="AFAFAF"/>
                 </a:solidFill>
-                <a:latin typeface="Pretendard Medium"/>
-                <a:ea typeface="Pretendard Medium"/>
-                <a:cs typeface="Pretendard Medium"/>
-              </a:defRPr>
-            </a:lvl1pPr>
-          </a:lstStyle>
-          <a:p>
-            <a:pPr algn="r"/>
-            <a:fld id="{F7021451-1387-4CA6-816F-3879F97B5CBC}" type="slidenum">
-              <a:rPr b="0" lang="en-US"/>
-              <a:t>1008</a:t>
-            </a:fld>
-            <a:endParaRPr lang="en-US"/>
+              </a:rPr>
+              <a:t>5.1  </a:t>
+            </a:r>
+            <a:r>
+              <a:t>분석 도구</a:t>
+            </a:r>
+          </a:p>
+          <a:p>
+            <a:pPr>
+              <a:spcAft>
+                <a:spcPts val="1000"/>
+              </a:spcAft>
+            </a:pPr>
+            <a:r>
+              <a:rPr>
+                <a:solidFill>
+                  <a:srgbClr val="AFAFAF"/>
+                </a:solidFill>
+              </a:rPr>
+              <a:t>5.2  </a:t>
+            </a:r>
+            <a:r>
+              <a:t>AI 코딩 도구</a:t>
+            </a:r>
+          </a:p>
+          <a:p>
+            <a:pPr>
+              <a:spcAft>
+                <a:spcPts val="1000"/>
+              </a:spcAft>
+            </a:pPr>
+            <a:r>
+              <a:rPr>
+                <a:solidFill>
+                  <a:srgbClr val="AFAFAF"/>
+                </a:solidFill>
+              </a:rPr>
+              <a:t>5.3  </a:t>
+            </a:r>
+            <a:r>
+              <a:t>환경 점검 미리보기</a:t>
+            </a:r>
+          </a:p>
+          <a:p>
+            <a:pPr>
+              <a:spcAft>
+                <a:spcPts val="1000"/>
+              </a:spcAft>
+            </a:pPr>
+            <a:r>
+              <a:rPr>
+                <a:solidFill>
+                  <a:srgbClr val="AFAFAF"/>
+                </a:solidFill>
+              </a:rPr>
+              <a:t>5.4  </a:t>
+            </a:r>
+            <a:r>
+              <a:t>이번 주 할 일</a:t>
+            </a:r>
           </a:p>
         </p:txBody>
       </p:sp>
@@ -9958,7 +8328,7 @@
           <a:lstStyle/>
           <a:p>
             <a:r>
-              <a:t>4.4 생성형 AI 활용 정책</a:t>
+              <a:t>5.1 분석 도구</a:t>
             </a:r>
           </a:p>
         </p:txBody>
@@ -9979,7 +8349,7 @@
           <a:lstStyle/>
           <a:p>
             <a:r>
-              <a:t>4. 평가와 운영</a:t>
+              <a:t>5. 실습 환경과 다음 주</a:t>
             </a:r>
           </a:p>
         </p:txBody>
@@ -10001,25 +8371,31 @@
           <a:p>
             <a:pPr/>
             <a:r>
-              <a:t>Claude·ChatGPT·Gemini 등 LLM 사용 가능</a:t>
+              <a:t>기본: Python·pandas·scikit-learn</a:t>
             </a:r>
           </a:p>
           <a:p>
             <a:pPr/>
             <a:r>
-              <a:t>평가 기준: 질문 구성, 결과 검증, 코드 설명</a:t>
+              <a:t>공간 데이터: GeoPandas</a:t>
             </a:r>
           </a:p>
           <a:p>
             <a:pPr/>
             <a:r>
-              <a:t>과제에 사용 도구와 사용 범위 명시</a:t>
+              <a:t>신경망 구현: numpy</a:t>
             </a:r>
           </a:p>
           <a:p>
             <a:pPr/>
             <a:r>
-              <a:t>표절: 출처 없는 생성물, 설명하지 못하는 코드</a:t>
+              <a:t>10주차 이후: PyTorch</a:t>
+            </a:r>
+          </a:p>
+          <a:p>
+            <a:pPr/>
+            <a:r>
+              <a:t>설치가 어려운 경우: Google Colab</a:t>
             </a:r>
           </a:p>
         </p:txBody>
@@ -10106,7 +8482,7 @@
           <a:lstStyle/>
           <a:p>
             <a:r>
-              <a:t>4.5 출결·휴강·연락</a:t>
+              <a:t>5.2 AI 코딩 도구</a:t>
             </a:r>
           </a:p>
         </p:txBody>
@@ -10127,7 +8503,7 @@
           <a:lstStyle/>
           <a:p>
             <a:r>
-              <a:t>4. 평가와 운영</a:t>
+              <a:t>5. 실습 환경과 다음 주</a:t>
             </a:r>
           </a:p>
         </p:txBody>
@@ -10149,31 +8525,37 @@
           <a:p>
             <a:pPr/>
             <a:r>
-              <a:t>8주차(10/20–21): 휴강, HW3 대체</a:t>
+              <a:t>기본 에디터: Google Antigravity</a:t>
+            </a:r>
+          </a:p>
+          <a:p>
+            <a:pPr lvl="1"/>
+            <a:r>
+              <a:t>VS Code 기반, 에이전트 내장, 무료 플랜</a:t>
             </a:r>
           </a:p>
           <a:p>
             <a:pPr/>
             <a:r>
-              <a:t>출결: 학칙 적용, 결석 초과 시 F</a:t>
+              <a:t>코딩 에이전트: OpenAI Codex</a:t>
+            </a:r>
+          </a:p>
+          <a:p>
+            <a:pPr lvl="1"/>
+            <a:r>
+              <a:t>터미널·웹에서 사용, 2주차에 설치</a:t>
             </a:r>
           </a:p>
           <a:p>
             <a:pPr/>
             <a:r>
-              <a:t>강의 자료·과제: GitHub repository</a:t>
-            </a:r>
-          </a:p>
-          <a:p>
-            <a:pPr/>
-            <a:r>
-              <a:t>오피스 아워: 수 17:00–20:00</a:t>
-            </a:r>
-          </a:p>
-          <a:p>
-            <a:pPr/>
-            <a:r>
-              <a:t>연락: jihoyeo@gachon.ac.kr</a:t>
+              <a:t>파이썬 문법은 따로 가르치지 않음</a:t>
+            </a:r>
+          </a:p>
+          <a:p>
+            <a:pPr lvl="1"/>
+            <a:r>
+              <a:t>필요한 시점에 도구로 해결</a:t>
             </a:r>
           </a:p>
         </p:txBody>
@@ -10246,12 +8628,12 @@
       <p:grpSpPr/>
       <p:sp>
         <p:nvSpPr>
-          <p:cNvPr id="2" name="Text Placeholder 1"/>
-          <p:cNvSpPr>
-            <a:spLocks noGrp="1"/>
-          </p:cNvSpPr>
-          <p:nvPr>
-            <p:ph type="body" idx="100"/>
+          <p:cNvPr id="2" name="Title 1"/>
+          <p:cNvSpPr>
+            <a:spLocks noGrp="1"/>
+          </p:cNvSpPr>
+          <p:nvPr>
+            <p:ph type="title" idx="100"/>
           </p:nvPr>
         </p:nvSpPr>
         <p:spPr/>
@@ -10260,19 +8642,19 @@
           <a:lstStyle/>
           <a:p>
             <a:r>
-              <a:t>05</a:t>
-            </a:r>
-          </a:p>
-        </p:txBody>
-      </p:sp>
-      <p:sp>
-        <p:nvSpPr>
-          <p:cNvPr id="3" name="Title 2"/>
-          <p:cNvSpPr>
-            <a:spLocks noGrp="1"/>
-          </p:cNvSpPr>
-          <p:nvPr>
-            <p:ph type="title" idx="101"/>
+              <a:t>5.3 환경 점검 미리보기</a:t>
+            </a:r>
+          </a:p>
+        </p:txBody>
+      </p:sp>
+      <p:sp>
+        <p:nvSpPr>
+          <p:cNvPr id="3" name="Text Placeholder 2"/>
+          <p:cNvSpPr>
+            <a:spLocks noGrp="1"/>
+          </p:cNvSpPr>
+          <p:nvPr>
+            <p:ph type="body" idx="101"/>
           </p:nvPr>
         </p:nvSpPr>
         <p:spPr/>
@@ -10281,7 +8663,7 @@
           <a:lstStyle/>
           <a:p>
             <a:r>
-              <a:t>실습 환경과 다음 주</a:t>
+              <a:t>5. 실습 환경과 다음 주</a:t>
             </a:r>
           </a:p>
         </p:txBody>
@@ -10301,58 +8683,187 @@
           <a:bodyPr/>
           <a:lstStyle/>
           <a:p>
-            <a:pPr>
-              <a:spcAft>
-                <a:spcPts val="1000"/>
-              </a:spcAft>
-            </a:pPr>
+            <a:pPr/>
+            <a:r>
+              <a:t>확인 항목: numpy·pandas·scikit-learn import</a:t>
+            </a:r>
+          </a:p>
+          <a:p>
+            <a:pPr/>
+            <a:r>
+              <a:t>로컬 환경이 어려운 경우 Google Colab 사용</a:t>
+            </a:r>
+          </a:p>
+        </p:txBody>
+      </p:sp>
+      <p:sp>
+        <p:nvSpPr>
+          <p:cNvPr id="5" name="Text Placeholder 4"/>
+          <p:cNvSpPr>
+            <a:spLocks noGrp="1"/>
+          </p:cNvSpPr>
+          <p:nvPr>
+            <p:ph type="body" idx="103"/>
+          </p:nvPr>
+        </p:nvSpPr>
+        <p:spPr/>
+        <p:txBody>
+          <a:bodyPr/>
+          <a:lstStyle/>
+          <a:p>
+            <a:r>
+              <a:rPr b="1"/>
+              <a:t>import</a:t>
+            </a:r>
+            <a:r>
+              <a:t> numpy </a:t>
+            </a:r>
+            <a:r>
+              <a:rPr b="1"/>
+              <a:t>as</a:t>
+            </a:r>
+            <a:r>
+              <a:t> np</a:t>
+            </a:r>
+          </a:p>
+          <a:p>
+            <a:r>
+              <a:rPr b="1"/>
+              <a:t>import</a:t>
+            </a:r>
+            <a:r>
+              <a:t> pandas </a:t>
+            </a:r>
+            <a:r>
+              <a:rPr b="1"/>
+              <a:t>as</a:t>
+            </a:r>
+            <a:r>
+              <a:t> pd</a:t>
+            </a:r>
+          </a:p>
+          <a:p>
+            <a:r>
+              <a:rPr b="1"/>
+              <a:t>import</a:t>
+            </a:r>
+            <a:r>
+              <a:t> sklearn</a:t>
+            </a:r>
+          </a:p>
+          <a:p/>
+          <a:p>
+            <a:r>
+              <a:rPr b="1"/>
+              <a:t>print</a:t>
+            </a:r>
+            <a:r>
+              <a:t>(np.__version__)</a:t>
+            </a:r>
+          </a:p>
+          <a:p>
+            <a:r>
+              <a:rPr b="1"/>
+              <a:t>print</a:t>
+            </a:r>
+            <a:r>
+              <a:t>(pd.__version__)</a:t>
+            </a:r>
+          </a:p>
+          <a:p>
+            <a:r>
+              <a:rPr b="1"/>
+              <a:t>print</a:t>
+            </a:r>
+            <a:r>
+              <a:t>(sklearn.__version__)</a:t>
+            </a:r>
+          </a:p>
+          <a:p/>
+          <a:p>
+            <a:r>
+              <a:t>df = pd.DataFrame({</a:t>
+            </a:r>
+          </a:p>
+          <a:p>
+            <a:r>
+              <a:t>    "mode": ["bus", "subway", "taxi"],</a:t>
+            </a:r>
+          </a:p>
+          <a:p>
+            <a:r>
+              <a:t>    "trips": [420, 310, 88],</a:t>
+            </a:r>
+          </a:p>
+          <a:p>
+            <a:r>
+              <a:t>})</a:t>
+            </a:r>
+          </a:p>
+          <a:p>
+            <a:r>
+              <a:rPr b="1"/>
+              <a:t>print</a:t>
+            </a:r>
+            <a:r>
+              <a:t>(df["trips"].mean())  </a:t>
+            </a:r>
             <a:r>
               <a:rPr>
                 <a:solidFill>
+                  <a:srgbClr val="5E5E5E"/>
+                </a:solidFill>
+              </a:rPr>
+              <a:t># (결과) 272.67</a:t>
+            </a:r>
+          </a:p>
+        </p:txBody>
+      </p:sp>
+      <p:sp>
+        <p:nvSpPr>
+          <p:cNvPr id="25" name="Slide Number Placeholder 0"/>
+          <p:cNvSpPr>
+            <a:spLocks noGrp="1"/>
+          </p:cNvSpPr>
+          <p:nvPr>
+            <p:ph type="sldNum" sz="quarter" idx="4294967295"/>
+          </p:nvPr>
+        </p:nvSpPr>
+        <p:spPr>
+          <a:xfrm>
+            <a:off x="10591495" y="6355080"/>
+            <a:ext cx="914400" cy="274320"/>
+          </a:xfrm>
+          <a:prstGeom prst="rect">
+            <a:avLst/>
+          </a:prstGeom>
+          <a:extLst>
+            <a:ext uri="{C572A759-6A51-4108-AA02-DFA0A04FC94B}">
+              <ma14:wrappingTextBoxFlag xmlns:ma14="http://schemas.microsoft.com/office/mac/drawingml/2011/main" val="0"/>
+            </a:ext>
+          </a:extLst>
+        </p:spPr>
+        <p:txBody>
+          <a:bodyPr/>
+          <a:lstStyle>
+            <a:lvl1pPr>
+              <a:defRPr sz="1000">
+                <a:solidFill>
                   <a:srgbClr val="AFAFAF"/>
                 </a:solidFill>
-              </a:rPr>
-              <a:t>5.1  </a:t>
-            </a:r>
-            <a:r>
-              <a:t>실습 도구</a:t>
-            </a:r>
-          </a:p>
-          <a:p>
-            <a:pPr>
-              <a:spcAft>
-                <a:spcPts val="1000"/>
-              </a:spcAft>
-            </a:pPr>
-            <a:r>
-              <a:rPr>
-                <a:solidFill>
-                  <a:srgbClr val="AFAFAF"/>
-                </a:solidFill>
-              </a:rPr>
-              <a:t>5.2  </a:t>
-            </a:r>
-            <a:r>
-              <a:t>환경 점검 미리보기</a:t>
-            </a:r>
-          </a:p>
-          <a:p>
-            <a:pPr>
-              <a:spcAft>
-                <a:spcPts val="1000"/>
-              </a:spcAft>
-            </a:pPr>
-            <a:r>
-              <a:rPr>
-                <a:solidFill>
-                  <a:srgbClr val="AFAFAF"/>
-                </a:solidFill>
-              </a:rPr>
-              <a:t>5.3  </a:t>
-            </a:r>
-            <a:r>
-              <a:t>이번 주 할 일</a:t>
-            </a:r>
+                <a:latin typeface="Pretendard Medium"/>
+                <a:ea typeface="Pretendard Medium"/>
+                <a:cs typeface="Pretendard Medium"/>
+              </a:defRPr>
+            </a:lvl1pPr>
+          </a:lstStyle>
+          <a:p>
+            <a:pPr algn="r"/>
+            <a:fld id="{F7021451-1387-4CA6-816F-3879F97B5CBC}" type="slidenum">
+              <a:rPr b="0" lang="en-US"/>
+              <a:t>1009</a:t>
+            </a:fld>
+            <a:endParaRPr lang="en-US"/>
           </a:p>
         </p:txBody>
       </p:sp>
@@ -10390,7 +8901,7 @@
           <a:lstStyle/>
           <a:p>
             <a:r>
-              <a:t>5.1 실습 도구</a:t>
+              <a:t>5.4 이번 주 할 일</a:t>
             </a:r>
           </a:p>
         </p:txBody>
@@ -10433,31 +8944,31 @@
           <a:p>
             <a:pPr/>
             <a:r>
-              <a:t>기본: Python·pandas·scikit-learn</a:t>
+              <a:t>주교재 두 권 준비</a:t>
             </a:r>
           </a:p>
           <a:p>
             <a:pPr/>
             <a:r>
-              <a:t>공간 데이터: GeoPandas</a:t>
+              <a:t>수요일 실습: 12:00, AI공학관 210호</a:t>
+            </a:r>
+          </a:p>
+          <a:p>
+            <a:pPr lvl="1"/>
+            <a:r>
+              <a:t>Python 환경 점검</a:t>
             </a:r>
           </a:p>
           <a:p>
             <a:pPr/>
             <a:r>
-              <a:t>신경망 구현: numpy</a:t>
-            </a:r>
-          </a:p>
-          <a:p>
-            <a:pPr/>
-            <a:r>
-              <a:t>10주차 이후: PyTorch</a:t>
-            </a:r>
-          </a:p>
-          <a:p>
-            <a:pPr/>
-            <a:r>
-              <a:t>설치가 어려운 경우: Google Colab</a:t>
+              <a:t>다음 주: 머신러닝 개요 (핸즈온 Ch1)</a:t>
+            </a:r>
+          </a:p>
+          <a:p>
+            <a:pPr lvl="1"/>
+            <a:r>
+              <a:t>개발 환경·AI 코딩 도구 세팅</a:t>
             </a:r>
           </a:p>
         </p:txBody>
@@ -10544,7 +9055,7 @@
           <a:lstStyle/>
           <a:p>
             <a:r>
-              <a:t>5.2 환경 점검 미리보기</a:t>
+              <a:t>감사합니다</a:t>
             </a:r>
           </a:p>
         </p:txBody>
@@ -10565,426 +9076,7 @@
           <a:lstStyle/>
           <a:p>
             <a:r>
-              <a:t>5. 실습 환경과 다음 주</a:t>
-            </a:r>
-          </a:p>
-        </p:txBody>
-      </p:sp>
-      <p:sp>
-        <p:nvSpPr>
-          <p:cNvPr id="4" name="Text Placeholder 3"/>
-          <p:cNvSpPr>
-            <a:spLocks noGrp="1"/>
-          </p:cNvSpPr>
-          <p:nvPr>
-            <p:ph type="body" idx="102"/>
-          </p:nvPr>
-        </p:nvSpPr>
-        <p:spPr/>
-        <p:txBody>
-          <a:bodyPr/>
-          <a:lstStyle/>
-          <a:p>
-            <a:pPr/>
-            <a:r>
-              <a:t>확인 항목: numpy·pandas·scikit-learn import</a:t>
-            </a:r>
-          </a:p>
-          <a:p>
-            <a:pPr/>
-            <a:r>
-              <a:t>로컬 환경이 어려운 경우 Google Colab 사용</a:t>
-            </a:r>
-          </a:p>
-        </p:txBody>
-      </p:sp>
-      <p:sp>
-        <p:nvSpPr>
-          <p:cNvPr id="5" name="Text Placeholder 4"/>
-          <p:cNvSpPr>
-            <a:spLocks noGrp="1"/>
-          </p:cNvSpPr>
-          <p:nvPr>
-            <p:ph type="body" idx="103"/>
-          </p:nvPr>
-        </p:nvSpPr>
-        <p:spPr/>
-        <p:txBody>
-          <a:bodyPr/>
-          <a:lstStyle/>
-          <a:p>
-            <a:r>
-              <a:rPr b="1"/>
-              <a:t>import</a:t>
-            </a:r>
-            <a:r>
-              <a:t> numpy </a:t>
-            </a:r>
-            <a:r>
-              <a:rPr b="1"/>
-              <a:t>as</a:t>
-            </a:r>
-            <a:r>
-              <a:t> np</a:t>
-            </a:r>
-          </a:p>
-          <a:p>
-            <a:r>
-              <a:rPr b="1"/>
-              <a:t>import</a:t>
-            </a:r>
-            <a:r>
-              <a:t> pandas </a:t>
-            </a:r>
-            <a:r>
-              <a:rPr b="1"/>
-              <a:t>as</a:t>
-            </a:r>
-            <a:r>
-              <a:t> pd</a:t>
-            </a:r>
-          </a:p>
-          <a:p>
-            <a:r>
-              <a:rPr b="1"/>
-              <a:t>import</a:t>
-            </a:r>
-            <a:r>
-              <a:t> sklearn</a:t>
-            </a:r>
-          </a:p>
-          <a:p/>
-          <a:p>
-            <a:r>
-              <a:rPr b="1"/>
-              <a:t>print</a:t>
-            </a:r>
-            <a:r>
-              <a:t>(np.__version__)</a:t>
-            </a:r>
-          </a:p>
-          <a:p>
-            <a:r>
-              <a:rPr b="1"/>
-              <a:t>print</a:t>
-            </a:r>
-            <a:r>
-              <a:t>(pd.__version__)</a:t>
-            </a:r>
-          </a:p>
-          <a:p>
-            <a:r>
-              <a:rPr b="1"/>
-              <a:t>print</a:t>
-            </a:r>
-            <a:r>
-              <a:t>(sklearn.__version__)</a:t>
-            </a:r>
-          </a:p>
-          <a:p/>
-          <a:p>
-            <a:r>
-              <a:t>df = pd.DataFrame({</a:t>
-            </a:r>
-          </a:p>
-          <a:p>
-            <a:r>
-              <a:t>    "mode": ["bus", "subway", "taxi"],</a:t>
-            </a:r>
-          </a:p>
-          <a:p>
-            <a:r>
-              <a:t>    "trips": [420, 310, 88],</a:t>
-            </a:r>
-          </a:p>
-          <a:p>
-            <a:r>
-              <a:t>})</a:t>
-            </a:r>
-          </a:p>
-          <a:p>
-            <a:r>
-              <a:rPr b="1"/>
-              <a:t>print</a:t>
-            </a:r>
-            <a:r>
-              <a:t>(df["trips"].mean())  </a:t>
-            </a:r>
-            <a:r>
-              <a:rPr>
-                <a:solidFill>
-                  <a:srgbClr val="5E5E5E"/>
-                </a:solidFill>
-              </a:rPr>
-              <a:t># (결과) 272.67</a:t>
-            </a:r>
-          </a:p>
-        </p:txBody>
-      </p:sp>
-      <p:sp>
-        <p:nvSpPr>
-          <p:cNvPr id="25" name="Slide Number Placeholder 0"/>
-          <p:cNvSpPr>
-            <a:spLocks noGrp="1"/>
-          </p:cNvSpPr>
-          <p:nvPr>
-            <p:ph type="sldNum" sz="quarter" idx="4294967295"/>
-          </p:nvPr>
-        </p:nvSpPr>
-        <p:spPr>
-          <a:xfrm>
-            <a:off x="10591495" y="6355080"/>
-            <a:ext cx="914400" cy="274320"/>
-          </a:xfrm>
-          <a:prstGeom prst="rect">
-            <a:avLst/>
-          </a:prstGeom>
-          <a:extLst>
-            <a:ext uri="{C572A759-6A51-4108-AA02-DFA0A04FC94B}">
-              <ma14:wrappingTextBoxFlag xmlns:ma14="http://schemas.microsoft.com/office/mac/drawingml/2011/main" val="0"/>
-            </a:ext>
-          </a:extLst>
-        </p:spPr>
-        <p:txBody>
-          <a:bodyPr/>
-          <a:lstStyle>
-            <a:lvl1pPr>
-              <a:defRPr sz="1000">
-                <a:solidFill>
-                  <a:srgbClr val="AFAFAF"/>
-                </a:solidFill>
-                <a:latin typeface="Pretendard Medium"/>
-                <a:ea typeface="Pretendard Medium"/>
-                <a:cs typeface="Pretendard Medium"/>
-              </a:defRPr>
-            </a:lvl1pPr>
-          </a:lstStyle>
-          <a:p>
-            <a:pPr algn="r"/>
-            <a:fld id="{F7021451-1387-4CA6-816F-3879F97B5CBC}" type="slidenum">
-              <a:rPr b="0" lang="en-US"/>
-              <a:t>1009</a:t>
-            </a:fld>
-            <a:endParaRPr lang="en-US"/>
-          </a:p>
-        </p:txBody>
-      </p:sp>
-    </p:spTree>
-  </p:cSld>
-  <p:clrMapOvr>
-    <a:masterClrMapping/>
-  </p:clrMapOvr>
-</p:sld>
-</file>
-
-<file path=ppt/slides/slide28.xml><?xml version="1.0" encoding="utf-8"?>
-<p:sld xmlns:a="http://schemas.openxmlformats.org/drawingml/2006/main" xmlns:p="http://schemas.openxmlformats.org/presentationml/2006/main" xmlns:r="http://schemas.openxmlformats.org/officeDocument/2006/relationships">
-  <p:cSld>
-    <p:spTree>
-      <p:nvGrpSpPr>
-        <p:cNvPr id="1" name=""/>
-        <p:cNvGrpSpPr/>
-        <p:nvPr/>
-      </p:nvGrpSpPr>
-      <p:grpSpPr/>
-      <p:sp>
-        <p:nvSpPr>
-          <p:cNvPr id="2" name="Title 1"/>
-          <p:cNvSpPr>
-            <a:spLocks noGrp="1"/>
-          </p:cNvSpPr>
-          <p:nvPr>
-            <p:ph type="title" idx="100"/>
-          </p:nvPr>
-        </p:nvSpPr>
-        <p:spPr/>
-        <p:txBody>
-          <a:bodyPr/>
-          <a:lstStyle/>
-          <a:p>
-            <a:r>
-              <a:t>5.3 이번 주 할 일</a:t>
-            </a:r>
-          </a:p>
-        </p:txBody>
-      </p:sp>
-      <p:sp>
-        <p:nvSpPr>
-          <p:cNvPr id="3" name="Text Placeholder 2"/>
-          <p:cNvSpPr>
-            <a:spLocks noGrp="1"/>
-          </p:cNvSpPr>
-          <p:nvPr>
-            <p:ph type="body" idx="101"/>
-          </p:nvPr>
-        </p:nvSpPr>
-        <p:spPr/>
-        <p:txBody>
-          <a:bodyPr/>
-          <a:lstStyle/>
-          <a:p>
-            <a:r>
-              <a:t>5. 실습 환경과 다음 주</a:t>
-            </a:r>
-          </a:p>
-        </p:txBody>
-      </p:sp>
-      <p:sp>
-        <p:nvSpPr>
-          <p:cNvPr id="4" name="Text Placeholder 3"/>
-          <p:cNvSpPr>
-            <a:spLocks noGrp="1"/>
-          </p:cNvSpPr>
-          <p:nvPr>
-            <p:ph type="body" idx="102"/>
-          </p:nvPr>
-        </p:nvSpPr>
-        <p:spPr/>
-        <p:txBody>
-          <a:bodyPr/>
-          <a:lstStyle/>
-          <a:p>
-            <a:pPr/>
-            <a:r>
-              <a:t>주교재 두 권 준비</a:t>
-            </a:r>
-          </a:p>
-          <a:p>
-            <a:pPr lvl="1"/>
-            <a:r>
-              <a:t>밑바닥 Ch1(헬로 파이썬)은 2주차 자습 과제</a:t>
-            </a:r>
-          </a:p>
-          <a:p>
-            <a:pPr/>
-            <a:r>
-              <a:t>수요일 실습: 12:00, AI공학관 210호</a:t>
-            </a:r>
-          </a:p>
-          <a:p>
-            <a:pPr lvl="1"/>
-            <a:r>
-              <a:t>Python 환경 설정</a:t>
-            </a:r>
-          </a:p>
-          <a:p>
-            <a:pPr/>
-            <a:r>
-              <a:t>다음 주: 모빌리티 데이터의 이해</a:t>
-            </a:r>
-          </a:p>
-          <a:p>
-            <a:pPr lvl="1"/>
-            <a:r>
-              <a:t>GPS 궤적·교통카드·OD·링크 속도</a:t>
-            </a:r>
-          </a:p>
-        </p:txBody>
-      </p:sp>
-      <p:sp>
-        <p:nvSpPr>
-          <p:cNvPr id="25" name="Slide Number Placeholder 0"/>
-          <p:cNvSpPr>
-            <a:spLocks noGrp="1"/>
-          </p:cNvSpPr>
-          <p:nvPr>
-            <p:ph type="sldNum" sz="quarter" idx="4294967295"/>
-          </p:nvPr>
-        </p:nvSpPr>
-        <p:spPr>
-          <a:xfrm>
-            <a:off x="10591495" y="6355080"/>
-            <a:ext cx="914400" cy="274320"/>
-          </a:xfrm>
-          <a:prstGeom prst="rect">
-            <a:avLst/>
-          </a:prstGeom>
-          <a:extLst>
-            <a:ext uri="{C572A759-6A51-4108-AA02-DFA0A04FC94B}">
-              <ma14:wrappingTextBoxFlag xmlns:ma14="http://schemas.microsoft.com/office/mac/drawingml/2011/main" val="0"/>
-            </a:ext>
-          </a:extLst>
-        </p:spPr>
-        <p:txBody>
-          <a:bodyPr/>
-          <a:lstStyle>
-            <a:lvl1pPr>
-              <a:defRPr sz="1000">
-                <a:solidFill>
-                  <a:srgbClr val="AFAFAF"/>
-                </a:solidFill>
-                <a:latin typeface="Pretendard Medium"/>
-                <a:ea typeface="Pretendard Medium"/>
-                <a:cs typeface="Pretendard Medium"/>
-              </a:defRPr>
-            </a:lvl1pPr>
-          </a:lstStyle>
-          <a:p>
-            <a:pPr algn="r"/>
-            <a:fld id="{F7021451-1387-4CA6-816F-3879F97B5CBC}" type="slidenum">
-              <a:rPr b="0" lang="en-US"/>
-              <a:t>1004</a:t>
-            </a:fld>
-            <a:endParaRPr lang="en-US"/>
-          </a:p>
-        </p:txBody>
-      </p:sp>
-    </p:spTree>
-  </p:cSld>
-  <p:clrMapOvr>
-    <a:masterClrMapping/>
-  </p:clrMapOvr>
-</p:sld>
-</file>
-
-<file path=ppt/slides/slide29.xml><?xml version="1.0" encoding="utf-8"?>
-<p:sld xmlns:a="http://schemas.openxmlformats.org/drawingml/2006/main" xmlns:p="http://schemas.openxmlformats.org/presentationml/2006/main" xmlns:r="http://schemas.openxmlformats.org/officeDocument/2006/relationships">
-  <p:cSld>
-    <p:spTree>
-      <p:nvGrpSpPr>
-        <p:cNvPr id="1" name=""/>
-        <p:cNvGrpSpPr/>
-        <p:nvPr/>
-      </p:nvGrpSpPr>
-      <p:grpSpPr/>
-      <p:sp>
-        <p:nvSpPr>
-          <p:cNvPr id="2" name="Title 1"/>
-          <p:cNvSpPr>
-            <a:spLocks noGrp="1"/>
-          </p:cNvSpPr>
-          <p:nvPr>
-            <p:ph type="title" idx="100"/>
-          </p:nvPr>
-        </p:nvSpPr>
-        <p:spPr/>
-        <p:txBody>
-          <a:bodyPr/>
-          <a:lstStyle/>
-          <a:p>
-            <a:r>
-              <a:t>감사합니다</a:t>
-            </a:r>
-          </a:p>
-        </p:txBody>
-      </p:sp>
-      <p:sp>
-        <p:nvSpPr>
-          <p:cNvPr id="3" name="Text Placeholder 2"/>
-          <p:cNvSpPr>
-            <a:spLocks noGrp="1"/>
-          </p:cNvSpPr>
-          <p:nvPr>
-            <p:ph type="body" idx="101"/>
-          </p:nvPr>
-        </p:nvSpPr>
-        <p:spPr/>
-        <p:txBody>
-          <a:bodyPr/>
-          <a:lstStyle/>
-          <a:p>
-            <a:r>
-              <a:t>다음 주 — 모빌리티 데이터의 이해</a:t>
+              <a:t>다음 주 — 머신러닝 개요와 개발 환경 세팅</a:t>
             </a:r>
           </a:p>
         </p:txBody>
@@ -11099,7 +9191,7 @@
               <a:t>1.1  </a:t>
             </a:r>
             <a:r>
-              <a:t>교과목 개요</a:t>
+              <a:t>수업 내용</a:t>
             </a:r>
           </a:p>
           <a:p>
@@ -11135,25 +9227,7 @@
               <a:t>1.3  </a:t>
             </a:r>
             <a:r>
-              <a:t>모빌리티 트랙에서의 위치</a:t>
-            </a:r>
-          </a:p>
-          <a:p>
-            <a:pPr>
-              <a:spcAft>
-                <a:spcPts val="1000"/>
-              </a:spcAft>
-            </a:pPr>
-            <a:r>
-              <a:rPr>
-                <a:solidFill>
-                  <a:srgbClr val="AFAFAF"/>
-                </a:solidFill>
-              </a:rPr>
-              <a:t>1.4  </a:t>
-            </a:r>
-            <a:r>
-              <a:t>다루지 않는 것</a:t>
+              <a:t>교통 &amp; 모빌리티 트랙에서의 위치</a:t>
             </a:r>
           </a:p>
         </p:txBody>
@@ -11192,7 +9266,7 @@
           <a:lstStyle/>
           <a:p>
             <a:r>
-              <a:t>1.1 교과목 개요</a:t>
+              <a:t>1.1 수업 내용</a:t>
             </a:r>
           </a:p>
         </p:txBody>
@@ -11372,19 +9446,19 @@
           <a:p>
             <a:pPr/>
             <a:r>
-              <a:t>6~11주: numpy로 신경망의 주요 연산 구현</a:t>
+              <a:t>6~12주: 신경망 기초, PyTorch, Attention·Transformer</a:t>
             </a:r>
           </a:p>
           <a:p>
             <a:pPr lvl="1"/>
             <a:r>
-              <a:t>『밑바닥부터 시작하는 딥러닝 1』 Ch2~8</a:t>
+              <a:t>『밑바닥부터 시작하는 딥러닝 1』 Ch2~6 + 강의노트</a:t>
             </a:r>
           </a:p>
           <a:p>
             <a:pPr/>
             <a:r>
-              <a:t>12~14주: 수요 예측·ETA·강화학습 적용</a:t>
+              <a:t>13~14주: 서울시 BIS 기반 노선별 버스 ETA</a:t>
             </a:r>
           </a:p>
         </p:txBody>
@@ -11471,7 +9545,7 @@
           <a:lstStyle/>
           <a:p>
             <a:r>
-              <a:t>1.3 모빌리티 트랙에서의 위치</a:t>
+              <a:t>1.3 교통 &amp; 모빌리티 트랙에서의 위치</a:t>
             </a:r>
           </a:p>
         </p:txBody>
@@ -11965,12 +10039,12 @@
       <p:grpSpPr/>
       <p:sp>
         <p:nvSpPr>
-          <p:cNvPr id="2" name="Title 1"/>
-          <p:cNvSpPr>
-            <a:spLocks noGrp="1"/>
-          </p:cNvSpPr>
-          <p:nvPr>
-            <p:ph type="title" idx="100"/>
+          <p:cNvPr id="2" name="Text Placeholder 1"/>
+          <p:cNvSpPr>
+            <a:spLocks noGrp="1"/>
+          </p:cNvSpPr>
+          <p:nvPr>
+            <p:ph type="body" idx="100"/>
           </p:nvPr>
         </p:nvSpPr>
         <p:spPr/>
@@ -11979,19 +10053,19 @@
           <a:lstStyle/>
           <a:p>
             <a:r>
-              <a:t>1.4 다루지 않는 것</a:t>
-            </a:r>
-          </a:p>
-        </p:txBody>
-      </p:sp>
-      <p:sp>
-        <p:nvSpPr>
-          <p:cNvPr id="3" name="Text Placeholder 2"/>
-          <p:cNvSpPr>
-            <a:spLocks noGrp="1"/>
-          </p:cNvSpPr>
-          <p:nvPr>
-            <p:ph type="body" idx="101"/>
+              <a:t>02</a:t>
+            </a:r>
+          </a:p>
+        </p:txBody>
+      </p:sp>
+      <p:sp>
+        <p:nvSpPr>
+          <p:cNvPr id="3" name="Title 2"/>
+          <p:cNvSpPr>
+            <a:spLocks noGrp="1"/>
+          </p:cNvSpPr>
+          <p:nvPr>
+            <p:ph type="title" idx="101"/>
           </p:nvPr>
         </p:nvSpPr>
         <p:spPr/>
@@ -12000,7 +10074,7 @@
           <a:lstStyle/>
           <a:p>
             <a:r>
-              <a:t>1. 교과목 개요</a:t>
+              <a:t>AI 모빌리티 적용 분야</a:t>
             </a:r>
           </a:p>
         </p:txBody>
@@ -12020,76 +10094,40 @@
           <a:bodyPr/>
           <a:lstStyle/>
           <a:p>
-            <a:pPr/>
-            <a:r>
-              <a:t>최적화·라우팅·배차, 시뮬레이션 구축: 「스마트 교통물류」</a:t>
-            </a:r>
-          </a:p>
-          <a:p>
-            <a:pPr/>
-            <a:r>
-              <a:t>LLM·RAG·AI 에이전트: 별도 과목</a:t>
-            </a:r>
-          </a:p>
-          <a:p>
-            <a:pPr/>
-            <a:r>
-              <a:t>RNN·Transformer: ETA 사례에서 개념만 소개</a:t>
-            </a:r>
-          </a:p>
-          <a:p>
-            <a:pPr/>
-            <a:r>
-              <a:t>객체탐지: 실습 제외, CNN 원리까지</a:t>
-            </a:r>
-          </a:p>
-        </p:txBody>
-      </p:sp>
-      <p:sp>
-        <p:nvSpPr>
-          <p:cNvPr id="25" name="Slide Number Placeholder 0"/>
-          <p:cNvSpPr>
-            <a:spLocks noGrp="1"/>
-          </p:cNvSpPr>
-          <p:nvPr>
-            <p:ph type="sldNum" sz="quarter" idx="4294967295"/>
-          </p:nvPr>
-        </p:nvSpPr>
-        <p:spPr>
-          <a:xfrm>
-            <a:off x="10591495" y="6355080"/>
-            <a:ext cx="914400" cy="274320"/>
-          </a:xfrm>
-          <a:prstGeom prst="rect">
-            <a:avLst/>
-          </a:prstGeom>
-          <a:extLst>
-            <a:ext uri="{C572A759-6A51-4108-AA02-DFA0A04FC94B}">
-              <ma14:wrappingTextBoxFlag xmlns:ma14="http://schemas.microsoft.com/office/mac/drawingml/2011/main" val="0"/>
-            </a:ext>
-          </a:extLst>
-        </p:spPr>
-        <p:txBody>
-          <a:bodyPr/>
-          <a:lstStyle>
-            <a:lvl1pPr>
-              <a:defRPr sz="1000">
+            <a:pPr>
+              <a:spcAft>
+                <a:spcPts val="1000"/>
+              </a:spcAft>
+            </a:pPr>
+            <a:r>
+              <a:rPr>
                 <a:solidFill>
                   <a:srgbClr val="AFAFAF"/>
                 </a:solidFill>
-                <a:latin typeface="Pretendard Medium"/>
-                <a:ea typeface="Pretendard Medium"/>
-                <a:cs typeface="Pretendard Medium"/>
-              </a:defRPr>
-            </a:lvl1pPr>
-          </a:lstStyle>
-          <a:p>
-            <a:pPr algn="r"/>
-            <a:fld id="{F7021451-1387-4CA6-816F-3879F97B5CBC}" type="slidenum">
-              <a:rPr b="0" lang="en-US"/>
-              <a:t>1004</a:t>
-            </a:fld>
-            <a:endParaRPr lang="en-US"/>
+              </a:rPr>
+              <a:t>2.1  </a:t>
+            </a:r>
+            <a:r>
+              <a:t>주요 예측 문제</a:t>
+            </a:r>
+          </a:p>
+          <a:p>
+            <a:pPr>
+              <a:spcAft>
+                <a:spcPts val="1000"/>
+              </a:spcAft>
+            </a:pPr>
+            <a:r>
+              <a:rPr>
+                <a:solidFill>
+                  <a:srgbClr val="AFAFAF"/>
+                </a:solidFill>
+              </a:rPr>
+              <a:t>2.2  </a:t>
+            </a:r>
+            <a:r>
+              <a:t>수업 적용 주제</a:t>
+            </a:r>
           </a:p>
         </p:txBody>
       </p:sp>
@@ -12113,12 +10151,12 @@
       <p:grpSpPr/>
       <p:sp>
         <p:nvSpPr>
-          <p:cNvPr id="2" name="Text Placeholder 1"/>
-          <p:cNvSpPr>
-            <a:spLocks noGrp="1"/>
-          </p:cNvSpPr>
-          <p:nvPr>
-            <p:ph type="body" idx="100"/>
+          <p:cNvPr id="2" name="Title 1"/>
+          <p:cNvSpPr>
+            <a:spLocks noGrp="1"/>
+          </p:cNvSpPr>
+          <p:nvPr>
+            <p:ph type="title" idx="100"/>
           </p:nvPr>
         </p:nvSpPr>
         <p:spPr/>
@@ -12127,19 +10165,19 @@
           <a:lstStyle/>
           <a:p>
             <a:r>
-              <a:t>02</a:t>
-            </a:r>
-          </a:p>
-        </p:txBody>
-      </p:sp>
-      <p:sp>
-        <p:nvSpPr>
-          <p:cNvPr id="3" name="Title 2"/>
-          <p:cNvSpPr>
-            <a:spLocks noGrp="1"/>
-          </p:cNvSpPr>
-          <p:nvPr>
-            <p:ph type="title" idx="101"/>
+              <a:t>2.1 주요 예측 문제</a:t>
+            </a:r>
+          </a:p>
+        </p:txBody>
+      </p:sp>
+      <p:sp>
+        <p:nvSpPr>
+          <p:cNvPr id="3" name="Text Placeholder 2"/>
+          <p:cNvSpPr>
+            <a:spLocks noGrp="1"/>
+          </p:cNvSpPr>
+          <p:nvPr>
+            <p:ph type="body" idx="101"/>
           </p:nvPr>
         </p:nvSpPr>
         <p:spPr/>
@@ -12148,7 +10186,7 @@
           <a:lstStyle/>
           <a:p>
             <a:r>
-              <a:t>AI 모빌리티 개관</a:t>
+              <a:t>2. AI 모빌리티 적용 분야</a:t>
             </a:r>
           </a:p>
         </p:txBody>
@@ -12168,76 +10206,628 @@
           <a:bodyPr/>
           <a:lstStyle/>
           <a:p>
-            <a:pPr>
-              <a:spcAft>
-                <a:spcPts val="1000"/>
-              </a:spcAft>
-            </a:pPr>
-            <a:r>
-              <a:rPr>
+            <a:r>
+              <a:t>표 2. 모빌리티 데이터와 예측 문제</a:t>
+            </a:r>
+          </a:p>
+        </p:txBody>
+      </p:sp>
+      <p:graphicFrame>
+        <p:nvGraphicFramePr>
+          <p:cNvPr id="5" name="Table Placeholder 4"/>
+          <p:cNvGraphicFramePr>
+            <a:graphicFrameLocks noGrp="1"/>
+          </p:cNvGraphicFramePr>
+          <p:nvPr>
+            <p:ph type="tbl" idx="103"/>
+          </p:nvPr>
+        </p:nvGraphicFramePr>
+        <p:xfrm>
+          <a:off x="685800" y="1828800"/>
+          <a:ext cx="10820095" cy="2946400"/>
+        </p:xfrm>
+        <a:graphic>
+          <a:graphicData uri="http://schemas.openxmlformats.org/drawingml/2006/table">
+            <a:tbl>
+              <a:tblPr firstRow="0" bandRow="0" firstCol="0" lastRow="0" lastCol="0" bandCol="0"/>
+              <a:tblGrid>
+                <a:gridCol w="3606698"/>
+                <a:gridCol w="3606698"/>
+                <a:gridCol w="3606699"/>
+              </a:tblGrid>
+              <a:tr h="406400">
+                <a:tc>
+                  <a:txBody>
+                    <a:bodyPr/>
+                    <a:lstStyle/>
+                    <a:p>
+                      <a:r>
+                        <a:rPr sz="1300" b="0">
+                          <a:solidFill>
+                            <a:srgbClr val="FFFFFF"/>
+                          </a:solidFill>
+                          <a:latin typeface="Pretendard Medium"/>
+                        </a:rPr>
+                        <a:t>데이터</a:t>
+                      </a:r>
+                    </a:p>
+                  </a:txBody>
+                  <a:tcPr marL="101600" marR="101600" marT="76200" marB="76200" anchor="ctr">
+                    <a:solidFill>
+                      <a:srgbClr val="000000"/>
+                    </a:solidFill>
+                    <a:lnL w="0">
+                      <a:noFill/>
+                    </a:lnL>
+                    <a:lnR w="0">
+                      <a:noFill/>
+                    </a:lnR>
+                    <a:lnT w="0">
+                      <a:noFill/>
+                    </a:lnT>
+                    <a:lnB w="0">
+                      <a:noFill/>
+                    </a:lnB>
+                  </a:tcPr>
+                </a:tc>
+                <a:tc>
+                  <a:txBody>
+                    <a:bodyPr/>
+                    <a:lstStyle/>
+                    <a:p>
+                      <a:r>
+                        <a:rPr sz="1300" b="0">
+                          <a:solidFill>
+                            <a:srgbClr val="FFFFFF"/>
+                          </a:solidFill>
+                          <a:latin typeface="Pretendard Medium"/>
+                        </a:rPr>
+                        <a:t>예측 문제</a:t>
+                      </a:r>
+                    </a:p>
+                  </a:txBody>
+                  <a:tcPr marL="101600" marR="101600" marT="76200" marB="76200" anchor="ctr">
+                    <a:solidFill>
+                      <a:srgbClr val="000000"/>
+                    </a:solidFill>
+                    <a:lnL w="0">
+                      <a:noFill/>
+                    </a:lnL>
+                    <a:lnR w="0">
+                      <a:noFill/>
+                    </a:lnR>
+                    <a:lnT w="0">
+                      <a:noFill/>
+                    </a:lnT>
+                    <a:lnB w="0">
+                      <a:noFill/>
+                    </a:lnB>
+                  </a:tcPr>
+                </a:tc>
+                <a:tc>
+                  <a:txBody>
+                    <a:bodyPr/>
+                    <a:lstStyle/>
+                    <a:p>
+                      <a:r>
+                        <a:rPr sz="1300" b="0">
+                          <a:solidFill>
+                            <a:srgbClr val="FFFFFF"/>
+                          </a:solidFill>
+                          <a:latin typeface="Pretendard Medium"/>
+                        </a:rPr>
+                        <a:t>활용 예시</a:t>
+                      </a:r>
+                    </a:p>
+                  </a:txBody>
+                  <a:tcPr marL="101600" marR="101600" marT="76200" marB="76200" anchor="ctr">
+                    <a:solidFill>
+                      <a:srgbClr val="000000"/>
+                    </a:solidFill>
+                    <a:lnL w="0">
+                      <a:noFill/>
+                    </a:lnL>
+                    <a:lnR w="0">
+                      <a:noFill/>
+                    </a:lnR>
+                    <a:lnT w="0">
+                      <a:noFill/>
+                    </a:lnT>
+                    <a:lnB w="0">
+                      <a:noFill/>
+                    </a:lnB>
+                  </a:tcPr>
+                </a:tc>
+              </a:tr>
+              <a:tr h="635000">
+                <a:tc>
+                  <a:txBody>
+                    <a:bodyPr/>
+                    <a:lstStyle/>
+                    <a:p>
+                      <a:r>
+                        <a:rPr sz="1300" b="1">
+                          <a:solidFill>
+                            <a:srgbClr val="000000"/>
+                          </a:solidFill>
+                          <a:latin typeface="Pretendard"/>
+                        </a:rPr>
+                        <a:t>버스 운행 이력</a:t>
+                      </a:r>
+                    </a:p>
+                  </a:txBody>
+                  <a:tcPr marL="101600" marR="101600" marT="101600" marB="101600" anchor="ctr">
+                    <a:solidFill>
+                      <a:srgbClr val="FFFFFF"/>
+                    </a:solidFill>
+                    <a:lnL w="0">
+                      <a:noFill/>
+                    </a:lnL>
+                    <a:lnR w="0">
+                      <a:noFill/>
+                    </a:lnR>
+                    <a:lnT w="0">
+                      <a:noFill/>
+                    </a:lnT>
+                    <a:lnB w="9525">
+                      <a:solidFill>
+                        <a:srgbClr val="E2E2E2"/>
+                      </a:solidFill>
+                    </a:lnB>
+                  </a:tcPr>
+                </a:tc>
+                <a:tc>
+                  <a:txBody>
+                    <a:bodyPr/>
+                    <a:lstStyle/>
+                    <a:p>
+                      <a:r>
+                        <a:rPr sz="1300" b="0">
+                          <a:solidFill>
+                            <a:srgbClr val="5E5E5E"/>
+                          </a:solidFill>
+                          <a:latin typeface="Pretendard Medium"/>
+                        </a:rPr>
+                        <a:t>도착시간·구간 통행시간</a:t>
+                      </a:r>
+                    </a:p>
+                  </a:txBody>
+                  <a:tcPr marL="101600" marR="101600" marT="101600" marB="101600" anchor="ctr">
+                    <a:solidFill>
+                      <a:srgbClr val="FFFFFF"/>
+                    </a:solidFill>
+                    <a:lnL w="0">
+                      <a:noFill/>
+                    </a:lnL>
+                    <a:lnR w="0">
+                      <a:noFill/>
+                    </a:lnR>
+                    <a:lnT w="0">
+                      <a:noFill/>
+                    </a:lnT>
+                    <a:lnB w="9525">
+                      <a:solidFill>
+                        <a:srgbClr val="E2E2E2"/>
+                      </a:solidFill>
+                    </a:lnB>
+                  </a:tcPr>
+                </a:tc>
+                <a:tc>
+                  <a:txBody>
+                    <a:bodyPr/>
+                    <a:lstStyle/>
+                    <a:p>
+                      <a:r>
+                        <a:rPr sz="1300" b="0">
+                          <a:solidFill>
+                            <a:srgbClr val="5E5E5E"/>
+                          </a:solidFill>
+                          <a:latin typeface="Pretendard Medium"/>
+                        </a:rPr>
+                        <a:t>BIS·도착정보 안내</a:t>
+                      </a:r>
+                    </a:p>
+                  </a:txBody>
+                  <a:tcPr marL="101600" marR="101600" marT="101600" marB="101600" anchor="ctr">
+                    <a:solidFill>
+                      <a:srgbClr val="FFFFFF"/>
+                    </a:solidFill>
+                    <a:lnL w="0">
+                      <a:noFill/>
+                    </a:lnL>
+                    <a:lnR w="0">
+                      <a:noFill/>
+                    </a:lnR>
+                    <a:lnT w="0">
+                      <a:noFill/>
+                    </a:lnT>
+                    <a:lnB w="9525">
+                      <a:solidFill>
+                        <a:srgbClr val="E2E2E2"/>
+                      </a:solidFill>
+                    </a:lnB>
+                  </a:tcPr>
+                </a:tc>
+              </a:tr>
+              <a:tr h="635000">
+                <a:tc>
+                  <a:txBody>
+                    <a:bodyPr/>
+                    <a:lstStyle/>
+                    <a:p>
+                      <a:r>
+                        <a:rPr sz="1300" b="1">
+                          <a:solidFill>
+                            <a:srgbClr val="000000"/>
+                          </a:solidFill>
+                          <a:latin typeface="Pretendard"/>
+                        </a:rPr>
+                        <a:t>대중교통 이용 이력</a:t>
+                      </a:r>
+                    </a:p>
+                  </a:txBody>
+                  <a:tcPr marL="101600" marR="101600" marT="101600" marB="101600" anchor="ctr">
+                    <a:solidFill>
+                      <a:srgbClr val="FFFFFF"/>
+                    </a:solidFill>
+                    <a:lnL w="0">
+                      <a:noFill/>
+                    </a:lnL>
+                    <a:lnR w="0">
+                      <a:noFill/>
+                    </a:lnR>
+                    <a:lnT w="0">
+                      <a:noFill/>
+                    </a:lnT>
+                    <a:lnB w="9525">
+                      <a:solidFill>
+                        <a:srgbClr val="E2E2E2"/>
+                      </a:solidFill>
+                    </a:lnB>
+                  </a:tcPr>
+                </a:tc>
+                <a:tc>
+                  <a:txBody>
+                    <a:bodyPr/>
+                    <a:lstStyle/>
+                    <a:p>
+                      <a:r>
+                        <a:rPr sz="1300" b="0">
+                          <a:solidFill>
+                            <a:srgbClr val="5E5E5E"/>
+                          </a:solidFill>
+                          <a:latin typeface="Pretendard Medium"/>
+                        </a:rPr>
+                        <a:t>시간대·지역별 수요</a:t>
+                      </a:r>
+                    </a:p>
+                  </a:txBody>
+                  <a:tcPr marL="101600" marR="101600" marT="101600" marB="101600" anchor="ctr">
+                    <a:solidFill>
+                      <a:srgbClr val="FFFFFF"/>
+                    </a:solidFill>
+                    <a:lnL w="0">
+                      <a:noFill/>
+                    </a:lnL>
+                    <a:lnR w="0">
+                      <a:noFill/>
+                    </a:lnR>
+                    <a:lnT w="0">
+                      <a:noFill/>
+                    </a:lnT>
+                    <a:lnB w="9525">
+                      <a:solidFill>
+                        <a:srgbClr val="E2E2E2"/>
+                      </a:solidFill>
+                    </a:lnB>
+                  </a:tcPr>
+                </a:tc>
+                <a:tc>
+                  <a:txBody>
+                    <a:bodyPr/>
+                    <a:lstStyle/>
+                    <a:p>
+                      <a:r>
+                        <a:rPr sz="1300" b="0">
+                          <a:solidFill>
+                            <a:srgbClr val="5E5E5E"/>
+                          </a:solidFill>
+                          <a:latin typeface="Pretendard Medium"/>
+                        </a:rPr>
+                        <a:t>배차계획</a:t>
+                      </a:r>
+                    </a:p>
+                  </a:txBody>
+                  <a:tcPr marL="101600" marR="101600" marT="101600" marB="101600" anchor="ctr">
+                    <a:solidFill>
+                      <a:srgbClr val="FFFFFF"/>
+                    </a:solidFill>
+                    <a:lnL w="0">
+                      <a:noFill/>
+                    </a:lnL>
+                    <a:lnR w="0">
+                      <a:noFill/>
+                    </a:lnR>
+                    <a:lnT w="0">
+                      <a:noFill/>
+                    </a:lnT>
+                    <a:lnB w="9525">
+                      <a:solidFill>
+                        <a:srgbClr val="E2E2E2"/>
+                      </a:solidFill>
+                    </a:lnB>
+                  </a:tcPr>
+                </a:tc>
+              </a:tr>
+              <a:tr h="635000">
+                <a:tc>
+                  <a:txBody>
+                    <a:bodyPr/>
+                    <a:lstStyle/>
+                    <a:p>
+                      <a:r>
+                        <a:rPr sz="1300" b="1">
+                          <a:solidFill>
+                            <a:srgbClr val="000000"/>
+                          </a:solidFill>
+                          <a:latin typeface="Pretendard"/>
+                        </a:rPr>
+                        <a:t>링크 속도·GPS 궤적</a:t>
+                      </a:r>
+                    </a:p>
+                  </a:txBody>
+                  <a:tcPr marL="101600" marR="101600" marT="101600" marB="101600" anchor="ctr">
+                    <a:solidFill>
+                      <a:srgbClr val="FFFFFF"/>
+                    </a:solidFill>
+                    <a:lnL w="0">
+                      <a:noFill/>
+                    </a:lnL>
+                    <a:lnR w="0">
+                      <a:noFill/>
+                    </a:lnR>
+                    <a:lnT w="0">
+                      <a:noFill/>
+                    </a:lnT>
+                    <a:lnB w="9525">
+                      <a:solidFill>
+                        <a:srgbClr val="E2E2E2"/>
+                      </a:solidFill>
+                    </a:lnB>
+                  </a:tcPr>
+                </a:tc>
+                <a:tc>
+                  <a:txBody>
+                    <a:bodyPr/>
+                    <a:lstStyle/>
+                    <a:p>
+                      <a:r>
+                        <a:rPr sz="1300" b="0">
+                          <a:solidFill>
+                            <a:srgbClr val="5E5E5E"/>
+                          </a:solidFill>
+                          <a:latin typeface="Pretendard Medium"/>
+                        </a:rPr>
+                        <a:t>통행시간</a:t>
+                      </a:r>
+                    </a:p>
+                  </a:txBody>
+                  <a:tcPr marL="101600" marR="101600" marT="101600" marB="101600" anchor="ctr">
+                    <a:solidFill>
+                      <a:srgbClr val="FFFFFF"/>
+                    </a:solidFill>
+                    <a:lnL w="0">
+                      <a:noFill/>
+                    </a:lnL>
+                    <a:lnR w="0">
+                      <a:noFill/>
+                    </a:lnR>
+                    <a:lnT w="0">
+                      <a:noFill/>
+                    </a:lnT>
+                    <a:lnB w="9525">
+                      <a:solidFill>
+                        <a:srgbClr val="E2E2E2"/>
+                      </a:solidFill>
+                    </a:lnB>
+                  </a:tcPr>
+                </a:tc>
+                <a:tc>
+                  <a:txBody>
+                    <a:bodyPr/>
+                    <a:lstStyle/>
+                    <a:p>
+                      <a:r>
+                        <a:rPr sz="1300" b="0">
+                          <a:solidFill>
+                            <a:srgbClr val="5E5E5E"/>
+                          </a:solidFill>
+                          <a:latin typeface="Pretendard Medium"/>
+                        </a:rPr>
+                        <a:t>경로 안내</a:t>
+                      </a:r>
+                    </a:p>
+                  </a:txBody>
+                  <a:tcPr marL="101600" marR="101600" marT="101600" marB="101600" anchor="ctr">
+                    <a:solidFill>
+                      <a:srgbClr val="FFFFFF"/>
+                    </a:solidFill>
+                    <a:lnL w="0">
+                      <a:noFill/>
+                    </a:lnL>
+                    <a:lnR w="0">
+                      <a:noFill/>
+                    </a:lnR>
+                    <a:lnT w="0">
+                      <a:noFill/>
+                    </a:lnT>
+                    <a:lnB w="9525">
+                      <a:solidFill>
+                        <a:srgbClr val="E2E2E2"/>
+                      </a:solidFill>
+                    </a:lnB>
+                  </a:tcPr>
+                </a:tc>
+              </a:tr>
+              <a:tr h="635000">
+                <a:tc>
+                  <a:txBody>
+                    <a:bodyPr/>
+                    <a:lstStyle/>
+                    <a:p>
+                      <a:r>
+                        <a:rPr sz="1300" b="1">
+                          <a:solidFill>
+                            <a:srgbClr val="000000"/>
+                          </a:solidFill>
+                          <a:latin typeface="Pretendard"/>
+                        </a:rPr>
+                        <a:t>공유모빌리티 이용 이력</a:t>
+                      </a:r>
+                    </a:p>
+                  </a:txBody>
+                  <a:tcPr marL="101600" marR="101600" marT="101600" marB="101600" anchor="ctr">
+                    <a:solidFill>
+                      <a:srgbClr val="FFFFFF"/>
+                    </a:solidFill>
+                    <a:lnL w="0">
+                      <a:noFill/>
+                    </a:lnL>
+                    <a:lnR w="0">
+                      <a:noFill/>
+                    </a:lnR>
+                    <a:lnT w="0">
+                      <a:noFill/>
+                    </a:lnT>
+                    <a:lnB w="9525">
+                      <a:solidFill>
+                        <a:srgbClr val="E2E2E2"/>
+                      </a:solidFill>
+                    </a:lnB>
+                  </a:tcPr>
+                </a:tc>
+                <a:tc>
+                  <a:txBody>
+                    <a:bodyPr/>
+                    <a:lstStyle/>
+                    <a:p>
+                      <a:r>
+                        <a:rPr sz="1300" b="0">
+                          <a:solidFill>
+                            <a:srgbClr val="5E5E5E"/>
+                          </a:solidFill>
+                          <a:latin typeface="Pretendard Medium"/>
+                        </a:rPr>
+                        <a:t>대여·반납 수요</a:t>
+                      </a:r>
+                    </a:p>
+                  </a:txBody>
+                  <a:tcPr marL="101600" marR="101600" marT="101600" marB="101600" anchor="ctr">
+                    <a:solidFill>
+                      <a:srgbClr val="FFFFFF"/>
+                    </a:solidFill>
+                    <a:lnL w="0">
+                      <a:noFill/>
+                    </a:lnL>
+                    <a:lnR w="0">
+                      <a:noFill/>
+                    </a:lnR>
+                    <a:lnT w="0">
+                      <a:noFill/>
+                    </a:lnT>
+                    <a:lnB w="9525">
+                      <a:solidFill>
+                        <a:srgbClr val="E2E2E2"/>
+                      </a:solidFill>
+                    </a:lnB>
+                  </a:tcPr>
+                </a:tc>
+                <a:tc>
+                  <a:txBody>
+                    <a:bodyPr/>
+                    <a:lstStyle/>
+                    <a:p>
+                      <a:r>
+                        <a:rPr sz="1300" b="0">
+                          <a:solidFill>
+                            <a:srgbClr val="5E5E5E"/>
+                          </a:solidFill>
+                          <a:latin typeface="Pretendard Medium"/>
+                        </a:rPr>
+                        <a:t>차량 재배치</a:t>
+                      </a:r>
+                    </a:p>
+                  </a:txBody>
+                  <a:tcPr marL="101600" marR="101600" marT="101600" marB="101600" anchor="ctr">
+                    <a:solidFill>
+                      <a:srgbClr val="FFFFFF"/>
+                    </a:solidFill>
+                    <a:lnL w="0">
+                      <a:noFill/>
+                    </a:lnL>
+                    <a:lnR w="0">
+                      <a:noFill/>
+                    </a:lnR>
+                    <a:lnT w="0">
+                      <a:noFill/>
+                    </a:lnT>
+                    <a:lnB w="9525">
+                      <a:solidFill>
+                        <a:srgbClr val="E2E2E2"/>
+                      </a:solidFill>
+                    </a:lnB>
+                  </a:tcPr>
+                </a:tc>
+              </a:tr>
+            </a:tbl>
+          </a:graphicData>
+        </a:graphic>
+      </p:graphicFrame>
+      <p:sp>
+        <p:nvSpPr>
+          <p:cNvPr id="25" name="Slide Number Placeholder 0"/>
+          <p:cNvSpPr>
+            <a:spLocks noGrp="1"/>
+          </p:cNvSpPr>
+          <p:nvPr>
+            <p:ph type="sldNum" sz="quarter" idx="4294967295"/>
+          </p:nvPr>
+        </p:nvSpPr>
+        <p:spPr>
+          <a:xfrm>
+            <a:off x="10591495" y="6355080"/>
+            <a:ext cx="914400" cy="274320"/>
+          </a:xfrm>
+          <a:prstGeom prst="rect">
+            <a:avLst/>
+          </a:prstGeom>
+          <a:extLst>
+            <a:ext uri="{C572A759-6A51-4108-AA02-DFA0A04FC94B}">
+              <ma14:wrappingTextBoxFlag xmlns:ma14="http://schemas.microsoft.com/office/mac/drawingml/2011/main" val="0"/>
+            </a:ext>
+          </a:extLst>
+        </p:spPr>
+        <p:txBody>
+          <a:bodyPr/>
+          <a:lstStyle>
+            <a:lvl1pPr>
+              <a:defRPr sz="1000">
                 <a:solidFill>
                   <a:srgbClr val="AFAFAF"/>
                 </a:solidFill>
-              </a:rPr>
-              <a:t>2.1  </a:t>
-            </a:r>
-            <a:r>
-              <a:t>자율주행 — 인지·판단·제어</a:t>
-            </a:r>
-          </a:p>
-          <a:p>
-            <a:pPr>
-              <a:spcAft>
-                <a:spcPts val="1000"/>
-              </a:spcAft>
-            </a:pPr>
-            <a:r>
-              <a:rPr>
-                <a:solidFill>
-                  <a:srgbClr val="AFAFAF"/>
-                </a:solidFill>
-              </a:rPr>
-              <a:t>2.2  </a:t>
-            </a:r>
-            <a:r>
-              <a:t>수요응답형 교통(DRT)</a:t>
-            </a:r>
-          </a:p>
-          <a:p>
-            <a:pPr>
-              <a:spcAft>
-                <a:spcPts val="1000"/>
-              </a:spcAft>
-            </a:pPr>
-            <a:r>
-              <a:rPr>
-                <a:solidFill>
-                  <a:srgbClr val="AFAFAF"/>
-                </a:solidFill>
-              </a:rPr>
-              <a:t>2.3  </a:t>
-            </a:r>
-            <a:r>
-              <a:t>MaaS와 통합 모빌리티</a:t>
-            </a:r>
-          </a:p>
-          <a:p>
-            <a:pPr>
-              <a:spcAft>
-                <a:spcPts val="1000"/>
-              </a:spcAft>
-            </a:pPr>
-            <a:r>
-              <a:rPr>
-                <a:solidFill>
-                  <a:srgbClr val="AFAFAF"/>
-                </a:solidFill>
-              </a:rPr>
-              <a:t>2.4  </a:t>
-            </a:r>
-            <a:r>
-              <a:t>AI가 실제로 쓰이는 지점</a:t>
-            </a:r>
+                <a:latin typeface="Pretendard Medium"/>
+                <a:ea typeface="Pretendard Medium"/>
+                <a:cs typeface="Pretendard Medium"/>
+              </a:defRPr>
+            </a:lvl1pPr>
+          </a:lstStyle>
+          <a:p>
+            <a:pPr algn="r"/>
+            <a:fld id="{F7021451-1387-4CA6-816F-3879F97B5CBC}" type="slidenum">
+              <a:rPr b="0" lang="en-US"/>
+              <a:t>1007</a:t>
+            </a:fld>
+            <a:endParaRPr lang="en-US"/>
           </a:p>
         </p:txBody>
       </p:sp>
@@ -12275,7 +10865,7 @@
           <a:lstStyle/>
           <a:p>
             <a:r>
-              <a:t>2.1 자율주행 — 인지·판단·제어</a:t>
+              <a:t>2.2 수업 적용 주제</a:t>
             </a:r>
           </a:p>
         </p:txBody>
@@ -12296,7 +10886,7 @@
           <a:lstStyle/>
           <a:p>
             <a:r>
-              <a:t>2. AI 모빌리티 개관</a:t>
+              <a:t>2. AI 모빌리티 적용 분야</a:t>
             </a:r>
           </a:p>
         </p:txBody>
@@ -12318,25 +10908,31 @@
           <a:p>
             <a:pPr/>
             <a:r>
-              <a:t>인지: 카메라·라이다 기반 차선·객체 인식</a:t>
+              <a:t>서울시 BIS 데이터 &amp; 스마트카드 데이터</a:t>
             </a:r>
           </a:p>
           <a:p>
             <a:pPr/>
             <a:r>
-              <a:t>판단: 주변 차량의 움직임 예측과 행동 선택</a:t>
+              <a:t>선정된 버스 노선별 모델 학습</a:t>
             </a:r>
           </a:p>
           <a:p>
             <a:pPr/>
             <a:r>
-              <a:t>제어: 조향·가감속 명령</a:t>
+              <a:t>정형 특성과 최근 구간 통행시간 시퀀스 활용</a:t>
             </a:r>
           </a:p>
           <a:p>
             <a:pPr/>
             <a:r>
-              <a:t>수업 범위: 11주차 CNN 원리와 구현</a:t>
+              <a:t>XGBoost·MLP·Transformer 비교</a:t>
+            </a:r>
+          </a:p>
+          <a:p>
+            <a:pPr/>
+            <a:r>
+              <a:t>날짜 기준 검증과 구간별 오차 분석</a:t>
             </a:r>
           </a:p>
         </p:txBody>
